--- a/slides/CSC270-Lecture-11-Data-Modeling-and-Database-Design.pptx
+++ b/slides/CSC270-Lecture-11-Data-Modeling-and-Database-Design.pptx
@@ -10,12 +10,20 @@
     <p:sldId id="258" r:id="rId4"/>
     <p:sldId id="259" r:id="rId5"/>
     <p:sldId id="260" r:id="rId6"/>
+    <p:sldId id="268" r:id="rId19"/>
     <p:sldId id="261" r:id="rId7"/>
     <p:sldId id="262" r:id="rId8"/>
+    <p:sldId id="269" r:id="rId20"/>
+    <p:sldId id="270" r:id="rId21"/>
     <p:sldId id="263" r:id="rId9"/>
+    <p:sldId id="271" r:id="rId22"/>
     <p:sldId id="264" r:id="rId10"/>
+    <p:sldId id="272" r:id="rId23"/>
     <p:sldId id="265" r:id="rId11"/>
+    <p:sldId id="273" r:id="rId24"/>
     <p:sldId id="266" r:id="rId12"/>
+    <p:sldId id="274" r:id="rId25"/>
+    <p:sldId id="275" r:id="rId26"/>
     <p:sldId id="267" r:id="rId13"/>
   </p:sldIdLst>
   <p:notesMasterIdLst>
@@ -1960,7 +1968,7 @@
               <a:buNone/>
             </a:pPr>
             <a:r>
-              <a:rPr lang="en-US" sz="1600" dirty="0">
+              <a:rPr lang="en-US" sz="1800" dirty="0">
                 <a:solidFill>
                   <a:srgbClr val="2FE6C4"/>
                 </a:solidFill>
@@ -1970,7 +1978,7 @@
               </a:rPr>
               <a:t>From a fuzzy business conversation to precise tables, columns, and keys</a:t>
             </a:r>
-            <a:endParaRPr lang="en-US" sz="1600" dirty="0"/>
+            <a:endParaRPr lang="en-US" sz="1800" dirty="0"/>
           </a:p>
         </p:txBody>
       </p:sp>
@@ -1999,7 +2007,7 @@
               <a:buNone/>
             </a:pPr>
             <a:r>
-              <a:rPr lang="en-US" sz="1400" dirty="0">
+              <a:rPr lang="en-US" sz="1800" dirty="0">
                 <a:solidFill>
                   <a:srgbClr val="B9BFC6"/>
                 </a:solidFill>
@@ -2009,7 +2017,7 @@
               </a:rPr>
               <a:t>CSC270 · Database Systems</a:t>
             </a:r>
-            <a:endParaRPr lang="en-US" sz="1400" dirty="0"/>
+            <a:endParaRPr lang="en-US" sz="1800" dirty="0"/>
           </a:p>
         </p:txBody>
       </p:sp>
@@ -2038,7 +2046,7 @@
               <a:buNone/>
             </a:pPr>
             <a:r>
-              <a:rPr lang="en-US" sz="1200" dirty="0">
+              <a:rPr lang="en-US" sz="1800" dirty="0">
                 <a:solidFill>
                   <a:srgbClr val="757C84"/>
                 </a:solidFill>
@@ -2048,7 +2056,7 @@
               </a:rPr>
               <a:t>COMSATS University Islamabad, Lahore Campus</a:t>
             </a:r>
-            <a:endParaRPr lang="en-US" sz="1200" dirty="0"/>
+            <a:endParaRPr lang="en-US" sz="1800" dirty="0"/>
           </a:p>
         </p:txBody>
       </p:sp>
@@ -2077,7 +2085,7 @@
               <a:buNone/>
             </a:pPr>
             <a:r>
-              <a:rPr lang="en-US" sz="1000" u="sng" dirty="0">
+              <a:rPr lang="en-US" sz="1200" u="sng" dirty="0">
                 <a:solidFill>
                   <a:srgbClr val="8A939B"/>
                 </a:solidFill>
@@ -2098,7 +2106,7 @@
               <a:buNone/>
             </a:pPr>
             <a:r>
-              <a:rPr lang="en-US" sz="1000" dirty="0">
+              <a:rPr lang="en-US" sz="1200" dirty="0">
                 <a:solidFill>
                   <a:srgbClr val="8A939B"/>
                 </a:solidFill>
@@ -2108,7 +2116,7 @@
               </a:rPr>
               <a:t>  ·  1</a:t>
             </a:r>
-            <a:endParaRPr lang="en-US" sz="1000" dirty="0"/>
+            <a:endParaRPr lang="en-US" sz="1200" dirty="0"/>
           </a:p>
         </p:txBody>
       </p:sp>
@@ -2258,7 +2266,7 @@
                         <a:buNone/>
                       </a:pPr>
                       <a:r>
-                        <a:rPr lang="en-US" sz="1250" b="1" dirty="0">
+                        <a:rPr lang="en-US" sz="1400" b="1" dirty="0">
                           <a:solidFill>
                             <a:srgbClr val="FFFFFF"/>
                           </a:solidFill>
@@ -2268,7 +2276,7 @@
                         </a:rPr>
                         <a:t>Consideration</a:t>
                       </a:r>
-                      <a:endParaRPr lang="en-US" sz="1250" dirty="0">
+                      <a:endParaRPr lang="en-US" sz="1400" dirty="0">
                         <a:latin typeface="Calibri" charset="0"/>
                         <a:ea typeface="Calibri" charset="0"/>
                         <a:cs typeface="Calibri" charset="0"/>
@@ -2326,7 +2334,7 @@
                         <a:buNone/>
                       </a:pPr>
                       <a:r>
-                        <a:rPr lang="en-US" sz="1250" b="1" dirty="0">
+                        <a:rPr lang="en-US" sz="1400" b="1" dirty="0">
                           <a:solidFill>
                             <a:srgbClr val="FFFFFF"/>
                           </a:solidFill>
@@ -2336,7 +2344,7 @@
                         </a:rPr>
                         <a:t>Question to Ask</a:t>
                       </a:r>
-                      <a:endParaRPr lang="en-US" sz="1250" dirty="0">
+                      <a:endParaRPr lang="en-US" sz="1400" dirty="0">
                         <a:latin typeface="Calibri" charset="0"/>
                         <a:ea typeface="Calibri" charset="0"/>
                         <a:cs typeface="Calibri" charset="0"/>
@@ -2396,7 +2404,7 @@
                         <a:buNone/>
                       </a:pPr>
                       <a:r>
-                        <a:rPr lang="en-US" sz="1250" dirty="0">
+                        <a:rPr lang="en-US" sz="1400" dirty="0">
                           <a:solidFill>
                             <a:srgbClr val="1F2429"/>
                           </a:solidFill>
@@ -2406,7 +2414,7 @@
                         </a:rPr>
                         <a:t>Redundancy</a:t>
                       </a:r>
-                      <a:endParaRPr lang="en-US" sz="1250" dirty="0">
+                      <a:endParaRPr lang="en-US" sz="1400" dirty="0">
                         <a:latin typeface="Calibri" charset="0"/>
                         <a:ea typeface="Calibri" charset="0"/>
                         <a:cs typeface="Calibri" charset="0"/>
@@ -2464,7 +2472,7 @@
                         <a:buNone/>
                       </a:pPr>
                       <a:r>
-                        <a:rPr lang="en-US" sz="1250" dirty="0">
+                        <a:rPr lang="en-US" sz="1400" dirty="0">
                           <a:solidFill>
                             <a:srgbClr val="1F2429"/>
                           </a:solidFill>
@@ -2474,7 +2482,7 @@
                         </a:rPr>
                         <a:t>Is any fact stored in more than one place?</a:t>
                       </a:r>
-                      <a:endParaRPr lang="en-US" sz="1250" dirty="0">
+                      <a:endParaRPr lang="en-US" sz="1400" dirty="0">
                         <a:latin typeface="Calibri" charset="0"/>
                         <a:ea typeface="Calibri" charset="0"/>
                         <a:cs typeface="Calibri" charset="0"/>
@@ -2534,7 +2542,7 @@
                         <a:buNone/>
                       </a:pPr>
                       <a:r>
-                        <a:rPr lang="en-US" sz="1250" dirty="0">
+                        <a:rPr lang="en-US" sz="1400" dirty="0">
                           <a:solidFill>
                             <a:srgbClr val="1F2429"/>
                           </a:solidFill>
@@ -2544,7 +2552,7 @@
                         </a:rPr>
                         <a:t>Update anomalies</a:t>
                       </a:r>
-                      <a:endParaRPr lang="en-US" sz="1250" dirty="0">
+                      <a:endParaRPr lang="en-US" sz="1400" dirty="0">
                         <a:latin typeface="Calibri" charset="0"/>
                         <a:ea typeface="Calibri" charset="0"/>
                         <a:cs typeface="Calibri" charset="0"/>
@@ -2602,7 +2610,7 @@
                         <a:buNone/>
                       </a:pPr>
                       <a:r>
-                        <a:rPr lang="en-US" sz="1250" dirty="0">
+                        <a:rPr lang="en-US" sz="1400" dirty="0">
                           <a:solidFill>
                             <a:srgbClr val="1F2429"/>
                           </a:solidFill>
@@ -2612,7 +2620,7 @@
                         </a:rPr>
                         <a:t>Can inserting, updating, or deleting one row corrupt or lose other facts?</a:t>
                       </a:r>
-                      <a:endParaRPr lang="en-US" sz="1250" dirty="0">
+                      <a:endParaRPr lang="en-US" sz="1400" dirty="0">
                         <a:latin typeface="Calibri" charset="0"/>
                         <a:ea typeface="Calibri" charset="0"/>
                         <a:cs typeface="Calibri" charset="0"/>
@@ -2672,7 +2680,7 @@
                         <a:buNone/>
                       </a:pPr>
                       <a:r>
-                        <a:rPr lang="en-US" sz="1250" dirty="0">
+                        <a:rPr lang="en-US" sz="1400" dirty="0">
                           <a:solidFill>
                             <a:srgbClr val="1F2429"/>
                           </a:solidFill>
@@ -2682,7 +2690,7 @@
                         </a:rPr>
                         <a:t>Appropriate keys</a:t>
                       </a:r>
-                      <a:endParaRPr lang="en-US" sz="1250" dirty="0">
+                      <a:endParaRPr lang="en-US" sz="1400" dirty="0">
                         <a:latin typeface="Calibri" charset="0"/>
                         <a:ea typeface="Calibri" charset="0"/>
                         <a:cs typeface="Calibri" charset="0"/>
@@ -2740,7 +2748,7 @@
                         <a:buNone/>
                       </a:pPr>
                       <a:r>
-                        <a:rPr lang="en-US" sz="1250" dirty="0">
+                        <a:rPr lang="en-US" sz="1400" dirty="0">
                           <a:solidFill>
                             <a:srgbClr val="1F2429"/>
                           </a:solidFill>
@@ -2750,7 +2758,7 @@
                         </a:rPr>
                         <a:t>Is the primary key stable and minimal?</a:t>
                       </a:r>
-                      <a:endParaRPr lang="en-US" sz="1250" dirty="0">
+                      <a:endParaRPr lang="en-US" sz="1400" dirty="0">
                         <a:latin typeface="Calibri" charset="0"/>
                         <a:ea typeface="Calibri" charset="0"/>
                         <a:cs typeface="Calibri" charset="0"/>
@@ -2810,7 +2818,7 @@
                         <a:buNone/>
                       </a:pPr>
                       <a:r>
-                        <a:rPr lang="en-US" sz="1250" dirty="0">
+                        <a:rPr lang="en-US" sz="1400" dirty="0">
                           <a:solidFill>
                             <a:srgbClr val="1F2429"/>
                           </a:solidFill>
@@ -2820,7 +2828,7 @@
                         </a:rPr>
                         <a:t>Referential integrity</a:t>
                       </a:r>
-                      <a:endParaRPr lang="en-US" sz="1250" dirty="0">
+                      <a:endParaRPr lang="en-US" sz="1400" dirty="0">
                         <a:latin typeface="Calibri" charset="0"/>
                         <a:ea typeface="Calibri" charset="0"/>
                         <a:cs typeface="Calibri" charset="0"/>
@@ -2878,7 +2886,7 @@
                         <a:buNone/>
                       </a:pPr>
                       <a:r>
-                        <a:rPr lang="en-US" sz="1250" dirty="0">
+                        <a:rPr lang="en-US" sz="1400" dirty="0">
                           <a:solidFill>
                             <a:srgbClr val="1F2429"/>
                           </a:solidFill>
@@ -2888,7 +2896,7 @@
                         </a:rPr>
                         <a:t>Does every foreign key correctly reference a real, enforced primary key?</a:t>
                       </a:r>
-                      <a:endParaRPr lang="en-US" sz="1250" dirty="0">
+                      <a:endParaRPr lang="en-US" sz="1400" dirty="0">
                         <a:latin typeface="Calibri" charset="0"/>
                         <a:ea typeface="Calibri" charset="0"/>
                         <a:cs typeface="Calibri" charset="0"/>
@@ -2948,7 +2956,7 @@
                         <a:buNone/>
                       </a:pPr>
                       <a:r>
-                        <a:rPr lang="en-US" sz="1250" dirty="0">
+                        <a:rPr lang="en-US" sz="1400" dirty="0">
                           <a:solidFill>
                             <a:srgbClr val="1F2429"/>
                           </a:solidFill>
@@ -2958,7 +2966,7 @@
                         </a:rPr>
                         <a:t>Growth and volume</a:t>
                       </a:r>
-                      <a:endParaRPr lang="en-US" sz="1250" dirty="0">
+                      <a:endParaRPr lang="en-US" sz="1400" dirty="0">
                         <a:latin typeface="Calibri" charset="0"/>
                         <a:ea typeface="Calibri" charset="0"/>
                         <a:cs typeface="Calibri" charset="0"/>
@@ -3016,7 +3024,7 @@
                         <a:buNone/>
                       </a:pPr>
                       <a:r>
-                        <a:rPr lang="en-US" sz="1250" dirty="0">
+                        <a:rPr lang="en-US" sz="1400" dirty="0">
                           <a:solidFill>
                             <a:srgbClr val="1F2429"/>
                           </a:solidFill>
@@ -3026,7 +3034,7 @@
                         </a:rPr>
                         <a:t>Will this design still perform acceptably at 100x the current data volume?</a:t>
                       </a:r>
-                      <a:endParaRPr lang="en-US" sz="1250" dirty="0">
+                      <a:endParaRPr lang="en-US" sz="1400" dirty="0">
                         <a:latin typeface="Calibri" charset="0"/>
                         <a:ea typeface="Calibri" charset="0"/>
                         <a:cs typeface="Calibri" charset="0"/>
@@ -3086,7 +3094,7 @@
                         <a:buNone/>
                       </a:pPr>
                       <a:r>
-                        <a:rPr lang="en-US" sz="1250" dirty="0">
+                        <a:rPr lang="en-US" sz="1400" dirty="0">
                           <a:solidFill>
                             <a:srgbClr val="1F2429"/>
                           </a:solidFill>
@@ -3096,7 +3104,7 @@
                         </a:rPr>
                         <a:t>Security and access</a:t>
                       </a:r>
-                      <a:endParaRPr lang="en-US" sz="1250" dirty="0">
+                      <a:endParaRPr lang="en-US" sz="1400" dirty="0">
                         <a:latin typeface="Calibri" charset="0"/>
                         <a:ea typeface="Calibri" charset="0"/>
                         <a:cs typeface="Calibri" charset="0"/>
@@ -3154,7 +3162,7 @@
                         <a:buNone/>
                       </a:pPr>
                       <a:r>
-                        <a:rPr lang="en-US" sz="1250" dirty="0">
+                        <a:rPr lang="en-US" sz="1400" dirty="0">
                           <a:solidFill>
                             <a:srgbClr val="1F2429"/>
                           </a:solidFill>
@@ -3164,7 +3172,7 @@
                         </a:rPr>
                         <a:t>Should every user see every column (e.g. salary)?</a:t>
                       </a:r>
-                      <a:endParaRPr lang="en-US" sz="1250" dirty="0">
+                      <a:endParaRPr lang="en-US" sz="1400" dirty="0">
                         <a:latin typeface="Calibri" charset="0"/>
                         <a:ea typeface="Calibri" charset="0"/>
                         <a:cs typeface="Calibri" charset="0"/>
@@ -3224,7 +3232,7 @@
                         <a:buNone/>
                       </a:pPr>
                       <a:r>
-                        <a:rPr lang="en-US" sz="1250" dirty="0">
+                        <a:rPr lang="en-US" sz="1400" dirty="0">
                           <a:solidFill>
                             <a:srgbClr val="1F2429"/>
                           </a:solidFill>
@@ -3234,7 +3242,7 @@
                         </a:rPr>
                         <a:t>Naming consistency</a:t>
                       </a:r>
-                      <a:endParaRPr lang="en-US" sz="1250" dirty="0">
+                      <a:endParaRPr lang="en-US" sz="1400" dirty="0">
                         <a:latin typeface="Calibri" charset="0"/>
                         <a:ea typeface="Calibri" charset="0"/>
                         <a:cs typeface="Calibri" charset="0"/>
@@ -3292,7 +3300,7 @@
                         <a:buNone/>
                       </a:pPr>
                       <a:r>
-                        <a:rPr lang="en-US" sz="1250" dirty="0">
+                        <a:rPr lang="en-US" sz="1400" dirty="0">
                           <a:solidFill>
                             <a:srgbClr val="1F2429"/>
                           </a:solidFill>
@@ -3302,7 +3310,7 @@
                         </a:rPr>
                         <a:t>Are attribute names consistent across every relation that shares a domain?</a:t>
                       </a:r>
-                      <a:endParaRPr lang="en-US" sz="1250" dirty="0">
+                      <a:endParaRPr lang="en-US" sz="1400" dirty="0">
                         <a:latin typeface="Calibri" charset="0"/>
                         <a:ea typeface="Calibri" charset="0"/>
                         <a:cs typeface="Calibri" charset="0"/>
@@ -3381,7 +3389,7 @@
               <a:buNone/>
             </a:pPr>
             <a:r>
-              <a:rPr lang="en-US" sz="1000" u="sng" dirty="0">
+              <a:rPr lang="en-US" sz="1200" u="sng" dirty="0">
                 <a:solidFill>
                   <a:srgbClr val="8A939B"/>
                 </a:solidFill>
@@ -3402,7 +3410,7 @@
               <a:buNone/>
             </a:pPr>
             <a:r>
-              <a:rPr lang="en-US" sz="1000" dirty="0">
+              <a:rPr lang="en-US" sz="1200" dirty="0">
                 <a:solidFill>
                   <a:srgbClr val="8A939B"/>
                 </a:solidFill>
@@ -3410,9 +3418,9 @@
                 <a:ea typeface="Calibri" pitchFamily="34" charset="-122"/>
                 <a:cs typeface="Calibri" pitchFamily="34" charset="-120"/>
               </a:rPr>
-              <a:t>  ·  10</a:t>
-            </a:r>
-            <a:endParaRPr lang="en-US" sz="1000" dirty="0"/>
+              <a:t>  ·  15</a:t>
+            </a:r>
+            <a:endParaRPr lang="en-US" sz="1200" dirty="0"/>
           </a:p>
         </p:txBody>
       </p:sp>
@@ -3578,7 +3586,7 @@
               <a:buNone/>
             </a:pPr>
             <a:r>
-              <a:rPr lang="en-US" sz="1100" b="1" spc="200" kern="0" dirty="0">
+              <a:rPr lang="en-US" sz="1200" b="1" spc="200" kern="0" dirty="0">
                 <a:solidFill>
                   <a:srgbClr val="0E7A61"/>
                 </a:solidFill>
@@ -3588,7 +3596,7 @@
               </a:rPr>
               <a:t>TIP</a:t>
             </a:r>
-            <a:endParaRPr lang="en-US" sz="1100" dirty="0"/>
+            <a:endParaRPr lang="en-US" sz="1200" dirty="0"/>
           </a:p>
         </p:txBody>
       </p:sp>
@@ -3620,7 +3628,7 @@
               <a:buNone/>
             </a:pPr>
             <a:r>
-              <a:rPr lang="en-US" sz="1300" dirty="0">
+              <a:rPr lang="en-US" sz="1800" dirty="0">
                 <a:solidFill>
                   <a:srgbClr val="1F2429"/>
                 </a:solidFill>
@@ -3630,7 +3638,7 @@
               </a:rPr>
               <a:t>For every relation, read its name and attributes as a sentence: “A Branch has a branchNo, a street, a city, and a postcode.” If the sentence sounds natural and every attribute clearly belongs to that one thing, the relation is probably well-formed.</a:t>
             </a:r>
-            <a:endParaRPr lang="en-US" sz="1300" dirty="0"/>
+            <a:endParaRPr lang="en-US" sz="1800" dirty="0"/>
           </a:p>
         </p:txBody>
       </p:sp>
@@ -3662,7 +3670,7 @@
               <a:buNone/>
             </a:pPr>
             <a:r>
-              <a:rPr lang="en-US" sz="1500" dirty="0">
+              <a:rPr lang="en-US" sz="1800" dirty="0">
                 <a:solidFill>
                   <a:srgbClr val="1F2429"/>
                 </a:solidFill>
@@ -3672,7 +3680,7 @@
               </a:rPr>
               <a:t>If you find yourself saying “…and also the name and address of whoever manages it” for a relation that isn't Staff, that's redundancy trying to sneak in — exactly what Unit 5's normalization theory formalizes and eliminates.</a:t>
             </a:r>
-            <a:endParaRPr lang="en-US" sz="1500" dirty="0"/>
+            <a:endParaRPr lang="en-US" sz="1800" dirty="0"/>
           </a:p>
         </p:txBody>
       </p:sp>
@@ -3701,7 +3709,7 @@
               <a:buNone/>
             </a:pPr>
             <a:r>
-              <a:rPr lang="en-US" sz="1000" u="sng" dirty="0">
+              <a:rPr lang="en-US" sz="1200" u="sng" dirty="0">
                 <a:solidFill>
                   <a:srgbClr val="8A939B"/>
                 </a:solidFill>
@@ -3722,7 +3730,7 @@
               <a:buNone/>
             </a:pPr>
             <a:r>
-              <a:rPr lang="en-US" sz="1000" dirty="0">
+              <a:rPr lang="en-US" sz="1200" dirty="0">
                 <a:solidFill>
                   <a:srgbClr val="8A939B"/>
                 </a:solidFill>
@@ -3730,9 +3738,9 @@
                 <a:ea typeface="Calibri" pitchFamily="34" charset="-122"/>
                 <a:cs typeface="Calibri" pitchFamily="34" charset="-120"/>
               </a:rPr>
-              <a:t>  ·  11</a:t>
-            </a:r>
-            <a:endParaRPr lang="en-US" sz="1000" dirty="0"/>
+              <a:t>  ·  17</a:t>
+            </a:r>
+            <a:endParaRPr lang="en-US" sz="1200" dirty="0"/>
           </a:p>
         </p:txBody>
       </p:sp>
@@ -3933,7 +3941,7 @@
               <a:buNone/>
             </a:pPr>
             <a:r>
-              <a:rPr lang="en-US" sz="1350" dirty="0">
+              <a:rPr lang="en-US" sz="1800" dirty="0">
                 <a:solidFill>
                   <a:srgbClr val="E4E7EA"/>
                 </a:solidFill>
@@ -3943,7 +3951,7 @@
               </a:rPr>
               <a:t>Data modeling builds a shared, precise vocabulary before any technology commitment is made.</a:t>
             </a:r>
-            <a:endParaRPr lang="en-US" sz="1350" dirty="0"/>
+            <a:endParaRPr lang="en-US" sz="1800" dirty="0"/>
           </a:p>
         </p:txBody>
       </p:sp>
@@ -4034,7 +4042,7 @@
               <a:buNone/>
             </a:pPr>
             <a:r>
-              <a:rPr lang="en-US" sz="1350" dirty="0">
+              <a:rPr lang="en-US" sz="1800" dirty="0">
                 <a:solidFill>
                   <a:srgbClr val="E4E7EA"/>
                 </a:solidFill>
@@ -4044,7 +4052,7 @@
               </a:rPr>
               <a:t>Conceptual model (technology-independent) → logical model (relational structure, DBMS-independent) → relational schema (concrete types, constraints, syntax).</a:t>
             </a:r>
-            <a:endParaRPr lang="en-US" sz="1350" dirty="0"/>
+            <a:endParaRPr lang="en-US" sz="1800" dirty="0"/>
           </a:p>
         </p:txBody>
       </p:sp>
@@ -4135,7 +4143,7 @@
               <a:buNone/>
             </a:pPr>
             <a:r>
-              <a:rPr lang="en-US" sz="1350" dirty="0">
+              <a:rPr lang="en-US" sz="1800" dirty="0">
                 <a:solidFill>
                   <a:srgbClr val="E4E7EA"/>
                 </a:solidFill>
@@ -4145,7 +4153,7 @@
               </a:rPr>
               <a:t>Relational database design is judged by correctness, non-redundancy, and robustness under real use — not merely “does the SQL compile.”</a:t>
             </a:r>
-            <a:endParaRPr lang="en-US" sz="1350" dirty="0"/>
+            <a:endParaRPr lang="en-US" sz="1800" dirty="0"/>
           </a:p>
         </p:txBody>
       </p:sp>
@@ -4236,7 +4244,7 @@
               <a:buNone/>
             </a:pPr>
             <a:r>
-              <a:rPr lang="en-US" sz="1350" dirty="0">
+              <a:rPr lang="en-US" sz="1800" dirty="0">
                 <a:solidFill>
                   <a:srgbClr val="E4E7EA"/>
                 </a:solidFill>
@@ -4246,7 +4254,7 @@
               </a:rPr>
               <a:t>Mapping conceptual → logical: entity → relation, attribute → column, relationship → foreign key or new relation depending on cardinality.</a:t>
             </a:r>
-            <a:endParaRPr lang="en-US" sz="1350" dirty="0"/>
+            <a:endParaRPr lang="en-US" sz="1800" dirty="0"/>
           </a:p>
         </p:txBody>
       </p:sp>
@@ -4337,7 +4345,7 @@
               <a:buNone/>
             </a:pPr>
             <a:r>
-              <a:rPr lang="en-US" sz="1350" dirty="0">
+              <a:rPr lang="en-US" sz="1800" dirty="0">
                 <a:solidFill>
                   <a:srgbClr val="E4E7EA"/>
                 </a:solidFill>
@@ -4347,7 +4355,7 @@
               </a:rPr>
               <a:t>A syntactically correct schema can still be a poor design — always check redundancy, anomalies, keys, integrity, growth, and security.</a:t>
             </a:r>
-            <a:endParaRPr lang="en-US" sz="1350" dirty="0"/>
+            <a:endParaRPr lang="en-US" sz="1800" dirty="0"/>
           </a:p>
         </p:txBody>
       </p:sp>
@@ -4376,7 +4384,7 @@
               <a:buNone/>
             </a:pPr>
             <a:r>
-              <a:rPr lang="en-US" sz="1000" u="sng" dirty="0">
+              <a:rPr lang="en-US" sz="1200" u="sng" dirty="0">
                 <a:solidFill>
                   <a:srgbClr val="8A939B"/>
                 </a:solidFill>
@@ -4397,7 +4405,7 @@
               <a:buNone/>
             </a:pPr>
             <a:r>
-              <a:rPr lang="en-US" sz="1000" dirty="0">
+              <a:rPr lang="en-US" sz="1200" dirty="0">
                 <a:solidFill>
                   <a:srgbClr val="8A939B"/>
                 </a:solidFill>
@@ -4405,9 +4413,4223 @@
                 <a:ea typeface="Calibri" pitchFamily="34" charset="-122"/>
                 <a:cs typeface="Calibri" pitchFamily="34" charset="-120"/>
               </a:rPr>
+              <a:t>  ·  20</a:t>
+            </a:r>
+            <a:endParaRPr lang="en-US" sz="1200" dirty="0"/>
+          </a:p>
+        </p:txBody>
+      </p:sp>
+    </p:spTree>
+  </p:cSld>
+  <p:clrMapOvr>
+    <a:masterClrMapping/>
+  </p:clrMapOvr>
+</p:sld>
+</file>
+
+<file path=ppt/slides/slide13.xml><?xml version="1.0" encoding="utf-8"?>
+<p:sld xmlns:a="http://schemas.openxmlformats.org/drawingml/2006/main" xmlns:r="http://schemas.openxmlformats.org/officeDocument/2006/relationships" xmlns:p="http://schemas.openxmlformats.org/presentationml/2006/main">
+  <p:cSld name="Slide 5">
+    <p:bg>
+      <p:bgPr>
+        <a:solidFill>
+          <a:srgbClr val="F7F8F9"/>
+        </a:solidFill>
+      </p:bgPr>
+    </p:bg>
+    <p:spTree>
+      <p:nvGrpSpPr>
+        <p:cNvPr id="1" name=""/>
+        <p:cNvGrpSpPr/>
+        <p:nvPr/>
+      </p:nvGrpSpPr>
+      <p:grpSpPr>
+        <a:xfrm>
+          <a:off x="0" y="0"/>
+          <a:ext cx="0" cy="0"/>
+          <a:chOff x="0" y="0"/>
+          <a:chExt cx="0" cy="0"/>
+        </a:xfrm>
+      </p:grpSpPr>
+      <p:sp>
+        <p:nvSpPr>
+          <p:cNvPr id="2" name="Text 0"/>
+          <p:cNvSpPr txBox="1"/>
+          <p:nvPr/>
+        </p:nvSpPr>
+        <p:spPr>
+          <a:xfrm>
+            <a:off x="640080" y="384048"/>
+            <a:ext cx="10911535" cy="320040"/>
+          </a:xfrm>
+          <a:prstGeom prst="rect">
+            <a:avLst/>
+          </a:prstGeom>
+          <a:noFill/>
+          <a:ln/>
+        </p:spPr>
+        <p:txBody>
+          <a:bodyPr wrap="square" lIns="0" tIns="0" rIns="0" bIns="0" rtlCol="0" anchor="ctr"/>
+          <a:lstStyle/>
+          <a:p>
+            <a:pPr indent="0" marL="0">
+              <a:buNone/>
+            </a:pPr>
+            <a:r>
+              <a:rPr lang="en-US" sz="1250" b="1" spc="250" kern="0" dirty="0">
+                <a:solidFill>
+                  <a:srgbClr val="8B7FD9"/>
+                </a:solidFill>
+                <a:latin typeface="Calibri" pitchFamily="34" charset="0"/>
+                <a:ea typeface="Calibri" pitchFamily="34" charset="-122"/>
+                <a:cs typeface="Calibri" pitchFamily="34" charset="-120"/>
+              </a:rPr>
+              <a:t>CONCEPTUAL EXAMPLE</a:t>
+            </a:r>
+            <a:endParaRPr lang="en-US" sz="1250" dirty="0"/>
+          </a:p>
+        </p:txBody>
+      </p:sp>
+      <p:sp>
+        <p:nvSpPr>
+          <p:cNvPr id="3" name="Text 1"/>
+          <p:cNvSpPr txBox="1"/>
+          <p:nvPr/>
+        </p:nvSpPr>
+        <p:spPr>
+          <a:xfrm>
+            <a:off x="640080" y="713232"/>
+            <a:ext cx="10911535" cy="777240"/>
+          </a:xfrm>
+          <a:prstGeom prst="rect">
+            <a:avLst/>
+          </a:prstGeom>
+          <a:noFill/>
+          <a:ln/>
+        </p:spPr>
+        <p:txBody>
+          <a:bodyPr wrap="square" lIns="0" tIns="0" rIns="0" bIns="0" rtlCol="0" anchor="ctr"/>
+          <a:lstStyle/>
+          <a:p>
+            <a:pPr indent="0" marL="0">
+              <a:buNone/>
+            </a:pPr>
+            <a:r>
+              <a:rPr lang="en-US" sz="2600" b="1" dirty="0">
+                <a:solidFill>
+                  <a:srgbClr val="1F2429"/>
+                </a:solidFill>
+                <a:latin typeface="Calibri" pitchFamily="34" charset="0"/>
+                <a:ea typeface="Calibri" pitchFamily="34" charset="-122"/>
+                <a:cs typeface="Calibri" pitchFamily="34" charset="-120"/>
+              </a:rPr>
+              <a:t>Turning a Conversation into a Conceptual Model</a:t>
+            </a:r>
+            <a:endParaRPr lang="en-US" sz="2600" dirty="0"/>
+          </a:p>
+        </p:txBody>
+      </p:sp>
+      <p:sp>
+        <p:nvSpPr>
+          <p:cNvPr id="4" name="Text 2"/>
+          <p:cNvSpPr txBox="1"/>
+          <p:nvPr/>
+        </p:nvSpPr>
+        <p:spPr>
+          <a:xfrm>
+            <a:off x="640080" y="1737360"/>
+            <a:ext cx="10911535" cy="2011680"/>
+          </a:xfrm>
+          <a:prstGeom prst="rect">
+            <a:avLst/>
+          </a:prstGeom>
+          <a:noFill/>
+          <a:ln/>
+        </p:spPr>
+        <p:txBody>
+          <a:bodyPr wrap="square" lIns="0" tIns="0" rIns="0" bIns="0" rtlCol="0" anchor="t"/>
+          <a:lstStyle/>
+          <a:p>
+            <a:pPr marL="228600" indent="-228600">
+              <a:lnSpc>
+                <a:spcPct val="115000"/>
+              </a:lnSpc>
+              <a:spcAft>
+                <a:spcPts val="800"/>
+              </a:spcAft>
+              <a:buSzPct val="100000"/>
+              <a:buChar char="•"/>
+            </a:pPr>
+            <a:r>
+              <a:rPr lang="en-US" sz="1800" dirty="0">
+                <a:solidFill>
+                  <a:srgbClr val="1F2429"/>
+                </a:solidFill>
+                <a:latin typeface="Calibri" pitchFamily="34" charset="0"/>
+                <a:ea typeface="Calibri" pitchFamily="34" charset="-122"/>
+                <a:cs typeface="Calibri" pitchFamily="34" charset="-120"/>
+              </a:rPr>
+              <a:t>Staff say “a branch employs several staff”: entities Branch and Staff, joined by one relationship Has (1:N).</a:t>
+            </a:r>
+            <a:endParaRPr lang="en-US" sz="1800" dirty="0"/>
+          </a:p>
+          <a:p>
+            <a:pPr marL="228600" indent="-228600">
+              <a:lnSpc>
+                <a:spcPct val="115000"/>
+              </a:lnSpc>
+              <a:spcAft>
+                <a:spcPts val="800"/>
+              </a:spcAft>
+              <a:buSzPct val="100000"/>
+              <a:buChar char="•"/>
+            </a:pPr>
+            <a:r>
+              <a:rPr lang="en-US" sz="1800" dirty="0">
+                <a:solidFill>
+                  <a:srgbClr val="1F2429"/>
+                </a:solidFill>
+                <a:latin typeface="Calibri" pitchFamily="34" charset="0"/>
+                <a:ea typeface="Calibri" pitchFamily="34" charset="-122"/>
+                <a:cs typeface="Calibri" pitchFamily="34" charset="-120"/>
+              </a:rPr>
+              <a:t>Staff say “a client may view several properties”: entities Client and PropertyForRent, joined by Views (M:N).</a:t>
+            </a:r>
+            <a:endParaRPr lang="en-US" sz="1800" dirty="0"/>
+          </a:p>
+          <a:p>
+            <a:pPr marL="228600" indent="-228600">
+              <a:lnSpc>
+                <a:spcPct val="115000"/>
+              </a:lnSpc>
+              <a:spcAft>
+                <a:spcPts val="800"/>
+              </a:spcAft>
+              <a:buSzPct val="100000"/>
+              <a:buChar char="•"/>
+            </a:pPr>
+            <a:r>
+              <a:rPr lang="en-US" sz="1800" dirty="0">
+                <a:solidFill>
+                  <a:srgbClr val="1F2429"/>
+                </a:solidFill>
+                <a:latin typeface="Calibri" pitchFamily="34" charset="0"/>
+                <a:ea typeface="Calibri" pitchFamily="34" charset="-122"/>
+                <a:cs typeface="Calibri" pitchFamily="34" charset="-120"/>
+              </a:rPr>
+              <a:t>Staff say “each property is owned by exactly one private owner”: entities PrivateOwner and PropertyForRent, joined by Owns (1:N).</a:t>
+            </a:r>
+            <a:endParaRPr lang="en-US" sz="1800" dirty="0"/>
+          </a:p>
+        </p:txBody>
+      </p:sp>
+      <p:sp>
+        <p:nvSpPr>
+          <p:cNvPr id="5" name="Text 3"/>
+          <p:cNvSpPr txBox="1"/>
+          <p:nvPr/>
+        </p:nvSpPr>
+        <p:spPr>
+          <a:xfrm>
+            <a:off x="640080" y="3794760"/>
+            <a:ext cx="10911535" cy="822960"/>
+          </a:xfrm>
+          <a:prstGeom prst="rect">
+            <a:avLst/>
+          </a:prstGeom>
+          <a:noFill/>
+          <a:ln/>
+        </p:spPr>
+        <p:txBody>
+          <a:bodyPr wrap="square" lIns="0" tIns="0" rIns="0" bIns="0" rtlCol="0" anchor="t"/>
+          <a:lstStyle/>
+          <a:p>
+            <a:pPr indent="0" marL="0">
+              <a:lnSpc>
+                <a:spcPct val="125000"/>
+              </a:lnSpc>
+              <a:buNone/>
+            </a:pPr>
+            <a:r>
+              <a:rPr lang="en-US" sz="1800" i="1" dirty="0">
+                <a:solidFill>
+                  <a:srgbClr val="8B7FD9"/>
+                </a:solidFill>
+                <a:latin typeface="Calibri" pitchFamily="34" charset="0"/>
+                <a:ea typeface="Calibri" pitchFamily="34" charset="-122"/>
+                <a:cs typeface="Calibri" pitchFamily="34" charset="-120"/>
+              </a:rPr>
+              <a:t>Nouns become entity types (Branch, Staff, Client, PropertyForRent, PrivateOwner); verbs become relationships (Has, Views, Owns); facts about each thing become attributes (staffNo, salary, rent).</a:t>
+            </a:r>
+            <a:endParaRPr lang="en-US" sz="1800" dirty="0"/>
+          </a:p>
+        </p:txBody>
+      </p:sp>
+      <p:sp>
+        <p:nvSpPr>
+          <p:cNvPr id="6" name="Shape 4"/>
+          <p:cNvSpPr/>
+          <p:nvPr/>
+        </p:nvSpPr>
+        <p:spPr>
+          <a:xfrm>
+            <a:off x="640080" y="4754880"/>
+            <a:ext cx="10911535" cy="1234440"/>
+          </a:xfrm>
+          <a:prstGeom prst="roundRect">
+            <a:avLst>
+              <a:gd name="adj" fmla="val 5185"/>
+            </a:avLst>
+          </a:prstGeom>
+          <a:solidFill>
+            <a:srgbClr val="E9F9F3"/>
+          </a:solidFill>
+          <a:ln w="12700">
+            <a:solidFill>
+              <a:srgbClr val="1FAE8C"/>
+            </a:solidFill>
+            <a:prstDash val="solid"/>
+          </a:ln>
+        </p:spPr>
+      </p:sp>
+      <p:sp>
+        <p:nvSpPr>
+          <p:cNvPr id="7" name="Text 5"/>
+          <p:cNvSpPr txBox="1"/>
+          <p:nvPr/>
+        </p:nvSpPr>
+        <p:spPr>
+          <a:xfrm>
+            <a:off x="896112" y="4901184"/>
+            <a:ext cx="10399471" cy="274320"/>
+          </a:xfrm>
+          <a:prstGeom prst="rect">
+            <a:avLst/>
+          </a:prstGeom>
+          <a:noFill/>
+          <a:ln/>
+        </p:spPr>
+        <p:txBody>
+          <a:bodyPr wrap="square" lIns="0" tIns="0" rIns="0" bIns="0" rtlCol="0" anchor="ctr"/>
+          <a:lstStyle/>
+          <a:p>
+            <a:pPr indent="0" marL="0">
+              <a:buNone/>
+            </a:pPr>
+            <a:r>
+              <a:rPr lang="en-US" sz="1200" b="1" spc="200" kern="0" dirty="0">
+                <a:solidFill>
+                  <a:srgbClr val="0E7A61"/>
+                </a:solidFill>
+                <a:latin typeface="Calibri" pitchFamily="34" charset="0"/>
+                <a:ea typeface="Calibri" pitchFamily="34" charset="-122"/>
+                <a:cs typeface="Calibri" pitchFamily="34" charset="-120"/>
+              </a:rPr>
+              <a:t>TIP</a:t>
+            </a:r>
+            <a:endParaRPr lang="en-US" sz="1200" dirty="0"/>
+          </a:p>
+        </p:txBody>
+      </p:sp>
+      <p:sp>
+        <p:nvSpPr>
+          <p:cNvPr id="8" name="Text 6"/>
+          <p:cNvSpPr txBox="1"/>
+          <p:nvPr/>
+        </p:nvSpPr>
+        <p:spPr>
+          <a:xfrm>
+            <a:off x="896112" y="5212080"/>
+            <a:ext cx="10399471" cy="612648"/>
+          </a:xfrm>
+          <a:prstGeom prst="rect">
+            <a:avLst/>
+          </a:prstGeom>
+          <a:noFill/>
+          <a:ln/>
+        </p:spPr>
+        <p:txBody>
+          <a:bodyPr wrap="square" lIns="0" tIns="0" rIns="0" bIns="0" rtlCol="0" anchor="t"/>
+          <a:lstStyle/>
+          <a:p>
+            <a:pPr indent="0" marL="0">
+              <a:lnSpc>
+                <a:spcPct val="115000"/>
+              </a:lnSpc>
+              <a:buNone/>
+            </a:pPr>
+            <a:r>
+              <a:rPr lang="en-US" sz="1800" dirty="0">
+                <a:solidFill>
+                  <a:srgbClr val="1F2429"/>
+                </a:solidFill>
+                <a:latin typeface="Calibri" pitchFamily="34" charset="0"/>
+                <a:ea typeface="Calibri" pitchFamily="34" charset="-122"/>
+                <a:cs typeface="Calibri" pitchFamily="34" charset="-120"/>
+              </a:rPr>
+              <a:t>A conceptual model should survive a change of DBMS unchanged. If moving from PostgreSQL to Oracle forces you to redraw it, the model was capturing implementation detail, not business meaning.</a:t>
+            </a:r>
+            <a:endParaRPr lang="en-US" sz="1800" dirty="0"/>
+          </a:p>
+        </p:txBody>
+      </p:sp>
+      <p:sp>
+        <p:nvSpPr>
+          <p:cNvPr id="9" name="Text 7"/>
+          <p:cNvSpPr/>
+          <p:nvPr/>
+        </p:nvSpPr>
+        <p:spPr>
+          <a:xfrm>
+            <a:off x="9951415" y="6455664"/>
+            <a:ext cx="2011680" cy="292608"/>
+          </a:xfrm>
+          <a:prstGeom prst="rect">
+            <a:avLst/>
+          </a:prstGeom>
+          <a:noFill/>
+          <a:ln/>
+        </p:spPr>
+        <p:txBody>
+          <a:bodyPr wrap="square" rtlCol="0" anchor="ctr"/>
+          <a:lstStyle/>
+          <a:p>
+            <a:pPr algn="r" indent="0" marL="0">
+              <a:buNone/>
+            </a:pPr>
+            <a:r>
+              <a:rPr lang="en-US" sz="1200" u="sng" dirty="0">
+                <a:solidFill>
+                  <a:srgbClr val="8A939B"/>
+                </a:solidFill>
+                <a:latin typeface="Calibri" pitchFamily="34" charset="0"/>
+                <a:ea typeface="Calibri" pitchFamily="34" charset="-122"/>
+                <a:cs typeface="Calibri" pitchFamily="34" charset="-120"/>
+                <a:hlinkClick r:id="rId1" invalidUrl="" action="" tgtFrame="" tooltip="" history="1" highlightClick="0" endSnd="0">
+                  <a:extLst>
+                    <a:ext uri="{A12FA001-AC4F-418D-AE19-62706E023703}">
+                      <ahyp:hlinkClr xmlns:ahyp="http://schemas.microsoft.com/office/drawing/2018/hyperlinkcolor" val="tx"/>
+                    </a:ext>
+                  </a:extLst>
+                </a:hlinkClick>
+              </a:rPr>
+              <a:t>cuinotes.com</a:t>
+            </a:r>
+            <a:pPr algn="r" indent="0" marL="0">
+              <a:buNone/>
+            </a:pPr>
+            <a:r>
+              <a:rPr lang="en-US" sz="1200" dirty="0">
+                <a:solidFill>
+                  <a:srgbClr val="8A939B"/>
+                </a:solidFill>
+                <a:latin typeface="Calibri" pitchFamily="34" charset="0"/>
+                <a:ea typeface="Calibri" pitchFamily="34" charset="-122"/>
+                <a:cs typeface="Calibri" pitchFamily="34" charset="-120"/>
+              </a:rPr>
+              <a:t>  ·  6</a:t>
+            </a:r>
+            <a:endParaRPr lang="en-US" sz="1200" dirty="0"/>
+          </a:p>
+        </p:txBody>
+      </p:sp>
+    </p:spTree>
+  </p:cSld>
+  <p:clrMapOvr>
+    <a:masterClrMapping/>
+  </p:clrMapOvr>
+</p:sld>
+</file>
+
+<file path=ppt/slides/slide14.xml><?xml version="1.0" encoding="utf-8"?>
+<p:sld xmlns:a="http://schemas.openxmlformats.org/drawingml/2006/main" xmlns:r="http://schemas.openxmlformats.org/officeDocument/2006/relationships" xmlns:p="http://schemas.openxmlformats.org/presentationml/2006/main">
+  <p:cSld name="Slide 7">
+    <p:bg>
+      <p:bgPr>
+        <a:solidFill>
+          <a:srgbClr val="F7F8F9"/>
+        </a:solidFill>
+      </p:bgPr>
+    </p:bg>
+    <p:spTree>
+      <p:nvGrpSpPr>
+        <p:cNvPr id="1" name=""/>
+        <p:cNvGrpSpPr/>
+        <p:nvPr/>
+      </p:nvGrpSpPr>
+      <p:grpSpPr>
+        <a:xfrm>
+          <a:off x="0" y="0"/>
+          <a:ext cx="0" cy="0"/>
+          <a:chOff x="0" y="0"/>
+          <a:chExt cx="0" cy="0"/>
+        </a:xfrm>
+      </p:grpSpPr>
+      <p:sp>
+        <p:nvSpPr>
+          <p:cNvPr id="2" name="Text 0"/>
+          <p:cNvSpPr txBox="1"/>
+          <p:nvPr/>
+        </p:nvSpPr>
+        <p:spPr>
+          <a:xfrm>
+            <a:off x="640080" y="384048"/>
+            <a:ext cx="10911535" cy="320040"/>
+          </a:xfrm>
+          <a:prstGeom prst="rect">
+            <a:avLst/>
+          </a:prstGeom>
+          <a:noFill/>
+          <a:ln/>
+        </p:spPr>
+        <p:txBody>
+          <a:bodyPr wrap="square" lIns="0" tIns="0" rIns="0" bIns="0" rtlCol="0" anchor="ctr"/>
+          <a:lstStyle/>
+          <a:p>
+            <a:pPr indent="0" marL="0">
+              <a:buNone/>
+            </a:pPr>
+            <a:r>
+              <a:rPr lang="en-US" sz="1250" b="1" spc="250" kern="0" dirty="0">
+                <a:solidFill>
+                  <a:srgbClr val="8B7FD9"/>
+                </a:solidFill>
+                <a:latin typeface="Calibri" pitchFamily="34" charset="0"/>
+                <a:ea typeface="Calibri" pitchFamily="34" charset="-122"/>
+                <a:cs typeface="Calibri" pitchFamily="34" charset="-120"/>
+              </a:rPr>
+              <a:t>RELATIONAL DATABASE DESIGN</a:t>
+            </a:r>
+            <a:endParaRPr lang="en-US" sz="1250" dirty="0"/>
+          </a:p>
+        </p:txBody>
+      </p:sp>
+      <p:sp>
+        <p:nvSpPr>
+          <p:cNvPr id="3" name="Text 1"/>
+          <p:cNvSpPr txBox="1"/>
+          <p:nvPr/>
+        </p:nvSpPr>
+        <p:spPr>
+          <a:xfrm>
+            <a:off x="640080" y="713232"/>
+            <a:ext cx="10911535" cy="777240"/>
+          </a:xfrm>
+          <a:prstGeom prst="rect">
+            <a:avLst/>
+          </a:prstGeom>
+          <a:noFill/>
+          <a:ln/>
+        </p:spPr>
+        <p:txBody>
+          <a:bodyPr wrap="square" lIns="0" tIns="0" rIns="0" bIns="0" rtlCol="0" anchor="ctr"/>
+          <a:lstStyle/>
+          <a:p>
+            <a:pPr indent="0" marL="0">
+              <a:buNone/>
+            </a:pPr>
+            <a:r>
+              <a:rPr lang="en-US" sz="2600" b="1" dirty="0">
+                <a:solidFill>
+                  <a:srgbClr val="1F2429"/>
+                </a:solidFill>
+                <a:latin typeface="Calibri" pitchFamily="34" charset="0"/>
+                <a:ea typeface="Calibri" pitchFamily="34" charset="-122"/>
+                <a:cs typeface="Calibri" pitchFamily="34" charset="-120"/>
+              </a:rPr>
+              <a:t>Redundancy in Practice: An Example</a:t>
+            </a:r>
+            <a:endParaRPr lang="en-US" sz="2600" dirty="0"/>
+          </a:p>
+        </p:txBody>
+      </p:sp>
+      <p:sp>
+        <p:nvSpPr>
+          <p:cNvPr id="4" name="Shape 2"/>
+          <p:cNvSpPr/>
+          <p:nvPr/>
+        </p:nvSpPr>
+        <p:spPr>
+          <a:xfrm>
+            <a:off x="640080" y="1783080"/>
+            <a:ext cx="3423818" cy="2834640"/>
+          </a:xfrm>
+          <a:prstGeom prst="roundRect">
+            <a:avLst>
+              <a:gd name="adj" fmla="val 2581"/>
+            </a:avLst>
+          </a:prstGeom>
+          <a:solidFill>
+            <a:srgbClr val="FFFFFF"/>
+          </a:solidFill>
+          <a:ln w="12700">
+            <a:solidFill>
+              <a:srgbClr val="E2E5E9"/>
+            </a:solidFill>
+            <a:prstDash val="solid"/>
+          </a:ln>
+          <a:effectLst>
+            <a:outerShdw sx="100000" sy="100000" kx="0" ky="0" algn="bl" rotWithShape="0" blurRad="76200" dist="25400" dir="5400000">
+              <a:srgbClr val="000000">
+                <a:alpha val="8000"/>
+              </a:srgbClr>
+            </a:outerShdw>
+          </a:effectLst>
+        </p:spPr>
+      </p:sp>
+      <p:sp>
+        <p:nvSpPr>
+          <p:cNvPr id="5" name="Shape 3"/>
+          <p:cNvSpPr/>
+          <p:nvPr/>
+        </p:nvSpPr>
+        <p:spPr>
+          <a:xfrm>
+            <a:off x="914400" y="2057400"/>
+            <a:ext cx="457200" cy="457200"/>
+          </a:xfrm>
+          <a:prstGeom prst="ellipse">
+            <a:avLst/>
+          </a:prstGeom>
+          <a:solidFill>
+            <a:srgbClr val="2FE6C4"/>
+          </a:solidFill>
+          <a:ln/>
+        </p:spPr>
+      </p:sp>
+      <p:sp>
+        <p:nvSpPr>
+          <p:cNvPr id="6" name="Text 4"/>
+          <p:cNvSpPr txBox="1"/>
+          <p:nvPr/>
+        </p:nvSpPr>
+        <p:spPr>
+          <a:xfrm>
+            <a:off x="914400" y="2057400"/>
+            <a:ext cx="457200" cy="457200"/>
+          </a:xfrm>
+          <a:prstGeom prst="rect">
+            <a:avLst/>
+          </a:prstGeom>
+          <a:noFill/>
+          <a:ln/>
+        </p:spPr>
+        <p:txBody>
+          <a:bodyPr wrap="square" lIns="0" tIns="0" rIns="0" bIns="0" rtlCol="0" anchor="ctr"/>
+          <a:lstStyle/>
+          <a:p>
+            <a:pPr algn="ctr" indent="0" marL="0">
+              <a:buNone/>
+            </a:pPr>
+            <a:r>
+              <a:rPr lang="en-US" sz="1300" b="1" dirty="0">
+                <a:solidFill>
+                  <a:srgbClr val="14181C"/>
+                </a:solidFill>
+                <a:latin typeface="Calibri" pitchFamily="34" charset="0"/>
+                <a:ea typeface="Calibri" pitchFamily="34" charset="-122"/>
+                <a:cs typeface="Calibri" pitchFamily="34" charset="-120"/>
+              </a:rPr>
+              <a:t>1</a:t>
+            </a:r>
+            <a:endParaRPr lang="en-US" sz="1300" dirty="0"/>
+          </a:p>
+        </p:txBody>
+      </p:sp>
+      <p:sp>
+        <p:nvSpPr>
+          <p:cNvPr id="7" name="Text 5"/>
+          <p:cNvSpPr txBox="1"/>
+          <p:nvPr/>
+        </p:nvSpPr>
+        <p:spPr>
+          <a:xfrm>
+            <a:off x="914400" y="2697480"/>
+            <a:ext cx="2875178" cy="457200"/>
+          </a:xfrm>
+          <a:prstGeom prst="rect">
+            <a:avLst/>
+          </a:prstGeom>
+          <a:noFill/>
+          <a:ln/>
+        </p:spPr>
+        <p:txBody>
+          <a:bodyPr wrap="square" lIns="0" tIns="0" rIns="0" bIns="0" rtlCol="0" anchor="ctr"/>
+          <a:lstStyle/>
+          <a:p>
+            <a:pPr indent="0" marL="0">
+              <a:buNone/>
+            </a:pPr>
+            <a:r>
+              <a:rPr lang="en-US" sz="1800" b="1" dirty="0">
+                <a:solidFill>
+                  <a:srgbClr val="1F2429"/>
+                </a:solidFill>
+                <a:latin typeface="Calibri" pitchFamily="34" charset="0"/>
+                <a:ea typeface="Calibri" pitchFamily="34" charset="-122"/>
+                <a:cs typeface="Calibri" pitchFamily="34" charset="-120"/>
+              </a:rPr>
+              <a:t>Redundant copy</a:t>
+            </a:r>
+            <a:endParaRPr lang="en-US" sz="1800" dirty="0"/>
+          </a:p>
+        </p:txBody>
+      </p:sp>
+      <p:sp>
+        <p:nvSpPr>
+          <p:cNvPr id="8" name="Text 6"/>
+          <p:cNvSpPr txBox="1"/>
+          <p:nvPr/>
+        </p:nvSpPr>
+        <p:spPr>
+          <a:xfrm>
+            <a:off x="914400" y="3200400"/>
+            <a:ext cx="2875178" cy="1280160"/>
+          </a:xfrm>
+          <a:prstGeom prst="rect">
+            <a:avLst/>
+          </a:prstGeom>
+          <a:noFill/>
+          <a:ln/>
+        </p:spPr>
+        <p:txBody>
+          <a:bodyPr wrap="square" lIns="0" tIns="0" rIns="0" bIns="0" rtlCol="0" anchor="t"/>
+          <a:lstStyle/>
+          <a:p>
+            <a:pPr indent="0" marL="0">
+              <a:lnSpc>
+                <a:spcPct val="120000"/>
+              </a:lnSpc>
+              <a:buNone/>
+            </a:pPr>
+            <a:r>
+              <a:rPr lang="en-US" sz="1800" dirty="0">
+                <a:solidFill>
+                  <a:srgbClr val="6B7280"/>
+                </a:solidFill>
+                <a:latin typeface="Calibri" pitchFamily="34" charset="0"/>
+                <a:ea typeface="Calibri" pitchFamily="34" charset="-122"/>
+                <a:cs typeface="Calibri" pitchFamily="34" charset="-120"/>
+              </a:rPr>
+              <a:t>PropertyForRent also stores the owner's name and address next to ownerNo, for convenience.</a:t>
+            </a:r>
+            <a:endParaRPr lang="en-US" sz="1800" dirty="0"/>
+          </a:p>
+        </p:txBody>
+      </p:sp>
+      <p:sp>
+        <p:nvSpPr>
+          <p:cNvPr id="9" name="Shape 7"/>
+          <p:cNvSpPr/>
+          <p:nvPr/>
+        </p:nvSpPr>
+        <p:spPr>
+          <a:xfrm>
+            <a:off x="4383938" y="1783080"/>
+            <a:ext cx="3423818" cy="2834640"/>
+          </a:xfrm>
+          <a:prstGeom prst="roundRect">
+            <a:avLst>
+              <a:gd name="adj" fmla="val 2581"/>
+            </a:avLst>
+          </a:prstGeom>
+          <a:solidFill>
+            <a:srgbClr val="FFFFFF"/>
+          </a:solidFill>
+          <a:ln w="12700">
+            <a:solidFill>
+              <a:srgbClr val="E2E5E9"/>
+            </a:solidFill>
+            <a:prstDash val="solid"/>
+          </a:ln>
+          <a:effectLst>
+            <a:outerShdw sx="100000" sy="100000" kx="0" ky="0" algn="bl" rotWithShape="0" blurRad="76200" dist="25400" dir="5400000">
+              <a:srgbClr val="000000">
+                <a:alpha val="8000"/>
+              </a:srgbClr>
+            </a:outerShdw>
+          </a:effectLst>
+        </p:spPr>
+      </p:sp>
+      <p:sp>
+        <p:nvSpPr>
+          <p:cNvPr id="10" name="Shape 8"/>
+          <p:cNvSpPr/>
+          <p:nvPr/>
+        </p:nvSpPr>
+        <p:spPr>
+          <a:xfrm>
+            <a:off x="4658258" y="2057400"/>
+            <a:ext cx="457200" cy="457200"/>
+          </a:xfrm>
+          <a:prstGeom prst="ellipse">
+            <a:avLst/>
+          </a:prstGeom>
+          <a:solidFill>
+            <a:srgbClr val="8B7FD9"/>
+          </a:solidFill>
+          <a:ln/>
+        </p:spPr>
+      </p:sp>
+      <p:sp>
+        <p:nvSpPr>
+          <p:cNvPr id="11" name="Text 9"/>
+          <p:cNvSpPr txBox="1"/>
+          <p:nvPr/>
+        </p:nvSpPr>
+        <p:spPr>
+          <a:xfrm>
+            <a:off x="4658258" y="2057400"/>
+            <a:ext cx="457200" cy="457200"/>
+          </a:xfrm>
+          <a:prstGeom prst="rect">
+            <a:avLst/>
+          </a:prstGeom>
+          <a:noFill/>
+          <a:ln/>
+        </p:spPr>
+        <p:txBody>
+          <a:bodyPr wrap="square" lIns="0" tIns="0" rIns="0" bIns="0" rtlCol="0" anchor="ctr"/>
+          <a:lstStyle/>
+          <a:p>
+            <a:pPr algn="ctr" indent="0" marL="0">
+              <a:buNone/>
+            </a:pPr>
+            <a:r>
+              <a:rPr lang="en-US" sz="1300" b="1" dirty="0">
+                <a:solidFill>
+                  <a:srgbClr val="14181C"/>
+                </a:solidFill>
+                <a:latin typeface="Calibri" pitchFamily="34" charset="0"/>
+                <a:ea typeface="Calibri" pitchFamily="34" charset="-122"/>
+                <a:cs typeface="Calibri" pitchFamily="34" charset="-120"/>
+              </a:rPr>
+              <a:t>2</a:t>
+            </a:r>
+            <a:endParaRPr lang="en-US" sz="1300" dirty="0"/>
+          </a:p>
+        </p:txBody>
+      </p:sp>
+      <p:sp>
+        <p:nvSpPr>
+          <p:cNvPr id="12" name="Text 10"/>
+          <p:cNvSpPr txBox="1"/>
+          <p:nvPr/>
+        </p:nvSpPr>
+        <p:spPr>
+          <a:xfrm>
+            <a:off x="4658258" y="2697480"/>
+            <a:ext cx="2875178" cy="457200"/>
+          </a:xfrm>
+          <a:prstGeom prst="rect">
+            <a:avLst/>
+          </a:prstGeom>
+          <a:noFill/>
+          <a:ln/>
+        </p:spPr>
+        <p:txBody>
+          <a:bodyPr wrap="square" lIns="0" tIns="0" rIns="0" bIns="0" rtlCol="0" anchor="ctr"/>
+          <a:lstStyle/>
+          <a:p>
+            <a:pPr indent="0" marL="0">
+              <a:buNone/>
+            </a:pPr>
+            <a:r>
+              <a:rPr lang="en-US" sz="1800" b="1" dirty="0">
+                <a:solidFill>
+                  <a:srgbClr val="1F2429"/>
+                </a:solidFill>
+                <a:latin typeface="Calibri" pitchFamily="34" charset="0"/>
+                <a:ea typeface="Calibri" pitchFamily="34" charset="-122"/>
+                <a:cs typeface="Calibri" pitchFamily="34" charset="-120"/>
+              </a:rPr>
+              <a:t>Update anomaly</a:t>
+            </a:r>
+            <a:endParaRPr lang="en-US" sz="1800" dirty="0"/>
+          </a:p>
+        </p:txBody>
+      </p:sp>
+      <p:sp>
+        <p:nvSpPr>
+          <p:cNvPr id="13" name="Text 11"/>
+          <p:cNvSpPr txBox="1"/>
+          <p:nvPr/>
+        </p:nvSpPr>
+        <p:spPr>
+          <a:xfrm>
+            <a:off x="4658258" y="3200400"/>
+            <a:ext cx="2875178" cy="1280160"/>
+          </a:xfrm>
+          <a:prstGeom prst="rect">
+            <a:avLst/>
+          </a:prstGeom>
+          <a:noFill/>
+          <a:ln/>
+        </p:spPr>
+        <p:txBody>
+          <a:bodyPr wrap="square" lIns="0" tIns="0" rIns="0" bIns="0" rtlCol="0" anchor="t"/>
+          <a:lstStyle/>
+          <a:p>
+            <a:pPr indent="0" marL="0">
+              <a:lnSpc>
+                <a:spcPct val="120000"/>
+              </a:lnSpc>
+              <a:buNone/>
+            </a:pPr>
+            <a:r>
+              <a:rPr lang="en-US" sz="1800" dirty="0">
+                <a:solidFill>
+                  <a:srgbClr val="6B7280"/>
+                </a:solidFill>
+                <a:latin typeface="Calibri" pitchFamily="34" charset="0"/>
+                <a:ea typeface="Calibri" pitchFamily="34" charset="-122"/>
+                <a:cs typeface="Calibri" pitchFamily="34" charset="-120"/>
+              </a:rPr>
+              <a:t>Change the owner's address in one row and the copies in other rows silently go stale.</a:t>
+            </a:r>
+            <a:endParaRPr lang="en-US" sz="1800" dirty="0"/>
+          </a:p>
+        </p:txBody>
+      </p:sp>
+      <p:sp>
+        <p:nvSpPr>
+          <p:cNvPr id="14" name="Shape 12"/>
+          <p:cNvSpPr/>
+          <p:nvPr/>
+        </p:nvSpPr>
+        <p:spPr>
+          <a:xfrm>
+            <a:off x="8127797" y="1783080"/>
+            <a:ext cx="3423818" cy="2834640"/>
+          </a:xfrm>
+          <a:prstGeom prst="roundRect">
+            <a:avLst>
+              <a:gd name="adj" fmla="val 2581"/>
+            </a:avLst>
+          </a:prstGeom>
+          <a:solidFill>
+            <a:srgbClr val="FFFFFF"/>
+          </a:solidFill>
+          <a:ln w="12700">
+            <a:solidFill>
+              <a:srgbClr val="E2E5E9"/>
+            </a:solidFill>
+            <a:prstDash val="solid"/>
+          </a:ln>
+          <a:effectLst>
+            <a:outerShdw sx="100000" sy="100000" kx="0" ky="0" algn="bl" rotWithShape="0" blurRad="76200" dist="25400" dir="5400000">
+              <a:srgbClr val="000000">
+                <a:alpha val="8000"/>
+              </a:srgbClr>
+            </a:outerShdw>
+          </a:effectLst>
+        </p:spPr>
+      </p:sp>
+      <p:sp>
+        <p:nvSpPr>
+          <p:cNvPr id="15" name="Shape 13"/>
+          <p:cNvSpPr/>
+          <p:nvPr/>
+        </p:nvSpPr>
+        <p:spPr>
+          <a:xfrm>
+            <a:off x="8402117" y="2057400"/>
+            <a:ext cx="457200" cy="457200"/>
+          </a:xfrm>
+          <a:prstGeom prst="ellipse">
+            <a:avLst/>
+          </a:prstGeom>
+          <a:solidFill>
+            <a:srgbClr val="E8A33D"/>
+          </a:solidFill>
+          <a:ln/>
+        </p:spPr>
+      </p:sp>
+      <p:sp>
+        <p:nvSpPr>
+          <p:cNvPr id="16" name="Text 14"/>
+          <p:cNvSpPr txBox="1"/>
+          <p:nvPr/>
+        </p:nvSpPr>
+        <p:spPr>
+          <a:xfrm>
+            <a:off x="8402117" y="2057400"/>
+            <a:ext cx="457200" cy="457200"/>
+          </a:xfrm>
+          <a:prstGeom prst="rect">
+            <a:avLst/>
+          </a:prstGeom>
+          <a:noFill/>
+          <a:ln/>
+        </p:spPr>
+        <p:txBody>
+          <a:bodyPr wrap="square" lIns="0" tIns="0" rIns="0" bIns="0" rtlCol="0" anchor="ctr"/>
+          <a:lstStyle/>
+          <a:p>
+            <a:pPr algn="ctr" indent="0" marL="0">
+              <a:buNone/>
+            </a:pPr>
+            <a:r>
+              <a:rPr lang="en-US" sz="1300" b="1" dirty="0">
+                <a:solidFill>
+                  <a:srgbClr val="14181C"/>
+                </a:solidFill>
+                <a:latin typeface="Calibri" pitchFamily="34" charset="0"/>
+                <a:ea typeface="Calibri" pitchFamily="34" charset="-122"/>
+                <a:cs typeface="Calibri" pitchFamily="34" charset="-120"/>
+              </a:rPr>
+              <a:t>3</a:t>
+            </a:r>
+            <a:endParaRPr lang="en-US" sz="1300" dirty="0"/>
+          </a:p>
+        </p:txBody>
+      </p:sp>
+      <p:sp>
+        <p:nvSpPr>
+          <p:cNvPr id="17" name="Text 15"/>
+          <p:cNvSpPr txBox="1"/>
+          <p:nvPr/>
+        </p:nvSpPr>
+        <p:spPr>
+          <a:xfrm>
+            <a:off x="8402117" y="2697480"/>
+            <a:ext cx="2875178" cy="457200"/>
+          </a:xfrm>
+          <a:prstGeom prst="rect">
+            <a:avLst/>
+          </a:prstGeom>
+          <a:noFill/>
+          <a:ln/>
+        </p:spPr>
+        <p:txBody>
+          <a:bodyPr wrap="square" lIns="0" tIns="0" rIns="0" bIns="0" rtlCol="0" anchor="ctr"/>
+          <a:lstStyle/>
+          <a:p>
+            <a:pPr indent="0" marL="0">
+              <a:buNone/>
+            </a:pPr>
+            <a:r>
+              <a:rPr lang="en-US" sz="1800" b="1" dirty="0">
+                <a:solidFill>
+                  <a:srgbClr val="1F2429"/>
+                </a:solidFill>
+                <a:latin typeface="Calibri" pitchFamily="34" charset="0"/>
+                <a:ea typeface="Calibri" pitchFamily="34" charset="-122"/>
+                <a:cs typeface="Calibri" pitchFamily="34" charset="-120"/>
+              </a:rPr>
+              <a:t>Silent inconsistency</a:t>
+            </a:r>
+            <a:endParaRPr lang="en-US" sz="1800" dirty="0"/>
+          </a:p>
+        </p:txBody>
+      </p:sp>
+      <p:sp>
+        <p:nvSpPr>
+          <p:cNvPr id="18" name="Text 16"/>
+          <p:cNvSpPr txBox="1"/>
+          <p:nvPr/>
+        </p:nvSpPr>
+        <p:spPr>
+          <a:xfrm>
+            <a:off x="8402117" y="3200400"/>
+            <a:ext cx="2875178" cy="1280160"/>
+          </a:xfrm>
+          <a:prstGeom prst="rect">
+            <a:avLst/>
+          </a:prstGeom>
+          <a:noFill/>
+          <a:ln/>
+        </p:spPr>
+        <p:txBody>
+          <a:bodyPr wrap="square" lIns="0" tIns="0" rIns="0" bIns="0" rtlCol="0" anchor="t"/>
+          <a:lstStyle/>
+          <a:p>
+            <a:pPr indent="0" marL="0">
+              <a:lnSpc>
+                <a:spcPct val="120000"/>
+              </a:lnSpc>
+              <a:buNone/>
+            </a:pPr>
+            <a:r>
+              <a:rPr lang="en-US" sz="1800" dirty="0">
+                <a:solidFill>
+                  <a:srgbClr val="6B7280"/>
+                </a:solidFill>
+                <a:latin typeface="Calibri" pitchFamily="34" charset="0"/>
+                <a:ea typeface="Calibri" pitchFamily="34" charset="-122"/>
+                <a:cs typeface="Calibri" pitchFamily="34" charset="-120"/>
+              </a:rPr>
+              <a:t>Two rows for the same owner can now disagree, and no constraint in the schema will complain.</a:t>
+            </a:r>
+            <a:endParaRPr lang="en-US" sz="1800" dirty="0"/>
+          </a:p>
+        </p:txBody>
+      </p:sp>
+      <p:sp>
+        <p:nvSpPr>
+          <p:cNvPr id="19" name="Shape 17"/>
+          <p:cNvSpPr/>
+          <p:nvPr/>
+        </p:nvSpPr>
+        <p:spPr>
+          <a:xfrm>
+            <a:off x="640080" y="4892040"/>
+            <a:ext cx="10911535" cy="1143000"/>
+          </a:xfrm>
+          <a:prstGeom prst="roundRect">
+            <a:avLst>
+              <a:gd name="adj" fmla="val 5600"/>
+            </a:avLst>
+          </a:prstGeom>
+          <a:solidFill>
+            <a:srgbClr val="FCF1E3"/>
+          </a:solidFill>
+          <a:ln w="12700">
+            <a:solidFill>
+              <a:srgbClr val="E8A33D"/>
+            </a:solidFill>
+            <a:prstDash val="solid"/>
+          </a:ln>
+        </p:spPr>
+      </p:sp>
+      <p:sp>
+        <p:nvSpPr>
+          <p:cNvPr id="20" name="Text 18"/>
+          <p:cNvSpPr txBox="1"/>
+          <p:nvPr/>
+        </p:nvSpPr>
+        <p:spPr>
+          <a:xfrm>
+            <a:off x="896112" y="5038344"/>
+            <a:ext cx="10399471" cy="274320"/>
+          </a:xfrm>
+          <a:prstGeom prst="rect">
+            <a:avLst/>
+          </a:prstGeom>
+          <a:noFill/>
+          <a:ln/>
+        </p:spPr>
+        <p:txBody>
+          <a:bodyPr wrap="square" lIns="0" tIns="0" rIns="0" bIns="0" rtlCol="0" anchor="ctr"/>
+          <a:lstStyle/>
+          <a:p>
+            <a:pPr indent="0" marL="0">
+              <a:buNone/>
+            </a:pPr>
+            <a:r>
+              <a:rPr lang="en-US" sz="1200" b="1" spc="200" kern="0" dirty="0">
+                <a:solidFill>
+                  <a:srgbClr val="8A5A12"/>
+                </a:solidFill>
+                <a:latin typeface="Calibri" pitchFamily="34" charset="0"/>
+                <a:ea typeface="Calibri" pitchFamily="34" charset="-122"/>
+                <a:cs typeface="Calibri" pitchFamily="34" charset="-120"/>
+              </a:rPr>
+              <a:t>WARNING</a:t>
+            </a:r>
+            <a:endParaRPr lang="en-US" sz="1200" dirty="0"/>
+          </a:p>
+        </p:txBody>
+      </p:sp>
+      <p:sp>
+        <p:nvSpPr>
+          <p:cNvPr id="21" name="Text 19"/>
+          <p:cNvSpPr txBox="1"/>
+          <p:nvPr/>
+        </p:nvSpPr>
+        <p:spPr>
+          <a:xfrm>
+            <a:off x="896112" y="5349240"/>
+            <a:ext cx="10399471" cy="521208"/>
+          </a:xfrm>
+          <a:prstGeom prst="rect">
+            <a:avLst/>
+          </a:prstGeom>
+          <a:noFill/>
+          <a:ln/>
+        </p:spPr>
+        <p:txBody>
+          <a:bodyPr wrap="square" lIns="0" tIns="0" rIns="0" bIns="0" rtlCol="0" anchor="t"/>
+          <a:lstStyle/>
+          <a:p>
+            <a:pPr indent="0" marL="0">
+              <a:lnSpc>
+                <a:spcPct val="115000"/>
+              </a:lnSpc>
+              <a:buNone/>
+            </a:pPr>
+            <a:r>
+              <a:rPr lang="en-US" sz="1800" dirty="0">
+                <a:solidFill>
+                  <a:srgbClr val="1F2429"/>
+                </a:solidFill>
+                <a:latin typeface="Calibri" pitchFamily="34" charset="0"/>
+                <a:ea typeface="Calibri" pitchFamily="34" charset="-122"/>
+                <a:cs typeface="Calibri" pitchFamily="34" charset="-120"/>
+              </a:rPr>
+              <a:t>Redundancy is more than untidy: it is the root cause of update, insert and delete anomalies. Normalization in Unit 5 removes it systematically.</a:t>
+            </a:r>
+            <a:endParaRPr lang="en-US" sz="1800" dirty="0"/>
+          </a:p>
+        </p:txBody>
+      </p:sp>
+      <p:sp>
+        <p:nvSpPr>
+          <p:cNvPr id="22" name="Text 20"/>
+          <p:cNvSpPr/>
+          <p:nvPr/>
+        </p:nvSpPr>
+        <p:spPr>
+          <a:xfrm>
+            <a:off x="9951415" y="6455664"/>
+            <a:ext cx="2011680" cy="292608"/>
+          </a:xfrm>
+          <a:prstGeom prst="rect">
+            <a:avLst/>
+          </a:prstGeom>
+          <a:noFill/>
+          <a:ln/>
+        </p:spPr>
+        <p:txBody>
+          <a:bodyPr wrap="square" rtlCol="0" anchor="ctr"/>
+          <a:lstStyle/>
+          <a:p>
+            <a:pPr algn="r" indent="0" marL="0">
+              <a:buNone/>
+            </a:pPr>
+            <a:r>
+              <a:rPr lang="en-US" sz="1200" u="sng" dirty="0">
+                <a:solidFill>
+                  <a:srgbClr val="8A939B"/>
+                </a:solidFill>
+                <a:latin typeface="Calibri" pitchFamily="34" charset="0"/>
+                <a:ea typeface="Calibri" pitchFamily="34" charset="-122"/>
+                <a:cs typeface="Calibri" pitchFamily="34" charset="-120"/>
+                <a:hlinkClick r:id="rId1" invalidUrl="" action="" tgtFrame="" tooltip="" history="1" highlightClick="0" endSnd="0">
+                  <a:extLst>
+                    <a:ext uri="{A12FA001-AC4F-418D-AE19-62706E023703}">
+                      <ahyp:hlinkClr xmlns:ahyp="http://schemas.microsoft.com/office/drawing/2018/hyperlinkcolor" val="tx"/>
+                    </a:ext>
+                  </a:extLst>
+                </a:hlinkClick>
+              </a:rPr>
+              <a:t>cuinotes.com</a:t>
+            </a:r>
+            <a:pPr algn="r" indent="0" marL="0">
+              <a:buNone/>
+            </a:pPr>
+            <a:r>
+              <a:rPr lang="en-US" sz="1200" dirty="0">
+                <a:solidFill>
+                  <a:srgbClr val="8A939B"/>
+                </a:solidFill>
+                <a:latin typeface="Calibri" pitchFamily="34" charset="0"/>
+                <a:ea typeface="Calibri" pitchFamily="34" charset="-122"/>
+                <a:cs typeface="Calibri" pitchFamily="34" charset="-120"/>
+              </a:rPr>
+              <a:t>  ·  9</a:t>
+            </a:r>
+            <a:endParaRPr lang="en-US" sz="1200" dirty="0"/>
+          </a:p>
+        </p:txBody>
+      </p:sp>
+    </p:spTree>
+  </p:cSld>
+  <p:clrMapOvr>
+    <a:masterClrMapping/>
+  </p:clrMapOvr>
+</p:sld>
+</file>
+
+<file path=ppt/slides/slide15.xml><?xml version="1.0" encoding="utf-8"?>
+<p:sld xmlns:a="http://schemas.openxmlformats.org/drawingml/2006/main" xmlns:r="http://schemas.openxmlformats.org/officeDocument/2006/relationships" xmlns:p="http://schemas.openxmlformats.org/presentationml/2006/main">
+  <p:cSld name="Slide 11">
+    <p:bg>
+      <p:bgPr>
+        <a:solidFill>
+          <a:srgbClr val="F7F8F9"/>
+        </a:solidFill>
+      </p:bgPr>
+    </p:bg>
+    <p:spTree>
+      <p:nvGrpSpPr>
+        <p:cNvPr id="1" name=""/>
+        <p:cNvGrpSpPr/>
+        <p:nvPr/>
+      </p:nvGrpSpPr>
+      <p:grpSpPr>
+        <a:xfrm>
+          <a:off x="0" y="0"/>
+          <a:ext cx="0" cy="0"/>
+          <a:chOff x="0" y="0"/>
+          <a:chExt cx="0" cy="0"/>
+        </a:xfrm>
+      </p:grpSpPr>
+      <p:sp>
+        <p:nvSpPr>
+          <p:cNvPr id="2" name="Text 0"/>
+          <p:cNvSpPr txBox="1"/>
+          <p:nvPr/>
+        </p:nvSpPr>
+        <p:spPr>
+          <a:xfrm>
+            <a:off x="640080" y="384048"/>
+            <a:ext cx="10911535" cy="320040"/>
+          </a:xfrm>
+          <a:prstGeom prst="rect">
+            <a:avLst/>
+          </a:prstGeom>
+          <a:noFill/>
+          <a:ln/>
+        </p:spPr>
+        <p:txBody>
+          <a:bodyPr wrap="square" lIns="0" tIns="0" rIns="0" bIns="0" rtlCol="0" anchor="ctr"/>
+          <a:lstStyle/>
+          <a:p>
+            <a:pPr indent="0" marL="0">
+              <a:buNone/>
+            </a:pPr>
+            <a:r>
+              <a:rPr lang="en-US" sz="1250" b="1" spc="250" kern="0" dirty="0">
+                <a:solidFill>
+                  <a:srgbClr val="8B7FD9"/>
+                </a:solidFill>
+                <a:latin typeface="Calibri" pitchFamily="34" charset="0"/>
+                <a:ea typeface="Calibri" pitchFamily="34" charset="-122"/>
+                <a:cs typeface="Calibri" pitchFamily="34" charset="-120"/>
+              </a:rPr>
+              <a:t>UPDATE ANOMALY</a:t>
+            </a:r>
+            <a:endParaRPr lang="en-US" sz="1250" dirty="0"/>
+          </a:p>
+        </p:txBody>
+      </p:sp>
+      <p:sp>
+        <p:nvSpPr>
+          <p:cNvPr id="3" name="Text 1"/>
+          <p:cNvSpPr txBox="1"/>
+          <p:nvPr/>
+        </p:nvSpPr>
+        <p:spPr>
+          <a:xfrm>
+            <a:off x="640080" y="713232"/>
+            <a:ext cx="10911535" cy="777240"/>
+          </a:xfrm>
+          <a:prstGeom prst="rect">
+            <a:avLst/>
+          </a:prstGeom>
+          <a:noFill/>
+          <a:ln/>
+        </p:spPr>
+        <p:txBody>
+          <a:bodyPr wrap="square" lIns="0" tIns="0" rIns="0" bIns="0" rtlCol="0" anchor="ctr"/>
+          <a:lstStyle/>
+          <a:p>
+            <a:pPr indent="0" marL="0">
+              <a:buNone/>
+            </a:pPr>
+            <a:r>
+              <a:rPr lang="en-US" sz="2600" b="1" dirty="0">
+                <a:solidFill>
+                  <a:srgbClr val="1F2429"/>
+                </a:solidFill>
+                <a:latin typeface="Calibri" pitchFamily="34" charset="0"/>
+                <a:ea typeface="Calibri" pitchFamily="34" charset="-122"/>
+                <a:cs typeface="Calibri" pitchFamily="34" charset="-120"/>
+              </a:rPr>
+              <a:t>What Goes Wrong: An Update Anomaly</a:t>
+            </a:r>
+            <a:endParaRPr lang="en-US" sz="2600" dirty="0"/>
+          </a:p>
+        </p:txBody>
+      </p:sp>
+      <p:sp>
+        <p:nvSpPr>
+          <p:cNvPr id="4" name="Shape 2"/>
+          <p:cNvSpPr/>
+          <p:nvPr/>
+        </p:nvSpPr>
+        <p:spPr>
+          <a:xfrm>
+            <a:off x="640080" y="1737360"/>
+            <a:ext cx="10911535" cy="1463040"/>
+          </a:xfrm>
+          <a:prstGeom prst="roundRect">
+            <a:avLst>
+              <a:gd name="adj" fmla="val 4375"/>
+            </a:avLst>
+          </a:prstGeom>
+          <a:solidFill>
+            <a:srgbClr val="E9F9F3"/>
+          </a:solidFill>
+          <a:ln w="12700">
+            <a:solidFill>
+              <a:srgbClr val="1FAE8C"/>
+            </a:solidFill>
+            <a:prstDash val="solid"/>
+          </a:ln>
+        </p:spPr>
+      </p:sp>
+      <p:sp>
+        <p:nvSpPr>
+          <p:cNvPr id="5" name="Text 3"/>
+          <p:cNvSpPr txBox="1"/>
+          <p:nvPr/>
+        </p:nvSpPr>
+        <p:spPr>
+          <a:xfrm>
+            <a:off x="896112" y="1883664"/>
+            <a:ext cx="10399471" cy="274320"/>
+          </a:xfrm>
+          <a:prstGeom prst="rect">
+            <a:avLst/>
+          </a:prstGeom>
+          <a:noFill/>
+          <a:ln/>
+        </p:spPr>
+        <p:txBody>
+          <a:bodyPr wrap="square" lIns="0" tIns="0" rIns="0" bIns="0" rtlCol="0" anchor="ctr"/>
+          <a:lstStyle/>
+          <a:p>
+            <a:pPr indent="0" marL="0">
+              <a:buNone/>
+            </a:pPr>
+            <a:r>
+              <a:rPr lang="en-US" sz="1200" b="1" spc="200" kern="0" dirty="0">
+                <a:solidFill>
+                  <a:srgbClr val="0E7A61"/>
+                </a:solidFill>
+                <a:latin typeface="Calibri" pitchFamily="34" charset="0"/>
+                <a:ea typeface="Calibri" pitchFamily="34" charset="-122"/>
+                <a:cs typeface="Calibri" pitchFamily="34" charset="-120"/>
+              </a:rPr>
+              <a:t>EXAMPLE</a:t>
+            </a:r>
+            <a:endParaRPr lang="en-US" sz="1200" dirty="0"/>
+          </a:p>
+        </p:txBody>
+      </p:sp>
+      <p:sp>
+        <p:nvSpPr>
+          <p:cNvPr id="6" name="Text 4"/>
+          <p:cNvSpPr txBox="1"/>
+          <p:nvPr/>
+        </p:nvSpPr>
+        <p:spPr>
+          <a:xfrm>
+            <a:off x="896112" y="2194560"/>
+            <a:ext cx="10399471" cy="841248"/>
+          </a:xfrm>
+          <a:prstGeom prst="rect">
+            <a:avLst/>
+          </a:prstGeom>
+          <a:noFill/>
+          <a:ln/>
+        </p:spPr>
+        <p:txBody>
+          <a:bodyPr wrap="square" lIns="0" tIns="0" rIns="0" bIns="0" rtlCol="0" anchor="t"/>
+          <a:lstStyle/>
+          <a:p>
+            <a:pPr indent="0" marL="0">
+              <a:lnSpc>
+                <a:spcPct val="115000"/>
+              </a:lnSpc>
+              <a:buNone/>
+            </a:pPr>
+            <a:r>
+              <a:rPr lang="en-US" sz="1800" dirty="0">
+                <a:solidFill>
+                  <a:srgbClr val="1F2429"/>
+                </a:solidFill>
+                <a:latin typeface="Calibri" pitchFamily="34" charset="0"/>
+                <a:ea typeface="Calibri" pitchFamily="34" charset="-122"/>
+                <a:cs typeface="Calibri" pitchFamily="34" charset="-120"/>
+              </a:rPr>
+              <a:t>Suppose PropertyForRent stores ownerName and ownerAddress. Owner CO46 owns PA14 and PG4, so the same address is written into two rows.</a:t>
+            </a:r>
+            <a:endParaRPr lang="en-US" sz="1800" dirty="0"/>
+          </a:p>
+        </p:txBody>
+      </p:sp>
+      <p:sp>
+        <p:nvSpPr>
+          <p:cNvPr id="7" name="Text 5"/>
+          <p:cNvSpPr txBox="1"/>
+          <p:nvPr/>
+        </p:nvSpPr>
+        <p:spPr>
+          <a:xfrm>
+            <a:off x="640080" y="3429000"/>
+            <a:ext cx="10911535" cy="1097280"/>
+          </a:xfrm>
+          <a:prstGeom prst="rect">
+            <a:avLst/>
+          </a:prstGeom>
+          <a:noFill/>
+          <a:ln/>
+        </p:spPr>
+        <p:txBody>
+          <a:bodyPr wrap="square" lIns="0" tIns="0" rIns="0" bIns="0" rtlCol="0" anchor="t"/>
+          <a:lstStyle/>
+          <a:p>
+            <a:pPr indent="0" marL="0">
+              <a:lnSpc>
+                <a:spcPct val="130000"/>
+              </a:lnSpc>
+              <a:buNone/>
+            </a:pPr>
+            <a:r>
+              <a:rPr lang="en-US" sz="1800" dirty="0">
+                <a:solidFill>
+                  <a:srgbClr val="1F2429"/>
+                </a:solidFill>
+                <a:latin typeface="Calibri" pitchFamily="34" charset="0"/>
+                <a:ea typeface="Calibri" pitchFamily="34" charset="-122"/>
+                <a:cs typeface="Calibri" pitchFamily="34" charset="-120"/>
+              </a:rPr>
+              <a:t>Now the owner moves. Updating only PA14 leaves PG4 with the old address: two rows disagree about one fact, and nothing in the schema complained.</a:t>
+            </a:r>
+            <a:endParaRPr lang="en-US" sz="1800" dirty="0"/>
+          </a:p>
+        </p:txBody>
+      </p:sp>
+      <p:sp>
+        <p:nvSpPr>
+          <p:cNvPr id="8" name="Text 6"/>
+          <p:cNvSpPr/>
+          <p:nvPr/>
+        </p:nvSpPr>
+        <p:spPr>
+          <a:xfrm>
+            <a:off x="9951415" y="6455664"/>
+            <a:ext cx="2011680" cy="292608"/>
+          </a:xfrm>
+          <a:prstGeom prst="rect">
+            <a:avLst/>
+          </a:prstGeom>
+          <a:noFill/>
+          <a:ln/>
+        </p:spPr>
+        <p:txBody>
+          <a:bodyPr wrap="square" rtlCol="0" anchor="ctr"/>
+          <a:lstStyle/>
+          <a:p>
+            <a:pPr algn="r" indent="0" marL="0">
+              <a:buNone/>
+            </a:pPr>
+            <a:r>
+              <a:rPr lang="en-US" sz="1200" u="sng" dirty="0">
+                <a:solidFill>
+                  <a:srgbClr val="8A939B"/>
+                </a:solidFill>
+                <a:latin typeface="Calibri" pitchFamily="34" charset="0"/>
+                <a:ea typeface="Calibri" pitchFamily="34" charset="-122"/>
+                <a:cs typeface="Calibri" pitchFamily="34" charset="-120"/>
+                <a:hlinkClick r:id="rId1" invalidUrl="" action="" tgtFrame="" tooltip="" history="1" highlightClick="0" endSnd="0">
+                  <a:extLst>
+                    <a:ext uri="{A12FA001-AC4F-418D-AE19-62706E023703}">
+                      <ahyp:hlinkClr xmlns:ahyp="http://schemas.microsoft.com/office/drawing/2018/hyperlinkcolor" val="tx"/>
+                    </a:ext>
+                  </a:extLst>
+                </a:hlinkClick>
+              </a:rPr>
+              <a:t>cuinotes.com</a:t>
+            </a:r>
+            <a:pPr algn="r" indent="0" marL="0">
+              <a:buNone/>
+            </a:pPr>
+            <a:r>
+              <a:rPr lang="en-US" sz="1200" dirty="0">
+                <a:solidFill>
+                  <a:srgbClr val="8A939B"/>
+                </a:solidFill>
+                <a:latin typeface="Calibri" pitchFamily="34" charset="0"/>
+                <a:ea typeface="Calibri" pitchFamily="34" charset="-122"/>
+                <a:cs typeface="Calibri" pitchFamily="34" charset="-120"/>
+              </a:rPr>
+              <a:t>  ·  10</a:t>
+            </a:r>
+            <a:endParaRPr lang="en-US" sz="1200" dirty="0"/>
+          </a:p>
+        </p:txBody>
+      </p:sp>
+    </p:spTree>
+  </p:cSld>
+  <p:clrMapOvr>
+    <a:masterClrMapping/>
+  </p:clrMapOvr>
+</p:sld>
+</file>
+
+<file path=ppt/slides/slide16.xml><?xml version="1.0" encoding="utf-8"?>
+<p:sld xmlns:a="http://schemas.openxmlformats.org/drawingml/2006/main" xmlns:r="http://schemas.openxmlformats.org/officeDocument/2006/relationships" xmlns:p="http://schemas.openxmlformats.org/presentationml/2006/main">
+  <p:cSld name="Slide 8">
+    <p:bg>
+      <p:bgPr>
+        <a:solidFill>
+          <a:srgbClr val="F7F8F9"/>
+        </a:solidFill>
+      </p:bgPr>
+    </p:bg>
+    <p:spTree>
+      <p:nvGrpSpPr>
+        <p:cNvPr id="1" name=""/>
+        <p:cNvGrpSpPr/>
+        <p:nvPr/>
+      </p:nvGrpSpPr>
+      <p:grpSpPr>
+        <a:xfrm>
+          <a:off x="0" y="0"/>
+          <a:ext cx="0" cy="0"/>
+          <a:chOff x="0" y="0"/>
+          <a:chExt cx="0" cy="0"/>
+        </a:xfrm>
+      </p:grpSpPr>
+      <p:sp>
+        <p:nvSpPr>
+          <p:cNvPr id="2" name="Text 0"/>
+          <p:cNvSpPr txBox="1"/>
+          <p:nvPr/>
+        </p:nvSpPr>
+        <p:spPr>
+          <a:xfrm>
+            <a:off x="640080" y="384048"/>
+            <a:ext cx="10911535" cy="320040"/>
+          </a:xfrm>
+          <a:prstGeom prst="rect">
+            <a:avLst/>
+          </a:prstGeom>
+          <a:noFill/>
+          <a:ln/>
+        </p:spPr>
+        <p:txBody>
+          <a:bodyPr wrap="square" lIns="0" tIns="0" rIns="0" bIns="0" rtlCol="0" anchor="ctr"/>
+          <a:lstStyle/>
+          <a:p>
+            <a:pPr indent="0" marL="0">
+              <a:buNone/>
+            </a:pPr>
+            <a:r>
+              <a:rPr lang="en-US" sz="1250" b="1" spc="250" kern="0" dirty="0">
+                <a:solidFill>
+                  <a:srgbClr val="8B7FD9"/>
+                </a:solidFill>
+                <a:latin typeface="Calibri" pitchFamily="34" charset="0"/>
+                <a:ea typeface="Calibri" pitchFamily="34" charset="-122"/>
+                <a:cs typeface="Calibri" pitchFamily="34" charset="-120"/>
+              </a:rPr>
+              <a:t>MAPPING</a:t>
+            </a:r>
+            <a:endParaRPr lang="en-US" sz="1250" dirty="0"/>
+          </a:p>
+        </p:txBody>
+      </p:sp>
+      <p:sp>
+        <p:nvSpPr>
+          <p:cNvPr id="3" name="Text 1"/>
+          <p:cNvSpPr txBox="1"/>
+          <p:nvPr/>
+        </p:nvSpPr>
+        <p:spPr>
+          <a:xfrm>
+            <a:off x="640080" y="713232"/>
+            <a:ext cx="10911535" cy="777240"/>
+          </a:xfrm>
+          <a:prstGeom prst="rect">
+            <a:avLst/>
+          </a:prstGeom>
+          <a:noFill/>
+          <a:ln/>
+        </p:spPr>
+        <p:txBody>
+          <a:bodyPr wrap="square" lIns="0" tIns="0" rIns="0" bIns="0" rtlCol="0" anchor="ctr"/>
+          <a:lstStyle/>
+          <a:p>
+            <a:pPr indent="0" marL="0">
+              <a:buNone/>
+            </a:pPr>
+            <a:r>
+              <a:rPr lang="en-US" sz="2600" b="1" dirty="0">
+                <a:solidFill>
+                  <a:srgbClr val="1F2429"/>
+                </a:solidFill>
+                <a:latin typeface="Calibri" pitchFamily="34" charset="0"/>
+                <a:ea typeface="Calibri" pitchFamily="34" charset="-122"/>
+                <a:cs typeface="Calibri" pitchFamily="34" charset="-120"/>
+              </a:rPr>
+              <a:t>Mapping Staff: Entity to Relation</a:t>
+            </a:r>
+            <a:endParaRPr lang="en-US" sz="2600" dirty="0"/>
+          </a:p>
+        </p:txBody>
+      </p:sp>
+      <p:sp>
+        <p:nvSpPr>
+          <p:cNvPr id="4" name="Text 2"/>
+          <p:cNvSpPr txBox="1"/>
+          <p:nvPr/>
+        </p:nvSpPr>
+        <p:spPr>
+          <a:xfrm>
+            <a:off x="640080" y="1691640"/>
+            <a:ext cx="5486400" cy="2377440"/>
+          </a:xfrm>
+          <a:prstGeom prst="rect">
+            <a:avLst/>
+          </a:prstGeom>
+          <a:noFill/>
+          <a:ln/>
+        </p:spPr>
+        <p:txBody>
+          <a:bodyPr wrap="square" lIns="0" tIns="0" rIns="0" bIns="0" rtlCol="0" anchor="t"/>
+          <a:lstStyle/>
+          <a:p>
+            <a:pPr marL="228600" indent="-228600">
+              <a:lnSpc>
+                <a:spcPct val="115000"/>
+              </a:lnSpc>
+              <a:spcAft>
+                <a:spcPts val="800"/>
+              </a:spcAft>
+              <a:buSzPct val="100000"/>
+              <a:buChar char="•"/>
+            </a:pPr>
+            <a:r>
+              <a:rPr lang="en-US" sz="1800" dirty="0">
+                <a:solidFill>
+                  <a:srgbClr val="1F2429"/>
+                </a:solidFill>
+                <a:latin typeface="Calibri" pitchFamily="34" charset="0"/>
+                <a:ea typeface="Calibri" pitchFamily="34" charset="-122"/>
+                <a:cs typeface="Calibri" pitchFamily="34" charset="-120"/>
+              </a:rPr>
+              <a:t>Staff is a strong entity: staffNo identifies each occurrence on its own, so staffNo becomes the primary key.</a:t>
+            </a:r>
+            <a:endParaRPr lang="en-US" sz="1800" dirty="0"/>
+          </a:p>
+          <a:p>
+            <a:pPr marL="228600" indent="-228600">
+              <a:lnSpc>
+                <a:spcPct val="115000"/>
+              </a:lnSpc>
+              <a:spcAft>
+                <a:spcPts val="800"/>
+              </a:spcAft>
+              <a:buSzPct val="100000"/>
+              <a:buChar char="•"/>
+            </a:pPr>
+            <a:r>
+              <a:rPr lang="en-US" sz="1800" dirty="0">
+                <a:solidFill>
+                  <a:srgbClr val="1F2429"/>
+                </a:solidFill>
+                <a:latin typeface="Calibri" pitchFamily="34" charset="0"/>
+                <a:ea typeface="Calibri" pitchFamily="34" charset="-122"/>
+                <a:cs typeface="Calibri" pitchFamily="34" charset="-120"/>
+              </a:rPr>
+              <a:t>Its simple attributes name, position, and salary each become a column of the Staff relation.</a:t>
+            </a:r>
+            <a:endParaRPr lang="en-US" sz="1800" dirty="0"/>
+          </a:p>
+          <a:p>
+            <a:pPr marL="228600" indent="-228600">
+              <a:lnSpc>
+                <a:spcPct val="115000"/>
+              </a:lnSpc>
+              <a:spcAft>
+                <a:spcPts val="800"/>
+              </a:spcAft>
+              <a:buSzPct val="100000"/>
+              <a:buChar char="•"/>
+            </a:pPr>
+            <a:r>
+              <a:rPr lang="en-US" sz="1800" dirty="0">
+                <a:solidFill>
+                  <a:srgbClr val="1F2429"/>
+                </a:solidFill>
+                <a:latin typeface="Calibri" pitchFamily="34" charset="0"/>
+                <a:ea typeface="Calibri" pitchFamily="34" charset="-122"/>
+                <a:cs typeface="Calibri" pitchFamily="34" charset="-120"/>
+              </a:rPr>
+              <a:t>The Has relationship (1:N to Branch) becomes a foreign key, branchNo, placed on the Staff side.</a:t>
+            </a:r>
+            <a:endParaRPr lang="en-US" sz="1800" dirty="0"/>
+          </a:p>
+        </p:txBody>
+      </p:sp>
+      <p:sp>
+        <p:nvSpPr>
+          <p:cNvPr id="5" name="Shape 3"/>
+          <p:cNvSpPr/>
+          <p:nvPr/>
+        </p:nvSpPr>
+        <p:spPr>
+          <a:xfrm>
+            <a:off x="6309360" y="1691640"/>
+            <a:ext cx="2011680" cy="2286000"/>
+          </a:xfrm>
+          <a:prstGeom prst="roundRect">
+            <a:avLst>
+              <a:gd name="adj" fmla="val 4545"/>
+            </a:avLst>
+          </a:prstGeom>
+          <a:solidFill>
+            <a:srgbClr val="FFFFFF"/>
+          </a:solidFill>
+          <a:ln w="15875">
+            <a:solidFill>
+              <a:srgbClr val="1F2429"/>
+            </a:solidFill>
+            <a:prstDash val="solid"/>
+          </a:ln>
+        </p:spPr>
+      </p:sp>
+      <p:sp>
+        <p:nvSpPr>
+          <p:cNvPr id="6" name="Shape 4"/>
+          <p:cNvSpPr/>
+          <p:nvPr/>
+        </p:nvSpPr>
+        <p:spPr>
+          <a:xfrm>
+            <a:off x="6309360" y="1691640"/>
+            <a:ext cx="2011680" cy="384048"/>
+          </a:xfrm>
+          <a:prstGeom prst="roundRect">
+            <a:avLst>
+              <a:gd name="adj" fmla="val 19048"/>
+            </a:avLst>
+          </a:prstGeom>
+          <a:solidFill>
+            <a:srgbClr val="2FE6C4"/>
+          </a:solidFill>
+          <a:ln/>
+        </p:spPr>
+      </p:sp>
+      <p:sp>
+        <p:nvSpPr>
+          <p:cNvPr id="7" name="Shape 5"/>
+          <p:cNvSpPr/>
+          <p:nvPr/>
+        </p:nvSpPr>
+        <p:spPr>
+          <a:xfrm>
+            <a:off x="6309360" y="1883664"/>
+            <a:ext cx="2011680" cy="192024"/>
+          </a:xfrm>
+          <a:prstGeom prst="rect">
+            <a:avLst/>
+          </a:prstGeom>
+          <a:solidFill>
+            <a:srgbClr val="2FE6C4"/>
+          </a:solidFill>
+          <a:ln/>
+        </p:spPr>
+      </p:sp>
+      <p:sp>
+        <p:nvSpPr>
+          <p:cNvPr id="8" name="Text 6"/>
+          <p:cNvSpPr txBox="1"/>
+          <p:nvPr/>
+        </p:nvSpPr>
+        <p:spPr>
+          <a:xfrm>
+            <a:off x="6419088" y="1691640"/>
+            <a:ext cx="1792224" cy="384048"/>
+          </a:xfrm>
+          <a:prstGeom prst="rect">
+            <a:avLst/>
+          </a:prstGeom>
+          <a:noFill/>
+          <a:ln/>
+        </p:spPr>
+        <p:txBody>
+          <a:bodyPr wrap="square" lIns="0" tIns="0" rIns="0" bIns="0" rtlCol="0" anchor="ctr"/>
+          <a:lstStyle/>
+          <a:p>
+            <a:pPr algn="l" indent="0" marL="0">
+              <a:buNone/>
+            </a:pPr>
+            <a:r>
+              <a:rPr lang="en-US" sz="1800" b="1" dirty="0">
+                <a:solidFill>
+                  <a:srgbClr val="14181C"/>
+                </a:solidFill>
+                <a:latin typeface="Calibri" pitchFamily="34" charset="0"/>
+                <a:ea typeface="Calibri" pitchFamily="34" charset="-122"/>
+                <a:cs typeface="Calibri" pitchFamily="34" charset="-120"/>
+              </a:rPr>
+              <a:t>Staff</a:t>
+            </a:r>
+            <a:endParaRPr lang="en-US" sz="1800" dirty="0"/>
+          </a:p>
+        </p:txBody>
+      </p:sp>
+      <p:sp>
+        <p:nvSpPr>
+          <p:cNvPr id="9" name="Text 7"/>
+          <p:cNvSpPr txBox="1"/>
+          <p:nvPr/>
+        </p:nvSpPr>
+        <p:spPr>
+          <a:xfrm>
+            <a:off x="6455664" y="2130552"/>
+            <a:ext cx="1737360" cy="1600200"/>
+          </a:xfrm>
+          <a:prstGeom prst="rect">
+            <a:avLst/>
+          </a:prstGeom>
+          <a:noFill/>
+          <a:ln/>
+        </p:spPr>
+        <p:txBody>
+          <a:bodyPr wrap="square" lIns="0" tIns="0" rIns="0" bIns="0" rtlCol="0" anchor="t"/>
+          <a:lstStyle/>
+          <a:p>
+            <a:pPr indent="0" marL="0">
+              <a:lnSpc>
+                <a:spcPct val="115000"/>
+              </a:lnSpc>
+              <a:spcAft>
+                <a:spcPts val="100"/>
+              </a:spcAft>
+              <a:buNone/>
+            </a:pPr>
+            <a:r>
+              <a:rPr lang="en-US" sz="1800" b="1" u="sng" dirty="0">
+                <a:solidFill>
+                  <a:srgbClr val="1F2429"/>
+                </a:solidFill>
+                <a:latin typeface="Calibri" pitchFamily="34" charset="0"/>
+                <a:ea typeface="Calibri" pitchFamily="34" charset="-122"/>
+                <a:cs typeface="Calibri" pitchFamily="34" charset="-120"/>
+              </a:rPr>
+              <a:t>staffNo</a:t>
+            </a:r>
+            <a:endParaRPr lang="en-US" sz="1800" dirty="0"/>
+          </a:p>
+          <a:p>
+            <a:pPr indent="0" marL="0">
+              <a:lnSpc>
+                <a:spcPct val="115000"/>
+              </a:lnSpc>
+              <a:spcAft>
+                <a:spcPts val="100"/>
+              </a:spcAft>
+              <a:buNone/>
+            </a:pPr>
+            <a:r>
+              <a:rPr lang="en-US" sz="1800" dirty="0">
+                <a:solidFill>
+                  <a:srgbClr val="1F2429"/>
+                </a:solidFill>
+                <a:latin typeface="Calibri" pitchFamily="34" charset="0"/>
+                <a:ea typeface="Calibri" pitchFamily="34" charset="-122"/>
+                <a:cs typeface="Calibri" pitchFamily="34" charset="-120"/>
+              </a:rPr>
+              <a:t>name</a:t>
+            </a:r>
+            <a:endParaRPr lang="en-US" sz="1800" dirty="0"/>
+          </a:p>
+          <a:p>
+            <a:pPr indent="0" marL="0">
+              <a:lnSpc>
+                <a:spcPct val="115000"/>
+              </a:lnSpc>
+              <a:spcAft>
+                <a:spcPts val="100"/>
+              </a:spcAft>
+              <a:buNone/>
+            </a:pPr>
+            <a:r>
+              <a:rPr lang="en-US" sz="1800" dirty="0">
+                <a:solidFill>
+                  <a:srgbClr val="1F2429"/>
+                </a:solidFill>
+                <a:latin typeface="Calibri" pitchFamily="34" charset="0"/>
+                <a:ea typeface="Calibri" pitchFamily="34" charset="-122"/>
+                <a:cs typeface="Calibri" pitchFamily="34" charset="-120"/>
+              </a:rPr>
+              <a:t>position</a:t>
+            </a:r>
+            <a:endParaRPr lang="en-US" sz="1800" dirty="0"/>
+          </a:p>
+          <a:p>
+            <a:pPr indent="0" marL="0">
+              <a:lnSpc>
+                <a:spcPct val="115000"/>
+              </a:lnSpc>
+              <a:spcAft>
+                <a:spcPts val="100"/>
+              </a:spcAft>
+              <a:buNone/>
+            </a:pPr>
+            <a:r>
+              <a:rPr lang="en-US" sz="1800" dirty="0">
+                <a:solidFill>
+                  <a:srgbClr val="1F2429"/>
+                </a:solidFill>
+                <a:latin typeface="Calibri" pitchFamily="34" charset="0"/>
+                <a:ea typeface="Calibri" pitchFamily="34" charset="-122"/>
+                <a:cs typeface="Calibri" pitchFamily="34" charset="-120"/>
+              </a:rPr>
+              <a:t>salary</a:t>
+            </a:r>
+            <a:endParaRPr lang="en-US" sz="1800" dirty="0"/>
+          </a:p>
+        </p:txBody>
+      </p:sp>
+      <p:sp>
+        <p:nvSpPr>
+          <p:cNvPr id="10" name="Text 8"/>
+          <p:cNvSpPr txBox="1"/>
+          <p:nvPr/>
+        </p:nvSpPr>
+        <p:spPr>
+          <a:xfrm>
+            <a:off x="6309360" y="4069080"/>
+            <a:ext cx="2011680" cy="274320"/>
+          </a:xfrm>
+          <a:prstGeom prst="rect">
+            <a:avLst/>
+          </a:prstGeom>
+          <a:noFill/>
+          <a:ln/>
+        </p:spPr>
+        <p:txBody>
+          <a:bodyPr wrap="square" lIns="0" tIns="0" rIns="0" bIns="0" rtlCol="0" anchor="ctr"/>
+          <a:lstStyle/>
+          <a:p>
+            <a:pPr algn="ctr" indent="0" marL="0">
+              <a:buNone/>
+            </a:pPr>
+            <a:r>
+              <a:rPr lang="en-US" sz="1800" i="1" dirty="0">
+                <a:solidFill>
+                  <a:srgbClr val="6B7280"/>
+                </a:solidFill>
+                <a:latin typeface="Calibri" pitchFamily="34" charset="0"/>
+                <a:ea typeface="Calibri" pitchFamily="34" charset="-122"/>
+                <a:cs typeface="Calibri" pitchFamily="34" charset="-120"/>
+              </a:rPr>
+              <a:t>Conceptual — an ER entity type</a:t>
+            </a:r>
+            <a:endParaRPr lang="en-US" sz="1800" dirty="0"/>
+          </a:p>
+        </p:txBody>
+      </p:sp>
+      <p:sp>
+        <p:nvSpPr>
+          <p:cNvPr id="11" name="Text 9"/>
+          <p:cNvSpPr txBox="1"/>
+          <p:nvPr/>
+        </p:nvSpPr>
+        <p:spPr>
+          <a:xfrm>
+            <a:off x="8503920" y="1691640"/>
+            <a:ext cx="3200400" cy="640080"/>
+          </a:xfrm>
+          <a:prstGeom prst="rect">
+            <a:avLst/>
+          </a:prstGeom>
+          <a:noFill/>
+          <a:ln/>
+        </p:spPr>
+        <p:txBody>
+          <a:bodyPr wrap="square" lIns="0" tIns="0" rIns="0" bIns="0" rtlCol="0" anchor="ctr"/>
+          <a:lstStyle/>
+          <a:p>
+            <a:pPr indent="0" marL="0">
+              <a:buNone/>
+            </a:pPr>
+            <a:r>
+              <a:rPr lang="en-US" sz="1800" b="1" dirty="0">
+                <a:solidFill>
+                  <a:srgbClr val="8B7FD9"/>
+                </a:solidFill>
+                <a:latin typeface="Courier New" pitchFamily="34" charset="0"/>
+                <a:ea typeface="Courier New" pitchFamily="34" charset="-122"/>
+                <a:cs typeface="Courier New" pitchFamily="34" charset="-120"/>
+              </a:rPr>
+              <a:t>Logical — the mapped relation</a:t>
+            </a:r>
+            <a:endParaRPr lang="en-US" sz="1800" dirty="0"/>
+          </a:p>
+        </p:txBody>
+      </p:sp>
+      <p:graphicFrame>
+        <p:nvGraphicFramePr>
+          <p:cNvPr id="9" name="Table 0"/>
+          <p:cNvGraphicFramePr>
+            <a:graphicFrameLocks noGrp="1"/>
+          </p:cNvGraphicFramePr>
+          <p:nvPr>
+            <p:extLst>
+              <p:ext uri="{D42A27DB-BD31-4B8C-83A1-F6EECF244321}">
+                <p14:modId xmlns:p14="http://schemas.microsoft.com/office/powerpoint/2010/main" val="1579011935"/>
+              </p:ext>
+            </p:extLst>
+          </p:nvPr>
+        </p:nvGraphicFramePr>
+        <p:xfrm>
+          <a:off x="8503920" y="2423160"/>
+          <a:ext cx="3200400" cy="914400"/>
+        </p:xfrm>
+        <a:graphic>
+          <a:graphicData uri="http://schemas.openxmlformats.org/drawingml/2006/table">
+            <a:tbl>
+              <a:tblPr/>
+              <a:tblGrid>
+                <a:gridCol w="740000"/>
+                <a:gridCol w="680000"/>
+                <a:gridCol w="1140000"/>
+                <a:gridCol w="640400"/>
+              </a:tblGrid>
+              <a:tr h="365760">
+                <a:tc>
+                  <a:txBody>
+                    <a:bodyPr/>
+                    <a:lstStyle/>
+                    <a:p>
+                      <a:pPr algn="ctr" indent="0" marL="0">
+                        <a:buNone/>
+                      </a:pPr>
+                      <a:r>
+                        <a:rPr lang="en-US" sz="1400" b="1" dirty="0">
+                          <a:solidFill>
+                            <a:srgbClr val="FFFFFF"/>
+                          </a:solidFill>
+                          <a:latin typeface="Calibri" pitchFamily="34" charset="0"/>
+                          <a:ea typeface="Calibri" pitchFamily="34" charset="-122"/>
+                          <a:cs typeface="Calibri" pitchFamily="34" charset="-120"/>
+                        </a:rPr>
+                        <a:t>staffNo</a:t>
+                      </a:r>
+                      <a:endParaRPr lang="en-US" sz="1400" dirty="0">
+                        <a:latin typeface="Calibri" charset="0"/>
+                        <a:ea typeface="Calibri" charset="0"/>
+                        <a:cs typeface="Calibri" charset="0"/>
+                      </a:endParaRPr>
+                    </a:p>
+                  </a:txBody>
+                  <a:tcPr marL="91440" marR="91440" marT="45720" marB="45720" anchor="ctr">
+                    <a:lnL w="12700" cap="flat" cmpd="sng" algn="ctr">
+                      <a:solidFill>
+                        <a:srgbClr val="E2E5E9"/>
+                      </a:solidFill>
+                      <a:prstDash val="solid"/>
+                      <a:round/>
+                      <a:headEnd type="none" w="med" len="med"/>
+                      <a:tailEnd type="none" w="med" len="med"/>
+                    </a:lnL>
+                    <a:lnR w="12700" cap="flat" cmpd="sng" algn="ctr">
+                      <a:solidFill>
+                        <a:srgbClr val="E2E5E9"/>
+                      </a:solidFill>
+                      <a:prstDash val="solid"/>
+                      <a:round/>
+                      <a:headEnd type="none" w="med" len="med"/>
+                      <a:tailEnd type="none" w="med" len="med"/>
+                    </a:lnR>
+                    <a:lnT w="12700" cap="flat" cmpd="sng" algn="ctr">
+                      <a:solidFill>
+                        <a:srgbClr val="E2E5E9"/>
+                      </a:solidFill>
+                      <a:prstDash val="solid"/>
+                      <a:round/>
+                      <a:headEnd type="none" w="med" len="med"/>
+                      <a:tailEnd type="none" w="med" len="med"/>
+                    </a:lnT>
+                    <a:lnB w="12700" cap="flat" cmpd="sng" algn="ctr">
+                      <a:solidFill>
+                        <a:srgbClr val="E2E5E9"/>
+                      </a:solidFill>
+                      <a:prstDash val="solid"/>
+                      <a:round/>
+                      <a:headEnd type="none" w="med" len="med"/>
+                      <a:tailEnd type="none" w="med" len="med"/>
+                    </a:lnB>
+                    <a:solidFill>
+                      <a:srgbClr val="14181C"/>
+                    </a:solidFill>
+                  </a:tcPr>
+                </a:tc>
+                <a:tc>
+                  <a:txBody>
+                    <a:bodyPr/>
+                    <a:lstStyle/>
+                    <a:p>
+                      <a:pPr algn="ctr" indent="0" marL="0">
+                        <a:buNone/>
+                      </a:pPr>
+                      <a:r>
+                        <a:rPr lang="en-US" sz="1400" b="1" dirty="0">
+                          <a:solidFill>
+                            <a:srgbClr val="FFFFFF"/>
+                          </a:solidFill>
+                          <a:latin typeface="Calibri" pitchFamily="34" charset="0"/>
+                          <a:ea typeface="Calibri" pitchFamily="34" charset="-122"/>
+                          <a:cs typeface="Calibri" pitchFamily="34" charset="-120"/>
+                        </a:rPr>
+                        <a:t>name</a:t>
+                      </a:r>
+                      <a:endParaRPr lang="en-US" sz="1400" dirty="0">
+                        <a:latin typeface="Calibri" charset="0"/>
+                        <a:ea typeface="Calibri" charset="0"/>
+                        <a:cs typeface="Calibri" charset="0"/>
+                      </a:endParaRPr>
+                    </a:p>
+                  </a:txBody>
+                  <a:tcPr marL="91440" marR="91440" marT="45720" marB="45720" anchor="ctr">
+                    <a:lnL w="12700" cap="flat" cmpd="sng" algn="ctr">
+                      <a:solidFill>
+                        <a:srgbClr val="E2E5E9"/>
+                      </a:solidFill>
+                      <a:prstDash val="solid"/>
+                      <a:round/>
+                      <a:headEnd type="none" w="med" len="med"/>
+                      <a:tailEnd type="none" w="med" len="med"/>
+                    </a:lnL>
+                    <a:lnR w="12700" cap="flat" cmpd="sng" algn="ctr">
+                      <a:solidFill>
+                        <a:srgbClr val="E2E5E9"/>
+                      </a:solidFill>
+                      <a:prstDash val="solid"/>
+                      <a:round/>
+                      <a:headEnd type="none" w="med" len="med"/>
+                      <a:tailEnd type="none" w="med" len="med"/>
+                    </a:lnR>
+                    <a:lnT w="12700" cap="flat" cmpd="sng" algn="ctr">
+                      <a:solidFill>
+                        <a:srgbClr val="E2E5E9"/>
+                      </a:solidFill>
+                      <a:prstDash val="solid"/>
+                      <a:round/>
+                      <a:headEnd type="none" w="med" len="med"/>
+                      <a:tailEnd type="none" w="med" len="med"/>
+                    </a:lnT>
+                    <a:lnB w="12700" cap="flat" cmpd="sng" algn="ctr">
+                      <a:solidFill>
+                        <a:srgbClr val="E2E5E9"/>
+                      </a:solidFill>
+                      <a:prstDash val="solid"/>
+                      <a:round/>
+                      <a:headEnd type="none" w="med" len="med"/>
+                      <a:tailEnd type="none" w="med" len="med"/>
+                    </a:lnB>
+                    <a:solidFill>
+                      <a:srgbClr val="14181C"/>
+                    </a:solidFill>
+                  </a:tcPr>
+                </a:tc>
+                <a:tc>
+                  <a:txBody>
+                    <a:bodyPr/>
+                    <a:lstStyle/>
+                    <a:p>
+                      <a:pPr algn="ctr" indent="0" marL="0">
+                        <a:buNone/>
+                      </a:pPr>
+                      <a:r>
+                        <a:rPr lang="en-US" sz="1400" b="1" dirty="0">
+                          <a:solidFill>
+                            <a:srgbClr val="FFFFFF"/>
+                          </a:solidFill>
+                          <a:latin typeface="Calibri" pitchFamily="34" charset="0"/>
+                          <a:ea typeface="Calibri" pitchFamily="34" charset="-122"/>
+                          <a:cs typeface="Calibri" pitchFamily="34" charset="-120"/>
+                        </a:rPr>
+                        <a:t>position</a:t>
+                      </a:r>
+                      <a:endParaRPr lang="en-US" sz="1400" dirty="0">
+                        <a:latin typeface="Calibri" charset="0"/>
+                        <a:ea typeface="Calibri" charset="0"/>
+                        <a:cs typeface="Calibri" charset="0"/>
+                      </a:endParaRPr>
+                    </a:p>
+                  </a:txBody>
+                  <a:tcPr marL="91440" marR="91440" marT="45720" marB="45720" anchor="ctr">
+                    <a:lnL w="12700" cap="flat" cmpd="sng" algn="ctr">
+                      <a:solidFill>
+                        <a:srgbClr val="E2E5E9"/>
+                      </a:solidFill>
+                      <a:prstDash val="solid"/>
+                      <a:round/>
+                      <a:headEnd type="none" w="med" len="med"/>
+                      <a:tailEnd type="none" w="med" len="med"/>
+                    </a:lnL>
+                    <a:lnR w="12700" cap="flat" cmpd="sng" algn="ctr">
+                      <a:solidFill>
+                        <a:srgbClr val="E2E5E9"/>
+                      </a:solidFill>
+                      <a:prstDash val="solid"/>
+                      <a:round/>
+                      <a:headEnd type="none" w="med" len="med"/>
+                      <a:tailEnd type="none" w="med" len="med"/>
+                    </a:lnR>
+                    <a:lnT w="12700" cap="flat" cmpd="sng" algn="ctr">
+                      <a:solidFill>
+                        <a:srgbClr val="E2E5E9"/>
+                      </a:solidFill>
+                      <a:prstDash val="solid"/>
+                      <a:round/>
+                      <a:headEnd type="none" w="med" len="med"/>
+                      <a:tailEnd type="none" w="med" len="med"/>
+                    </a:lnT>
+                    <a:lnB w="12700" cap="flat" cmpd="sng" algn="ctr">
+                      <a:solidFill>
+                        <a:srgbClr val="E2E5E9"/>
+                      </a:solidFill>
+                      <a:prstDash val="solid"/>
+                      <a:round/>
+                      <a:headEnd type="none" w="med" len="med"/>
+                      <a:tailEnd type="none" w="med" len="med"/>
+                    </a:lnB>
+                    <a:solidFill>
+                      <a:srgbClr val="14181C"/>
+                    </a:solidFill>
+                  </a:tcPr>
+                </a:tc>
+                <a:tc>
+                  <a:txBody>
+                    <a:bodyPr/>
+                    <a:lstStyle/>
+                    <a:p>
+                      <a:pPr algn="ctr" indent="0" marL="0">
+                        <a:buNone/>
+                      </a:pPr>
+                      <a:r>
+                        <a:rPr lang="en-US" sz="1400" b="1" dirty="0">
+                          <a:solidFill>
+                            <a:srgbClr val="FFFFFF"/>
+                          </a:solidFill>
+                          <a:latin typeface="Calibri" pitchFamily="34" charset="0"/>
+                          <a:ea typeface="Calibri" pitchFamily="34" charset="-122"/>
+                          <a:cs typeface="Calibri" pitchFamily="34" charset="-120"/>
+                        </a:rPr>
+                        <a:t>salary</a:t>
+                      </a:r>
+                      <a:endParaRPr lang="en-US" sz="1400" dirty="0">
+                        <a:latin typeface="Calibri" charset="0"/>
+                        <a:ea typeface="Calibri" charset="0"/>
+                        <a:cs typeface="Calibri" charset="0"/>
+                      </a:endParaRPr>
+                    </a:p>
+                  </a:txBody>
+                  <a:tcPr marL="91440" marR="91440" marT="45720" marB="45720" anchor="ctr">
+                    <a:lnL w="12700" cap="flat" cmpd="sng" algn="ctr">
+                      <a:solidFill>
+                        <a:srgbClr val="E2E5E9"/>
+                      </a:solidFill>
+                      <a:prstDash val="solid"/>
+                      <a:round/>
+                      <a:headEnd type="none" w="med" len="med"/>
+                      <a:tailEnd type="none" w="med" len="med"/>
+                    </a:lnL>
+                    <a:lnR w="12700" cap="flat" cmpd="sng" algn="ctr">
+                      <a:solidFill>
+                        <a:srgbClr val="E2E5E9"/>
+                      </a:solidFill>
+                      <a:prstDash val="solid"/>
+                      <a:round/>
+                      <a:headEnd type="none" w="med" len="med"/>
+                      <a:tailEnd type="none" w="med" len="med"/>
+                    </a:lnR>
+                    <a:lnT w="12700" cap="flat" cmpd="sng" algn="ctr">
+                      <a:solidFill>
+                        <a:srgbClr val="E2E5E9"/>
+                      </a:solidFill>
+                      <a:prstDash val="solid"/>
+                      <a:round/>
+                      <a:headEnd type="none" w="med" len="med"/>
+                      <a:tailEnd type="none" w="med" len="med"/>
+                    </a:lnT>
+                    <a:lnB w="12700" cap="flat" cmpd="sng" algn="ctr">
+                      <a:solidFill>
+                        <a:srgbClr val="E2E5E9"/>
+                      </a:solidFill>
+                      <a:prstDash val="solid"/>
+                      <a:round/>
+                      <a:headEnd type="none" w="med" len="med"/>
+                      <a:tailEnd type="none" w="med" len="med"/>
+                    </a:lnB>
+                    <a:solidFill>
+                      <a:srgbClr val="14181C"/>
+                    </a:solidFill>
+                  </a:tcPr>
+                </a:tc>
+              </a:tr>
+              <a:tr h="365760">
+                <a:tc>
+                  <a:txBody>
+                    <a:bodyPr/>
+                    <a:lstStyle/>
+                    <a:p>
+                      <a:pPr algn="ctr" indent="0" marL="0">
+                        <a:buNone/>
+                      </a:pPr>
+                      <a:r>
+                        <a:rPr lang="en-US" sz="1400" dirty="0">
+                          <a:solidFill>
+                            <a:srgbClr val="1F2429"/>
+                          </a:solidFill>
+                          <a:latin typeface="Calibri" pitchFamily="34" charset="0"/>
+                          <a:ea typeface="Calibri" pitchFamily="34" charset="-122"/>
+                          <a:cs typeface="Calibri" pitchFamily="34" charset="-120"/>
+                        </a:rPr>
+                        <a:t>SL21</a:t>
+                      </a:r>
+                      <a:endParaRPr lang="en-US" sz="1400" dirty="0">
+                        <a:latin typeface="Calibri" charset="0"/>
+                        <a:ea typeface="Calibri" charset="0"/>
+                        <a:cs typeface="Calibri" charset="0"/>
+                      </a:endParaRPr>
+                    </a:p>
+                  </a:txBody>
+                  <a:tcPr marL="91440" marR="91440" marT="45720" marB="45720" anchor="ctr">
+                    <a:lnL w="12700" cap="flat" cmpd="sng" algn="ctr">
+                      <a:solidFill>
+                        <a:srgbClr val="E2E5E9"/>
+                      </a:solidFill>
+                      <a:prstDash val="solid"/>
+                      <a:round/>
+                      <a:headEnd type="none" w="med" len="med"/>
+                      <a:tailEnd type="none" w="med" len="med"/>
+                    </a:lnL>
+                    <a:lnR w="12700" cap="flat" cmpd="sng" algn="ctr">
+                      <a:solidFill>
+                        <a:srgbClr val="E2E5E9"/>
+                      </a:solidFill>
+                      <a:prstDash val="solid"/>
+                      <a:round/>
+                      <a:headEnd type="none" w="med" len="med"/>
+                      <a:tailEnd type="none" w="med" len="med"/>
+                    </a:lnR>
+                    <a:lnT w="12700" cap="flat" cmpd="sng" algn="ctr">
+                      <a:solidFill>
+                        <a:srgbClr val="E2E5E9"/>
+                      </a:solidFill>
+                      <a:prstDash val="solid"/>
+                      <a:round/>
+                      <a:headEnd type="none" w="med" len="med"/>
+                      <a:tailEnd type="none" w="med" len="med"/>
+                    </a:lnT>
+                    <a:lnB w="12700" cap="flat" cmpd="sng" algn="ctr">
+                      <a:solidFill>
+                        <a:srgbClr val="E2E5E9"/>
+                      </a:solidFill>
+                      <a:prstDash val="solid"/>
+                      <a:round/>
+                      <a:headEnd type="none" w="med" len="med"/>
+                      <a:tailEnd type="none" w="med" len="med"/>
+                    </a:lnB>
+                    <a:solidFill>
+                      <a:srgbClr val="FFFFFF"/>
+                    </a:solidFill>
+                  </a:tcPr>
+                </a:tc>
+                <a:tc>
+                  <a:txBody>
+                    <a:bodyPr/>
+                    <a:lstStyle/>
+                    <a:p>
+                      <a:pPr algn="ctr" indent="0" marL="0">
+                        <a:buNone/>
+                      </a:pPr>
+                      <a:r>
+                        <a:rPr lang="en-US" sz="1400" dirty="0">
+                          <a:solidFill>
+                            <a:srgbClr val="1F2429"/>
+                          </a:solidFill>
+                          <a:latin typeface="Calibri" pitchFamily="34" charset="0"/>
+                          <a:ea typeface="Calibri" pitchFamily="34" charset="-122"/>
+                          <a:cs typeface="Calibri" pitchFamily="34" charset="-120"/>
+                        </a:rPr>
+                        <a:t>John White</a:t>
+                      </a:r>
+                      <a:endParaRPr lang="en-US" sz="1400" dirty="0">
+                        <a:latin typeface="Calibri" charset="0"/>
+                        <a:ea typeface="Calibri" charset="0"/>
+                        <a:cs typeface="Calibri" charset="0"/>
+                      </a:endParaRPr>
+                    </a:p>
+                  </a:txBody>
+                  <a:tcPr marL="91440" marR="91440" marT="45720" marB="45720" anchor="ctr">
+                    <a:lnL w="12700" cap="flat" cmpd="sng" algn="ctr">
+                      <a:solidFill>
+                        <a:srgbClr val="E2E5E9"/>
+                      </a:solidFill>
+                      <a:prstDash val="solid"/>
+                      <a:round/>
+                      <a:headEnd type="none" w="med" len="med"/>
+                      <a:tailEnd type="none" w="med" len="med"/>
+                    </a:lnL>
+                    <a:lnR w="12700" cap="flat" cmpd="sng" algn="ctr">
+                      <a:solidFill>
+                        <a:srgbClr val="E2E5E9"/>
+                      </a:solidFill>
+                      <a:prstDash val="solid"/>
+                      <a:round/>
+                      <a:headEnd type="none" w="med" len="med"/>
+                      <a:tailEnd type="none" w="med" len="med"/>
+                    </a:lnR>
+                    <a:lnT w="12700" cap="flat" cmpd="sng" algn="ctr">
+                      <a:solidFill>
+                        <a:srgbClr val="E2E5E9"/>
+                      </a:solidFill>
+                      <a:prstDash val="solid"/>
+                      <a:round/>
+                      <a:headEnd type="none" w="med" len="med"/>
+                      <a:tailEnd type="none" w="med" len="med"/>
+                    </a:lnT>
+                    <a:lnB w="12700" cap="flat" cmpd="sng" algn="ctr">
+                      <a:solidFill>
+                        <a:srgbClr val="E2E5E9"/>
+                      </a:solidFill>
+                      <a:prstDash val="solid"/>
+                      <a:round/>
+                      <a:headEnd type="none" w="med" len="med"/>
+                      <a:tailEnd type="none" w="med" len="med"/>
+                    </a:lnB>
+                    <a:solidFill>
+                      <a:srgbClr val="FFFFFF"/>
+                    </a:solidFill>
+                  </a:tcPr>
+                </a:tc>
+                <a:tc>
+                  <a:txBody>
+                    <a:bodyPr/>
+                    <a:lstStyle/>
+                    <a:p>
+                      <a:pPr algn="ctr" indent="0" marL="0">
+                        <a:buNone/>
+                      </a:pPr>
+                      <a:r>
+                        <a:rPr lang="en-US" sz="1400" dirty="0">
+                          <a:solidFill>
+                            <a:srgbClr val="1F2429"/>
+                          </a:solidFill>
+                          <a:latin typeface="Calibri" pitchFamily="34" charset="0"/>
+                          <a:ea typeface="Calibri" pitchFamily="34" charset="-122"/>
+                          <a:cs typeface="Calibri" pitchFamily="34" charset="-120"/>
+                        </a:rPr>
+                        <a:t>Manager</a:t>
+                      </a:r>
+                      <a:endParaRPr lang="en-US" sz="1400" dirty="0">
+                        <a:latin typeface="Calibri" charset="0"/>
+                        <a:ea typeface="Calibri" charset="0"/>
+                        <a:cs typeface="Calibri" charset="0"/>
+                      </a:endParaRPr>
+                    </a:p>
+                  </a:txBody>
+                  <a:tcPr marL="91440" marR="91440" marT="45720" marB="45720" anchor="ctr">
+                    <a:lnL w="12700" cap="flat" cmpd="sng" algn="ctr">
+                      <a:solidFill>
+                        <a:srgbClr val="E2E5E9"/>
+                      </a:solidFill>
+                      <a:prstDash val="solid"/>
+                      <a:round/>
+                      <a:headEnd type="none" w="med" len="med"/>
+                      <a:tailEnd type="none" w="med" len="med"/>
+                    </a:lnL>
+                    <a:lnR w="12700" cap="flat" cmpd="sng" algn="ctr">
+                      <a:solidFill>
+                        <a:srgbClr val="E2E5E9"/>
+                      </a:solidFill>
+                      <a:prstDash val="solid"/>
+                      <a:round/>
+                      <a:headEnd type="none" w="med" len="med"/>
+                      <a:tailEnd type="none" w="med" len="med"/>
+                    </a:lnR>
+                    <a:lnT w="12700" cap="flat" cmpd="sng" algn="ctr">
+                      <a:solidFill>
+                        <a:srgbClr val="E2E5E9"/>
+                      </a:solidFill>
+                      <a:prstDash val="solid"/>
+                      <a:round/>
+                      <a:headEnd type="none" w="med" len="med"/>
+                      <a:tailEnd type="none" w="med" len="med"/>
+                    </a:lnT>
+                    <a:lnB w="12700" cap="flat" cmpd="sng" algn="ctr">
+                      <a:solidFill>
+                        <a:srgbClr val="E2E5E9"/>
+                      </a:solidFill>
+                      <a:prstDash val="solid"/>
+                      <a:round/>
+                      <a:headEnd type="none" w="med" len="med"/>
+                      <a:tailEnd type="none" w="med" len="med"/>
+                    </a:lnB>
+                    <a:solidFill>
+                      <a:srgbClr val="FFFFFF"/>
+                    </a:solidFill>
+                  </a:tcPr>
+                </a:tc>
+                <a:tc>
+                  <a:txBody>
+                    <a:bodyPr/>
+                    <a:lstStyle/>
+                    <a:p>
+                      <a:pPr algn="ctr" indent="0" marL="0">
+                        <a:buNone/>
+                      </a:pPr>
+                      <a:r>
+                        <a:rPr lang="en-US" sz="1400" dirty="0">
+                          <a:solidFill>
+                            <a:srgbClr val="1F2429"/>
+                          </a:solidFill>
+                          <a:latin typeface="Calibri" pitchFamily="34" charset="0"/>
+                          <a:ea typeface="Calibri" pitchFamily="34" charset="-122"/>
+                          <a:cs typeface="Calibri" pitchFamily="34" charset="-120"/>
+                        </a:rPr>
+                        <a:t>30000</a:t>
+                      </a:r>
+                      <a:endParaRPr lang="en-US" sz="1400" dirty="0">
+                        <a:latin typeface="Calibri" charset="0"/>
+                        <a:ea typeface="Calibri" charset="0"/>
+                        <a:cs typeface="Calibri" charset="0"/>
+                      </a:endParaRPr>
+                    </a:p>
+                  </a:txBody>
+                  <a:tcPr marL="91440" marR="91440" marT="45720" marB="45720" anchor="ctr">
+                    <a:lnL w="12700" cap="flat" cmpd="sng" algn="ctr">
+                      <a:solidFill>
+                        <a:srgbClr val="E2E5E9"/>
+                      </a:solidFill>
+                      <a:prstDash val="solid"/>
+                      <a:round/>
+                      <a:headEnd type="none" w="med" len="med"/>
+                      <a:tailEnd type="none" w="med" len="med"/>
+                    </a:lnL>
+                    <a:lnR w="12700" cap="flat" cmpd="sng" algn="ctr">
+                      <a:solidFill>
+                        <a:srgbClr val="E2E5E9"/>
+                      </a:solidFill>
+                      <a:prstDash val="solid"/>
+                      <a:round/>
+                      <a:headEnd type="none" w="med" len="med"/>
+                      <a:tailEnd type="none" w="med" len="med"/>
+                    </a:lnR>
+                    <a:lnT w="12700" cap="flat" cmpd="sng" algn="ctr">
+                      <a:solidFill>
+                        <a:srgbClr val="E2E5E9"/>
+                      </a:solidFill>
+                      <a:prstDash val="solid"/>
+                      <a:round/>
+                      <a:headEnd type="none" w="med" len="med"/>
+                      <a:tailEnd type="none" w="med" len="med"/>
+                    </a:lnT>
+                    <a:lnB w="12700" cap="flat" cmpd="sng" algn="ctr">
+                      <a:solidFill>
+                        <a:srgbClr val="E2E5E9"/>
+                      </a:solidFill>
+                      <a:prstDash val="solid"/>
+                      <a:round/>
+                      <a:headEnd type="none" w="med" len="med"/>
+                      <a:tailEnd type="none" w="med" len="med"/>
+                    </a:lnB>
+                    <a:solidFill>
+                      <a:srgbClr val="FFFFFF"/>
+                    </a:solidFill>
+                  </a:tcPr>
+                </a:tc>
+              </a:tr>
+              <a:tr h="365760">
+                <a:tc>
+                  <a:txBody>
+                    <a:bodyPr/>
+                    <a:lstStyle/>
+                    <a:p>
+                      <a:pPr algn="ctr" indent="0" marL="0">
+                        <a:buNone/>
+                      </a:pPr>
+                      <a:r>
+                        <a:rPr lang="en-US" sz="1400" dirty="0">
+                          <a:solidFill>
+                            <a:srgbClr val="1F2429"/>
+                          </a:solidFill>
+                          <a:latin typeface="Calibri" pitchFamily="34" charset="0"/>
+                          <a:ea typeface="Calibri" pitchFamily="34" charset="-122"/>
+                          <a:cs typeface="Calibri" pitchFamily="34" charset="-120"/>
+                        </a:rPr>
+                        <a:t>SG37</a:t>
+                      </a:r>
+                      <a:endParaRPr lang="en-US" sz="1400" dirty="0">
+                        <a:latin typeface="Calibri" charset="0"/>
+                        <a:ea typeface="Calibri" charset="0"/>
+                        <a:cs typeface="Calibri" charset="0"/>
+                      </a:endParaRPr>
+                    </a:p>
+                  </a:txBody>
+                  <a:tcPr marL="91440" marR="91440" marT="45720" marB="45720" anchor="ctr">
+                    <a:lnL w="12700" cap="flat" cmpd="sng" algn="ctr">
+                      <a:solidFill>
+                        <a:srgbClr val="E2E5E9"/>
+                      </a:solidFill>
+                      <a:prstDash val="solid"/>
+                      <a:round/>
+                      <a:headEnd type="none" w="med" len="med"/>
+                      <a:tailEnd type="none" w="med" len="med"/>
+                    </a:lnL>
+                    <a:lnR w="12700" cap="flat" cmpd="sng" algn="ctr">
+                      <a:solidFill>
+                        <a:srgbClr val="E2E5E9"/>
+                      </a:solidFill>
+                      <a:prstDash val="solid"/>
+                      <a:round/>
+                      <a:headEnd type="none" w="med" len="med"/>
+                      <a:tailEnd type="none" w="med" len="med"/>
+                    </a:lnR>
+                    <a:lnT w="12700" cap="flat" cmpd="sng" algn="ctr">
+                      <a:solidFill>
+                        <a:srgbClr val="E2E5E9"/>
+                      </a:solidFill>
+                      <a:prstDash val="solid"/>
+                      <a:round/>
+                      <a:headEnd type="none" w="med" len="med"/>
+                      <a:tailEnd type="none" w="med" len="med"/>
+                    </a:lnT>
+                    <a:lnB w="12700" cap="flat" cmpd="sng" algn="ctr">
+                      <a:solidFill>
+                        <a:srgbClr val="E2E5E9"/>
+                      </a:solidFill>
+                      <a:prstDash val="solid"/>
+                      <a:round/>
+                      <a:headEnd type="none" w="med" len="med"/>
+                      <a:tailEnd type="none" w="med" len="med"/>
+                    </a:lnB>
+                    <a:solidFill>
+                      <a:srgbClr val="F0F2F4"/>
+                    </a:solidFill>
+                  </a:tcPr>
+                </a:tc>
+                <a:tc>
+                  <a:txBody>
+                    <a:bodyPr/>
+                    <a:lstStyle/>
+                    <a:p>
+                      <a:pPr algn="ctr" indent="0" marL="0">
+                        <a:buNone/>
+                      </a:pPr>
+                      <a:r>
+                        <a:rPr lang="en-US" sz="1400" dirty="0">
+                          <a:solidFill>
+                            <a:srgbClr val="1F2429"/>
+                          </a:solidFill>
+                          <a:latin typeface="Calibri" pitchFamily="34" charset="0"/>
+                          <a:ea typeface="Calibri" pitchFamily="34" charset="-122"/>
+                          <a:cs typeface="Calibri" pitchFamily="34" charset="-120"/>
+                        </a:rPr>
+                        <a:t>Ann Beech</a:t>
+                      </a:r>
+                      <a:endParaRPr lang="en-US" sz="1400" dirty="0">
+                        <a:latin typeface="Calibri" charset="0"/>
+                        <a:ea typeface="Calibri" charset="0"/>
+                        <a:cs typeface="Calibri" charset="0"/>
+                      </a:endParaRPr>
+                    </a:p>
+                  </a:txBody>
+                  <a:tcPr marL="91440" marR="91440" marT="45720" marB="45720" anchor="ctr">
+                    <a:lnL w="12700" cap="flat" cmpd="sng" algn="ctr">
+                      <a:solidFill>
+                        <a:srgbClr val="E2E5E9"/>
+                      </a:solidFill>
+                      <a:prstDash val="solid"/>
+                      <a:round/>
+                      <a:headEnd type="none" w="med" len="med"/>
+                      <a:tailEnd type="none" w="med" len="med"/>
+                    </a:lnL>
+                    <a:lnR w="12700" cap="flat" cmpd="sng" algn="ctr">
+                      <a:solidFill>
+                        <a:srgbClr val="E2E5E9"/>
+                      </a:solidFill>
+                      <a:prstDash val="solid"/>
+                      <a:round/>
+                      <a:headEnd type="none" w="med" len="med"/>
+                      <a:tailEnd type="none" w="med" len="med"/>
+                    </a:lnR>
+                    <a:lnT w="12700" cap="flat" cmpd="sng" algn="ctr">
+                      <a:solidFill>
+                        <a:srgbClr val="E2E5E9"/>
+                      </a:solidFill>
+                      <a:prstDash val="solid"/>
+                      <a:round/>
+                      <a:headEnd type="none" w="med" len="med"/>
+                      <a:tailEnd type="none" w="med" len="med"/>
+                    </a:lnT>
+                    <a:lnB w="12700" cap="flat" cmpd="sng" algn="ctr">
+                      <a:solidFill>
+                        <a:srgbClr val="E2E5E9"/>
+                      </a:solidFill>
+                      <a:prstDash val="solid"/>
+                      <a:round/>
+                      <a:headEnd type="none" w="med" len="med"/>
+                      <a:tailEnd type="none" w="med" len="med"/>
+                    </a:lnB>
+                    <a:solidFill>
+                      <a:srgbClr val="F0F2F4"/>
+                    </a:solidFill>
+                  </a:tcPr>
+                </a:tc>
+                <a:tc>
+                  <a:txBody>
+                    <a:bodyPr/>
+                    <a:lstStyle/>
+                    <a:p>
+                      <a:pPr algn="ctr" indent="0" marL="0">
+                        <a:buNone/>
+                      </a:pPr>
+                      <a:r>
+                        <a:rPr lang="en-US" sz="1400" dirty="0">
+                          <a:solidFill>
+                            <a:srgbClr val="1F2429"/>
+                          </a:solidFill>
+                          <a:latin typeface="Calibri" pitchFamily="34" charset="0"/>
+                          <a:ea typeface="Calibri" pitchFamily="34" charset="-122"/>
+                          <a:cs typeface="Calibri" pitchFamily="34" charset="-120"/>
+                        </a:rPr>
+                        <a:t>Assistant</a:t>
+                      </a:r>
+                      <a:endParaRPr lang="en-US" sz="1400" dirty="0">
+                        <a:latin typeface="Calibri" charset="0"/>
+                        <a:ea typeface="Calibri" charset="0"/>
+                        <a:cs typeface="Calibri" charset="0"/>
+                      </a:endParaRPr>
+                    </a:p>
+                  </a:txBody>
+                  <a:tcPr marL="91440" marR="91440" marT="45720" marB="45720" anchor="ctr">
+                    <a:lnL w="12700" cap="flat" cmpd="sng" algn="ctr">
+                      <a:solidFill>
+                        <a:srgbClr val="E2E5E9"/>
+                      </a:solidFill>
+                      <a:prstDash val="solid"/>
+                      <a:round/>
+                      <a:headEnd type="none" w="med" len="med"/>
+                      <a:tailEnd type="none" w="med" len="med"/>
+                    </a:lnL>
+                    <a:lnR w="12700" cap="flat" cmpd="sng" algn="ctr">
+                      <a:solidFill>
+                        <a:srgbClr val="E2E5E9"/>
+                      </a:solidFill>
+                      <a:prstDash val="solid"/>
+                      <a:round/>
+                      <a:headEnd type="none" w="med" len="med"/>
+                      <a:tailEnd type="none" w="med" len="med"/>
+                    </a:lnR>
+                    <a:lnT w="12700" cap="flat" cmpd="sng" algn="ctr">
+                      <a:solidFill>
+                        <a:srgbClr val="E2E5E9"/>
+                      </a:solidFill>
+                      <a:prstDash val="solid"/>
+                      <a:round/>
+                      <a:headEnd type="none" w="med" len="med"/>
+                      <a:tailEnd type="none" w="med" len="med"/>
+                    </a:lnT>
+                    <a:lnB w="12700" cap="flat" cmpd="sng" algn="ctr">
+                      <a:solidFill>
+                        <a:srgbClr val="E2E5E9"/>
+                      </a:solidFill>
+                      <a:prstDash val="solid"/>
+                      <a:round/>
+                      <a:headEnd type="none" w="med" len="med"/>
+                      <a:tailEnd type="none" w="med" len="med"/>
+                    </a:lnB>
+                    <a:solidFill>
+                      <a:srgbClr val="F0F2F4"/>
+                    </a:solidFill>
+                  </a:tcPr>
+                </a:tc>
+                <a:tc>
+                  <a:txBody>
+                    <a:bodyPr/>
+                    <a:lstStyle/>
+                    <a:p>
+                      <a:pPr algn="ctr" indent="0" marL="0">
+                        <a:buNone/>
+                      </a:pPr>
+                      <a:r>
+                        <a:rPr lang="en-US" sz="1400" dirty="0">
+                          <a:solidFill>
+                            <a:srgbClr val="1F2429"/>
+                          </a:solidFill>
+                          <a:latin typeface="Calibri" pitchFamily="34" charset="0"/>
+                          <a:ea typeface="Calibri" pitchFamily="34" charset="-122"/>
+                          <a:cs typeface="Calibri" pitchFamily="34" charset="-120"/>
+                        </a:rPr>
+                        <a:t>12000</a:t>
+                      </a:r>
+                      <a:endParaRPr lang="en-US" sz="1400" dirty="0">
+                        <a:latin typeface="Calibri" charset="0"/>
+                        <a:ea typeface="Calibri" charset="0"/>
+                        <a:cs typeface="Calibri" charset="0"/>
+                      </a:endParaRPr>
+                    </a:p>
+                  </a:txBody>
+                  <a:tcPr marL="91440" marR="91440" marT="45720" marB="45720" anchor="ctr">
+                    <a:lnL w="12700" cap="flat" cmpd="sng" algn="ctr">
+                      <a:solidFill>
+                        <a:srgbClr val="E2E5E9"/>
+                      </a:solidFill>
+                      <a:prstDash val="solid"/>
+                      <a:round/>
+                      <a:headEnd type="none" w="med" len="med"/>
+                      <a:tailEnd type="none" w="med" len="med"/>
+                    </a:lnL>
+                    <a:lnR w="12700" cap="flat" cmpd="sng" algn="ctr">
+                      <a:solidFill>
+                        <a:srgbClr val="E2E5E9"/>
+                      </a:solidFill>
+                      <a:prstDash val="solid"/>
+                      <a:round/>
+                      <a:headEnd type="none" w="med" len="med"/>
+                      <a:tailEnd type="none" w="med" len="med"/>
+                    </a:lnR>
+                    <a:lnT w="12700" cap="flat" cmpd="sng" algn="ctr">
+                      <a:solidFill>
+                        <a:srgbClr val="E2E5E9"/>
+                      </a:solidFill>
+                      <a:prstDash val="solid"/>
+                      <a:round/>
+                      <a:headEnd type="none" w="med" len="med"/>
+                      <a:tailEnd type="none" w="med" len="med"/>
+                    </a:lnT>
+                    <a:lnB w="12700" cap="flat" cmpd="sng" algn="ctr">
+                      <a:solidFill>
+                        <a:srgbClr val="E2E5E9"/>
+                      </a:solidFill>
+                      <a:prstDash val="solid"/>
+                      <a:round/>
+                      <a:headEnd type="none" w="med" len="med"/>
+                      <a:tailEnd type="none" w="med" len="med"/>
+                    </a:lnB>
+                    <a:solidFill>
+                      <a:srgbClr val="F0F2F4"/>
+                    </a:solidFill>
+                  </a:tcPr>
+                </a:tc>
+              </a:tr>
+            </a:tbl>
+          </a:graphicData>
+        </a:graphic>
+      </p:graphicFrame>
+      <p:sp>
+        <p:nvSpPr>
+          <p:cNvPr id="13" name="Text 10"/>
+          <p:cNvSpPr txBox="1"/>
+          <p:nvPr/>
+        </p:nvSpPr>
+        <p:spPr>
+          <a:xfrm>
+            <a:off x="640080" y="4754880"/>
+            <a:ext cx="10911535" cy="914400"/>
+          </a:xfrm>
+          <a:prstGeom prst="rect">
+            <a:avLst/>
+          </a:prstGeom>
+          <a:noFill/>
+          <a:ln/>
+        </p:spPr>
+        <p:txBody>
+          <a:bodyPr wrap="square" lIns="0" tIns="0" rIns="0" bIns="0" rtlCol="0" anchor="t"/>
+          <a:lstStyle/>
+          <a:p>
+            <a:pPr indent="0" marL="0">
+              <a:lnSpc>
+                <a:spcPct val="120000"/>
+              </a:lnSpc>
+              <a:buNone/>
+            </a:pPr>
+            <a:r>
+              <a:rPr lang="en-US" sz="1800" i="1" dirty="0">
+                <a:solidFill>
+                  <a:srgbClr val="6B7280"/>
+                </a:solidFill>
+                <a:latin typeface="Calibri" pitchFamily="34" charset="0"/>
+                <a:ea typeface="Calibri" pitchFamily="34" charset="-122"/>
+                <a:cs typeface="Calibri" pitchFamily="34" charset="-120"/>
+              </a:rPr>
+              <a:t>The foreign key branchNo is left out of this table to keep it to the entity's own attributes; it is added once the Has relationship is mapped.</a:t>
+            </a:r>
+            <a:endParaRPr lang="en-US" sz="1800" dirty="0"/>
+          </a:p>
+        </p:txBody>
+      </p:sp>
+      <p:sp>
+        <p:nvSpPr>
+          <p:cNvPr id="14" name="Text 11"/>
+          <p:cNvSpPr/>
+          <p:nvPr/>
+        </p:nvSpPr>
+        <p:spPr>
+          <a:xfrm>
+            <a:off x="9951415" y="6455664"/>
+            <a:ext cx="2011680" cy="292608"/>
+          </a:xfrm>
+          <a:prstGeom prst="rect">
+            <a:avLst/>
+          </a:prstGeom>
+          <a:noFill/>
+          <a:ln/>
+        </p:spPr>
+        <p:txBody>
+          <a:bodyPr wrap="square" rtlCol="0" anchor="ctr"/>
+          <a:lstStyle/>
+          <a:p>
+            <a:pPr algn="r" indent="0" marL="0">
+              <a:buNone/>
+            </a:pPr>
+            <a:r>
+              <a:rPr lang="en-US" sz="1200" u="sng" dirty="0">
+                <a:solidFill>
+                  <a:srgbClr val="8A939B"/>
+                </a:solidFill>
+                <a:latin typeface="Calibri" pitchFamily="34" charset="0"/>
+                <a:ea typeface="Calibri" pitchFamily="34" charset="-122"/>
+                <a:cs typeface="Calibri" pitchFamily="34" charset="-120"/>
+                <a:hlinkClick r:id="rId1" invalidUrl="" action="" tgtFrame="" tooltip="" history="1" highlightClick="0" endSnd="0">
+                  <a:extLst>
+                    <a:ext uri="{A12FA001-AC4F-418D-AE19-62706E023703}">
+                      <ahyp:hlinkClr xmlns:ahyp="http://schemas.microsoft.com/office/drawing/2018/hyperlinkcolor" val="tx"/>
+                    </a:ext>
+                  </a:extLst>
+                </a:hlinkClick>
+              </a:rPr>
+              <a:t>cuinotes.com</a:t>
+            </a:r>
+            <a:pPr algn="r" indent="0" marL="0">
+              <a:buNone/>
+            </a:pPr>
+            <a:r>
+              <a:rPr lang="en-US" sz="1200" dirty="0">
+                <a:solidFill>
+                  <a:srgbClr val="8A939B"/>
+                </a:solidFill>
+                <a:latin typeface="Calibri" pitchFamily="34" charset="0"/>
+                <a:ea typeface="Calibri" pitchFamily="34" charset="-122"/>
+                <a:cs typeface="Calibri" pitchFamily="34" charset="-120"/>
+              </a:rPr>
               <a:t>  ·  12</a:t>
             </a:r>
-            <a:endParaRPr lang="en-US" sz="1000" dirty="0"/>
+            <a:endParaRPr lang="en-US" sz="1200" dirty="0"/>
+          </a:p>
+        </p:txBody>
+      </p:sp>
+    </p:spTree>
+  </p:cSld>
+  <p:clrMapOvr>
+    <a:masterClrMapping/>
+  </p:clrMapOvr>
+</p:sld>
+</file>
+
+<file path=ppt/slides/slide17.xml><?xml version="1.0" encoding="utf-8"?>
+<p:sld xmlns:a="http://schemas.openxmlformats.org/drawingml/2006/main" xmlns:r="http://schemas.openxmlformats.org/officeDocument/2006/relationships" xmlns:p="http://schemas.openxmlformats.org/presentationml/2006/main">
+  <p:cSld name="Slide 9">
+    <p:bg>
+      <p:bgPr>
+        <a:solidFill>
+          <a:srgbClr val="F7F8F9"/>
+        </a:solidFill>
+      </p:bgPr>
+    </p:bg>
+    <p:spTree>
+      <p:nvGrpSpPr>
+        <p:cNvPr id="1" name=""/>
+        <p:cNvGrpSpPr/>
+        <p:nvPr/>
+      </p:nvGrpSpPr>
+      <p:grpSpPr>
+        <a:xfrm>
+          <a:off x="0" y="0"/>
+          <a:ext cx="0" cy="0"/>
+          <a:chOff x="0" y="0"/>
+          <a:chExt cx="0" cy="0"/>
+        </a:xfrm>
+      </p:grpSpPr>
+      <p:sp>
+        <p:nvSpPr>
+          <p:cNvPr id="2" name="Text 0"/>
+          <p:cNvSpPr txBox="1"/>
+          <p:nvPr/>
+        </p:nvSpPr>
+        <p:spPr>
+          <a:xfrm>
+            <a:off x="640080" y="384048"/>
+            <a:ext cx="10911535" cy="320040"/>
+          </a:xfrm>
+          <a:prstGeom prst="rect">
+            <a:avLst/>
+          </a:prstGeom>
+          <a:noFill/>
+          <a:ln/>
+        </p:spPr>
+        <p:txBody>
+          <a:bodyPr wrap="square" lIns="0" tIns="0" rIns="0" bIns="0" rtlCol="0" anchor="ctr"/>
+          <a:lstStyle/>
+          <a:p>
+            <a:pPr indent="0" marL="0">
+              <a:buNone/>
+            </a:pPr>
+            <a:r>
+              <a:rPr lang="en-US" sz="1250" b="1" spc="250" kern="0" dirty="0">
+                <a:solidFill>
+                  <a:srgbClr val="8B7FD9"/>
+                </a:solidFill>
+                <a:latin typeface="Calibri" pitchFamily="34" charset="0"/>
+                <a:ea typeface="Calibri" pitchFamily="34" charset="-122"/>
+                <a:cs typeface="Calibri" pitchFamily="34" charset="-120"/>
+              </a:rPr>
+              <a:t>MAPPING</a:t>
+            </a:r>
+            <a:endParaRPr lang="en-US" sz="1250" dirty="0"/>
+          </a:p>
+        </p:txBody>
+      </p:sp>
+      <p:sp>
+        <p:nvSpPr>
+          <p:cNvPr id="3" name="Text 1"/>
+          <p:cNvSpPr txBox="1"/>
+          <p:nvPr/>
+        </p:nvSpPr>
+        <p:spPr>
+          <a:xfrm>
+            <a:off x="640080" y="713232"/>
+            <a:ext cx="10911535" cy="777240"/>
+          </a:xfrm>
+          <a:prstGeom prst="rect">
+            <a:avLst/>
+          </a:prstGeom>
+          <a:noFill/>
+          <a:ln/>
+        </p:spPr>
+        <p:txBody>
+          <a:bodyPr wrap="square" lIns="0" tIns="0" rIns="0" bIns="0" rtlCol="0" anchor="ctr"/>
+          <a:lstStyle/>
+          <a:p>
+            <a:pPr indent="0" marL="0">
+              <a:buNone/>
+            </a:pPr>
+            <a:r>
+              <a:rPr lang="en-US" sz="2600" b="1" dirty="0">
+                <a:solidFill>
+                  <a:srgbClr val="1F2429"/>
+                </a:solidFill>
+                <a:latin typeface="Calibri" pitchFamily="34" charset="0"/>
+                <a:ea typeface="Calibri" pitchFamily="34" charset="-122"/>
+                <a:cs typeface="Calibri" pitchFamily="34" charset="-120"/>
+              </a:rPr>
+              <a:t>Relational Schema for Staff</a:t>
+            </a:r>
+            <a:endParaRPr lang="en-US" sz="2600" dirty="0"/>
+          </a:p>
+        </p:txBody>
+      </p:sp>
+      <p:sp>
+        <p:nvSpPr>
+          <p:cNvPr id="4" name="Text 2"/>
+          <p:cNvSpPr txBox="1"/>
+          <p:nvPr/>
+        </p:nvSpPr>
+        <p:spPr>
+          <a:xfrm>
+            <a:off x="640080" y="1737360"/>
+            <a:ext cx="5486400" cy="2651760"/>
+          </a:xfrm>
+          <a:prstGeom prst="rect">
+            <a:avLst/>
+          </a:prstGeom>
+          <a:noFill/>
+          <a:ln/>
+        </p:spPr>
+        <p:txBody>
+          <a:bodyPr wrap="square" lIns="0" tIns="0" rIns="0" bIns="0" rtlCol="0" anchor="t"/>
+          <a:lstStyle/>
+          <a:p>
+            <a:pPr marL="228600" indent="-228600">
+              <a:lnSpc>
+                <a:spcPct val="115000"/>
+              </a:lnSpc>
+              <a:spcAft>
+                <a:spcPts val="800"/>
+              </a:spcAft>
+              <a:buSzPct val="100000"/>
+              <a:buChar char="•"/>
+            </a:pPr>
+            <a:r>
+              <a:rPr lang="en-US" sz="1800" dirty="0">
+                <a:solidFill>
+                  <a:srgbClr val="1F2429"/>
+                </a:solidFill>
+                <a:latin typeface="Calibri" pitchFamily="34" charset="0"/>
+                <a:ea typeface="Calibri" pitchFamily="34" charset="-122"/>
+                <a:cs typeface="Calibri" pitchFamily="34" charset="-120"/>
+              </a:rPr>
+              <a:t>Concrete data types: staffNo CHAR(4), name VARCHAR(40), salary DECIMAL(8,2).</a:t>
+            </a:r>
+            <a:endParaRPr lang="en-US" sz="1800" dirty="0"/>
+          </a:p>
+          <a:p>
+            <a:pPr marL="228600" indent="-228600">
+              <a:lnSpc>
+                <a:spcPct val="115000"/>
+              </a:lnSpc>
+              <a:spcAft>
+                <a:spcPts val="800"/>
+              </a:spcAft>
+              <a:buSzPct val="100000"/>
+              <a:buChar char="•"/>
+            </a:pPr>
+            <a:r>
+              <a:rPr lang="en-US" sz="1800" dirty="0">
+                <a:solidFill>
+                  <a:srgbClr val="1F2429"/>
+                </a:solidFill>
+                <a:latin typeface="Calibri" pitchFamily="34" charset="0"/>
+                <a:ea typeface="Calibri" pitchFamily="34" charset="-122"/>
+                <a:cs typeface="Calibri" pitchFamily="34" charset="-120"/>
+              </a:rPr>
+              <a:t>NOT NULL on every column that must always hold a value.</a:t>
+            </a:r>
+            <a:endParaRPr lang="en-US" sz="1800" dirty="0"/>
+          </a:p>
+          <a:p>
+            <a:pPr marL="228600" indent="-228600">
+              <a:lnSpc>
+                <a:spcPct val="115000"/>
+              </a:lnSpc>
+              <a:spcAft>
+                <a:spcPts val="800"/>
+              </a:spcAft>
+              <a:buSzPct val="100000"/>
+              <a:buChar char="•"/>
+            </a:pPr>
+            <a:r>
+              <a:rPr lang="en-US" sz="1800" dirty="0">
+                <a:solidFill>
+                  <a:srgbClr val="1F2429"/>
+                </a:solidFill>
+                <a:latin typeface="Calibri" pitchFamily="34" charset="0"/>
+                <a:ea typeface="Calibri" pitchFamily="34" charset="-122"/>
+                <a:cs typeface="Calibri" pitchFamily="34" charset="-120"/>
+              </a:rPr>
+              <a:t>CHECK (salary &gt; 0) enforces a domain rule from Lecture 6.</a:t>
+            </a:r>
+            <a:endParaRPr lang="en-US" sz="1800" dirty="0"/>
+          </a:p>
+          <a:p>
+            <a:pPr marL="228600" indent="-228600">
+              <a:lnSpc>
+                <a:spcPct val="115000"/>
+              </a:lnSpc>
+              <a:spcAft>
+                <a:spcPts val="800"/>
+              </a:spcAft>
+              <a:buSzPct val="100000"/>
+              <a:buChar char="•"/>
+            </a:pPr>
+            <a:r>
+              <a:rPr lang="en-US" sz="1800" dirty="0">
+                <a:solidFill>
+                  <a:srgbClr val="1F2429"/>
+                </a:solidFill>
+                <a:latin typeface="Calibri" pitchFamily="34" charset="0"/>
+                <a:ea typeface="Calibri" pitchFamily="34" charset="-122"/>
+                <a:cs typeface="Calibri" pitchFamily="34" charset="-120"/>
+              </a:rPr>
+              <a:t>A foreign key on branchNo references Branch, so every staff row points at a real branch.</a:t>
+            </a:r>
+            <a:endParaRPr lang="en-US" sz="1800" dirty="0"/>
+          </a:p>
+        </p:txBody>
+      </p:sp>
+      <p:sp>
+        <p:nvSpPr>
+          <p:cNvPr id="5" name="Shape 3"/>
+          <p:cNvSpPr/>
+          <p:nvPr/>
+        </p:nvSpPr>
+        <p:spPr>
+          <a:xfrm>
+            <a:off x="6492240" y="1737360"/>
+            <a:ext cx="4846320" cy="2971800"/>
+          </a:xfrm>
+          <a:prstGeom prst="roundRect">
+            <a:avLst>
+              <a:gd name="adj" fmla="val 2759"/>
+            </a:avLst>
+          </a:prstGeom>
+          <a:solidFill>
+            <a:srgbClr val="1F2429"/>
+          </a:solidFill>
+          <a:ln/>
+        </p:spPr>
+      </p:sp>
+      <p:sp>
+        <p:nvSpPr>
+          <p:cNvPr id="6" name="Text 4"/>
+          <p:cNvSpPr txBox="1"/>
+          <p:nvPr/>
+        </p:nvSpPr>
+        <p:spPr>
+          <a:xfrm>
+            <a:off x="6766560" y="1920240"/>
+            <a:ext cx="4297680" cy="2700000"/>
+          </a:xfrm>
+          <a:prstGeom prst="rect">
+            <a:avLst/>
+          </a:prstGeom>
+          <a:noFill/>
+          <a:ln/>
+        </p:spPr>
+        <p:txBody>
+          <a:bodyPr wrap="square" lIns="0" tIns="0" rIns="0" bIns="0" rtlCol="0" anchor="t"/>
+          <a:lstStyle/>
+          <a:p>
+            <a:pPr algn="l" indent="0" marL="0">
+              <a:lnSpc>
+                <a:spcPct val="130000"/>
+              </a:lnSpc>
+              <a:buNone/>
+            </a:pPr>
+            <a:r>
+              <a:rPr lang="en-US" sz="1400" dirty="0">
+                <a:solidFill>
+                  <a:srgbClr val="2FE6C4"/>
+                </a:solidFill>
+                <a:latin typeface="Courier New" pitchFamily="34" charset="0"/>
+                <a:ea typeface="Courier New" pitchFamily="34" charset="-122"/>
+                <a:cs typeface="Courier New" pitchFamily="34" charset="-120"/>
+              </a:rPr>
+              <a:t>CREATE TABLE Staff (</a:t>
+            </a:r>
+            <a:endParaRPr lang="en-US" sz="1400" dirty="0"/>
+          </a:p>
+          <a:p>
+            <a:pPr algn="l" indent="0" marL="0">
+              <a:lnSpc>
+                <a:spcPct val="130000"/>
+              </a:lnSpc>
+              <a:buNone/>
+            </a:pPr>
+            <a:r>
+              <a:rPr lang="en-US" sz="1400" dirty="0">
+                <a:solidFill>
+                  <a:srgbClr val="2FE6C4"/>
+                </a:solidFill>
+                <a:latin typeface="Courier New" pitchFamily="34" charset="0"/>
+                <a:ea typeface="Courier New" pitchFamily="34" charset="-122"/>
+                <a:cs typeface="Courier New" pitchFamily="34" charset="-120"/>
+              </a:rPr>
+              <a:t>    staffNo  CHAR(4)      NOT NULL,</a:t>
+            </a:r>
+            <a:endParaRPr lang="en-US" sz="1400" dirty="0"/>
+          </a:p>
+          <a:p>
+            <a:pPr algn="l" indent="0" marL="0">
+              <a:lnSpc>
+                <a:spcPct val="130000"/>
+              </a:lnSpc>
+              <a:buNone/>
+            </a:pPr>
+            <a:r>
+              <a:rPr lang="en-US" sz="1400" dirty="0">
+                <a:solidFill>
+                  <a:srgbClr val="2FE6C4"/>
+                </a:solidFill>
+                <a:latin typeface="Courier New" pitchFamily="34" charset="0"/>
+                <a:ea typeface="Courier New" pitchFamily="34" charset="-122"/>
+                <a:cs typeface="Courier New" pitchFamily="34" charset="-120"/>
+              </a:rPr>
+              <a:t>    name     VARCHAR(40)  NOT NULL,</a:t>
+            </a:r>
+            <a:endParaRPr lang="en-US" sz="1400" dirty="0"/>
+          </a:p>
+          <a:p>
+            <a:pPr algn="l" indent="0" marL="0">
+              <a:lnSpc>
+                <a:spcPct val="130000"/>
+              </a:lnSpc>
+              <a:buNone/>
+            </a:pPr>
+            <a:r>
+              <a:rPr lang="en-US" sz="1400" dirty="0">
+                <a:solidFill>
+                  <a:srgbClr val="2FE6C4"/>
+                </a:solidFill>
+                <a:latin typeface="Courier New" pitchFamily="34" charset="0"/>
+                <a:ea typeface="Courier New" pitchFamily="34" charset="-122"/>
+                <a:cs typeface="Courier New" pitchFamily="34" charset="-120"/>
+              </a:rPr>
+              <a:t>    salary   DECIMAL(8,2) NOT NULL, CHECK (salary &gt; 0),</a:t>
+            </a:r>
+            <a:endParaRPr lang="en-US" sz="1400" dirty="0"/>
+          </a:p>
+          <a:p>
+            <a:pPr algn="l" indent="0" marL="0">
+              <a:lnSpc>
+                <a:spcPct val="130000"/>
+              </a:lnSpc>
+              <a:buNone/>
+            </a:pPr>
+            <a:r>
+              <a:rPr lang="en-US" sz="1400" dirty="0">
+                <a:solidFill>
+                  <a:srgbClr val="2FE6C4"/>
+                </a:solidFill>
+                <a:latin typeface="Courier New" pitchFamily="34" charset="0"/>
+                <a:ea typeface="Courier New" pitchFamily="34" charset="-122"/>
+                <a:cs typeface="Courier New" pitchFamily="34" charset="-120"/>
+              </a:rPr>
+              <a:t>    branchNo CHAR(4)      NOT NULL,</a:t>
+            </a:r>
+            <a:endParaRPr lang="en-US" sz="1400" dirty="0"/>
+          </a:p>
+          <a:p>
+            <a:pPr algn="l" indent="0" marL="0">
+              <a:lnSpc>
+                <a:spcPct val="130000"/>
+              </a:lnSpc>
+              <a:buNone/>
+            </a:pPr>
+            <a:r>
+              <a:rPr lang="en-US" sz="1400" dirty="0">
+                <a:solidFill>
+                  <a:srgbClr val="2FE6C4"/>
+                </a:solidFill>
+                <a:latin typeface="Courier New" pitchFamily="34" charset="0"/>
+                <a:ea typeface="Courier New" pitchFamily="34" charset="-122"/>
+                <a:cs typeface="Courier New" pitchFamily="34" charset="-120"/>
+              </a:rPr>
+              <a:t>    PRIMARY KEY (staffNo),</a:t>
+            </a:r>
+            <a:endParaRPr lang="en-US" sz="1400" dirty="0"/>
+          </a:p>
+          <a:p>
+            <a:pPr algn="l" indent="0" marL="0">
+              <a:lnSpc>
+                <a:spcPct val="130000"/>
+              </a:lnSpc>
+              <a:buNone/>
+            </a:pPr>
+            <a:r>
+              <a:rPr lang="en-US" sz="1400" dirty="0">
+                <a:solidFill>
+                  <a:srgbClr val="2FE6C4"/>
+                </a:solidFill>
+                <a:latin typeface="Courier New" pitchFamily="34" charset="0"/>
+                <a:ea typeface="Courier New" pitchFamily="34" charset="-122"/>
+                <a:cs typeface="Courier New" pitchFamily="34" charset="-120"/>
+              </a:rPr>
+              <a:t>    FOREIGN KEY (branchNo) REFERENCES Branch(branchNo) );</a:t>
+            </a:r>
+            <a:endParaRPr lang="en-US" sz="1400" dirty="0"/>
+          </a:p>
+        </p:txBody>
+      </p:sp>
+      <p:sp>
+        <p:nvSpPr>
+          <p:cNvPr id="7" name="Shape 5"/>
+          <p:cNvSpPr/>
+          <p:nvPr/>
+        </p:nvSpPr>
+        <p:spPr>
+          <a:xfrm>
+            <a:off x="640080" y="4846320"/>
+            <a:ext cx="10911535" cy="1188720"/>
+          </a:xfrm>
+          <a:prstGeom prst="roundRect">
+            <a:avLst>
+              <a:gd name="adj" fmla="val 5385"/>
+            </a:avLst>
+          </a:prstGeom>
+          <a:solidFill>
+            <a:srgbClr val="EAF1FB"/>
+          </a:solidFill>
+          <a:ln w="12700">
+            <a:solidFill>
+              <a:srgbClr val="6C8FD6"/>
+            </a:solidFill>
+            <a:prstDash val="solid"/>
+          </a:ln>
+        </p:spPr>
+      </p:sp>
+      <p:sp>
+        <p:nvSpPr>
+          <p:cNvPr id="8" name="Text 6"/>
+          <p:cNvSpPr txBox="1"/>
+          <p:nvPr/>
+        </p:nvSpPr>
+        <p:spPr>
+          <a:xfrm>
+            <a:off x="896112" y="4992624"/>
+            <a:ext cx="10399471" cy="274320"/>
+          </a:xfrm>
+          <a:prstGeom prst="rect">
+            <a:avLst/>
+          </a:prstGeom>
+          <a:noFill/>
+          <a:ln/>
+        </p:spPr>
+        <p:txBody>
+          <a:bodyPr wrap="square" lIns="0" tIns="0" rIns="0" bIns="0" rtlCol="0" anchor="ctr"/>
+          <a:lstStyle/>
+          <a:p>
+            <a:pPr indent="0" marL="0">
+              <a:buNone/>
+            </a:pPr>
+            <a:r>
+              <a:rPr lang="en-US" sz="1200" b="1" spc="200" kern="0" dirty="0">
+                <a:solidFill>
+                  <a:srgbClr val="2C4A8C"/>
+                </a:solidFill>
+                <a:latin typeface="Calibri" pitchFamily="34" charset="0"/>
+                <a:ea typeface="Calibri" pitchFamily="34" charset="-122"/>
+                <a:cs typeface="Calibri" pitchFamily="34" charset="-120"/>
+              </a:rPr>
+              <a:t>NOTE</a:t>
+            </a:r>
+            <a:endParaRPr lang="en-US" sz="1200" dirty="0"/>
+          </a:p>
+        </p:txBody>
+      </p:sp>
+      <p:sp>
+        <p:nvSpPr>
+          <p:cNvPr id="9" name="Text 7"/>
+          <p:cNvSpPr txBox="1"/>
+          <p:nvPr/>
+        </p:nvSpPr>
+        <p:spPr>
+          <a:xfrm>
+            <a:off x="896112" y="5303520"/>
+            <a:ext cx="10399471" cy="566928"/>
+          </a:xfrm>
+          <a:prstGeom prst="rect">
+            <a:avLst/>
+          </a:prstGeom>
+          <a:noFill/>
+          <a:ln/>
+        </p:spPr>
+        <p:txBody>
+          <a:bodyPr wrap="square" lIns="0" tIns="0" rIns="0" bIns="0" rtlCol="0" anchor="t"/>
+          <a:lstStyle/>
+          <a:p>
+            <a:pPr indent="0" marL="0">
+              <a:lnSpc>
+                <a:spcPct val="115000"/>
+              </a:lnSpc>
+              <a:buNone/>
+            </a:pPr>
+            <a:r>
+              <a:rPr lang="en-US" sz="1800" dirty="0">
+                <a:solidFill>
+                  <a:srgbClr val="1F2429"/>
+                </a:solidFill>
+                <a:latin typeface="Calibri" pitchFamily="34" charset="0"/>
+                <a:ea typeface="Calibri" pitchFamily="34" charset="-122"/>
+                <a:cs typeface="Calibri" pitchFamily="34" charset="-120"/>
+              </a:rPr>
+              <a:t>The CHECK and FOREIGN KEY lines enforce rules the business already has; they change how the rules are stored, never what they mean.</a:t>
+            </a:r>
+            <a:endParaRPr lang="en-US" sz="1800" dirty="0"/>
+          </a:p>
+        </p:txBody>
+      </p:sp>
+      <p:sp>
+        <p:nvSpPr>
+          <p:cNvPr id="10" name="Text 8"/>
+          <p:cNvSpPr/>
+          <p:nvPr/>
+        </p:nvSpPr>
+        <p:spPr>
+          <a:xfrm>
+            <a:off x="9951415" y="6455664"/>
+            <a:ext cx="2011680" cy="292608"/>
+          </a:xfrm>
+          <a:prstGeom prst="rect">
+            <a:avLst/>
+          </a:prstGeom>
+          <a:noFill/>
+          <a:ln/>
+        </p:spPr>
+        <p:txBody>
+          <a:bodyPr wrap="square" rtlCol="0" anchor="ctr"/>
+          <a:lstStyle/>
+          <a:p>
+            <a:pPr algn="r" indent="0" marL="0">
+              <a:buNone/>
+            </a:pPr>
+            <a:r>
+              <a:rPr lang="en-US" sz="1200" u="sng" dirty="0">
+                <a:solidFill>
+                  <a:srgbClr val="8A939B"/>
+                </a:solidFill>
+                <a:latin typeface="Calibri" pitchFamily="34" charset="0"/>
+                <a:ea typeface="Calibri" pitchFamily="34" charset="-122"/>
+                <a:cs typeface="Calibri" pitchFamily="34" charset="-120"/>
+                <a:hlinkClick r:id="rId1" invalidUrl="" action="" tgtFrame="" tooltip="" history="1" highlightClick="0" endSnd="0">
+                  <a:extLst>
+                    <a:ext uri="{A12FA001-AC4F-418D-AE19-62706E023703}">
+                      <ahyp:hlinkClr xmlns:ahyp="http://schemas.microsoft.com/office/drawing/2018/hyperlinkcolor" val="tx"/>
+                    </a:ext>
+                  </a:extLst>
+                </a:hlinkClick>
+              </a:rPr>
+              <a:t>cuinotes.com</a:t>
+            </a:r>
+            <a:pPr algn="r" indent="0" marL="0">
+              <a:buNone/>
+            </a:pPr>
+            <a:r>
+              <a:rPr lang="en-US" sz="1200" dirty="0">
+                <a:solidFill>
+                  <a:srgbClr val="8A939B"/>
+                </a:solidFill>
+                <a:latin typeface="Calibri" pitchFamily="34" charset="0"/>
+                <a:ea typeface="Calibri" pitchFamily="34" charset="-122"/>
+                <a:cs typeface="Calibri" pitchFamily="34" charset="-120"/>
+              </a:rPr>
+              <a:t>  ·  14</a:t>
+            </a:r>
+            <a:endParaRPr lang="en-US" sz="1200" dirty="0"/>
+          </a:p>
+        </p:txBody>
+      </p:sp>
+    </p:spTree>
+  </p:cSld>
+  <p:clrMapOvr>
+    <a:masterClrMapping/>
+  </p:clrMapOvr>
+</p:sld>
+</file>
+
+<file path=ppt/slides/slide18.xml><?xml version="1.0" encoding="utf-8"?>
+<p:sld xmlns:a="http://schemas.openxmlformats.org/drawingml/2006/main" xmlns:r="http://schemas.openxmlformats.org/officeDocument/2006/relationships" xmlns:p="http://schemas.openxmlformats.org/presentationml/2006/main">
+  <p:cSld name="Slide 11">
+    <p:bg>
+      <p:bgPr>
+        <a:solidFill>
+          <a:srgbClr val="F7F8F9"/>
+        </a:solidFill>
+      </p:bgPr>
+    </p:bg>
+    <p:spTree>
+      <p:nvGrpSpPr>
+        <p:cNvPr id="1" name=""/>
+        <p:cNvGrpSpPr/>
+        <p:nvPr/>
+      </p:nvGrpSpPr>
+      <p:grpSpPr>
+        <a:xfrm>
+          <a:off x="0" y="0"/>
+          <a:ext cx="0" cy="0"/>
+          <a:chOff x="0" y="0"/>
+          <a:chExt cx="0" cy="0"/>
+        </a:xfrm>
+      </p:grpSpPr>
+      <p:sp>
+        <p:nvSpPr>
+          <p:cNvPr id="2" name="Text 0"/>
+          <p:cNvSpPr txBox="1"/>
+          <p:nvPr/>
+        </p:nvSpPr>
+        <p:spPr>
+          <a:xfrm>
+            <a:off x="640080" y="384048"/>
+            <a:ext cx="10911535" cy="320040"/>
+          </a:xfrm>
+          <a:prstGeom prst="rect">
+            <a:avLst/>
+          </a:prstGeom>
+          <a:noFill/>
+          <a:ln/>
+        </p:spPr>
+        <p:txBody>
+          <a:bodyPr wrap="square" lIns="0" tIns="0" rIns="0" bIns="0" rtlCol="0" anchor="ctr"/>
+          <a:lstStyle/>
+          <a:p>
+            <a:pPr indent="0" marL="0">
+              <a:buNone/>
+            </a:pPr>
+            <a:r>
+              <a:rPr lang="en-US" sz="1250" b="1" spc="250" kern="0" dirty="0">
+                <a:solidFill>
+                  <a:srgbClr val="8B7FD9"/>
+                </a:solidFill>
+                <a:latin typeface="Calibri" pitchFamily="34" charset="0"/>
+                <a:ea typeface="Calibri" pitchFamily="34" charset="-122"/>
+                <a:cs typeface="Calibri" pitchFamily="34" charset="-120"/>
+              </a:rPr>
+              <a:t>CHECKLIST APPLIED</a:t>
+            </a:r>
+            <a:endParaRPr lang="en-US" sz="1250" dirty="0"/>
+          </a:p>
+        </p:txBody>
+      </p:sp>
+      <p:sp>
+        <p:nvSpPr>
+          <p:cNvPr id="3" name="Text 1"/>
+          <p:cNvSpPr txBox="1"/>
+          <p:nvPr/>
+        </p:nvSpPr>
+        <p:spPr>
+          <a:xfrm>
+            <a:off x="640080" y="713232"/>
+            <a:ext cx="10911535" cy="777240"/>
+          </a:xfrm>
+          <a:prstGeom prst="rect">
+            <a:avLst/>
+          </a:prstGeom>
+          <a:noFill/>
+          <a:ln/>
+        </p:spPr>
+        <p:txBody>
+          <a:bodyPr wrap="square" lIns="0" tIns="0" rIns="0" bIns="0" rtlCol="0" anchor="ctr"/>
+          <a:lstStyle/>
+          <a:p>
+            <a:pPr indent="0" marL="0">
+              <a:buNone/>
+            </a:pPr>
+            <a:r>
+              <a:rPr lang="en-US" sz="2600" b="1" dirty="0">
+                <a:solidFill>
+                  <a:srgbClr val="1F2429"/>
+                </a:solidFill>
+                <a:latin typeface="Calibri" pitchFamily="34" charset="0"/>
+                <a:ea typeface="Calibri" pitchFamily="34" charset="-122"/>
+                <a:cs typeface="Calibri" pitchFamily="34" charset="-120"/>
+              </a:rPr>
+              <a:t>Applying the Checklist to Staff</a:t>
+            </a:r>
+            <a:endParaRPr lang="en-US" sz="2600" dirty="0"/>
+          </a:p>
+        </p:txBody>
+      </p:sp>
+      <p:sp>
+        <p:nvSpPr>
+          <p:cNvPr id="4" name="Shape 2"/>
+          <p:cNvSpPr/>
+          <p:nvPr/>
+        </p:nvSpPr>
+        <p:spPr>
+          <a:xfrm>
+            <a:off x="640080" y="1737360"/>
+            <a:ext cx="10911535" cy="1463040"/>
+          </a:xfrm>
+          <a:prstGeom prst="roundRect">
+            <a:avLst>
+              <a:gd name="adj" fmla="val 4375"/>
+            </a:avLst>
+          </a:prstGeom>
+          <a:solidFill>
+            <a:srgbClr val="E9F9F3"/>
+          </a:solidFill>
+          <a:ln w="12700">
+            <a:solidFill>
+              <a:srgbClr val="1FAE8C"/>
+            </a:solidFill>
+            <a:prstDash val="solid"/>
+          </a:ln>
+        </p:spPr>
+      </p:sp>
+      <p:sp>
+        <p:nvSpPr>
+          <p:cNvPr id="5" name="Text 3"/>
+          <p:cNvSpPr txBox="1"/>
+          <p:nvPr/>
+        </p:nvSpPr>
+        <p:spPr>
+          <a:xfrm>
+            <a:off x="896112" y="1883664"/>
+            <a:ext cx="10399471" cy="274320"/>
+          </a:xfrm>
+          <a:prstGeom prst="rect">
+            <a:avLst/>
+          </a:prstGeom>
+          <a:noFill/>
+          <a:ln/>
+        </p:spPr>
+        <p:txBody>
+          <a:bodyPr wrap="square" lIns="0" tIns="0" rIns="0" bIns="0" rtlCol="0" anchor="ctr"/>
+          <a:lstStyle/>
+          <a:p>
+            <a:pPr indent="0" marL="0">
+              <a:buNone/>
+            </a:pPr>
+            <a:r>
+              <a:rPr lang="en-US" sz="1200" b="1" spc="200" kern="0" dirty="0">
+                <a:solidFill>
+                  <a:srgbClr val="0E7A61"/>
+                </a:solidFill>
+                <a:latin typeface="Calibri" pitchFamily="34" charset="0"/>
+                <a:ea typeface="Calibri" pitchFamily="34" charset="-122"/>
+                <a:cs typeface="Calibri" pitchFamily="34" charset="-120"/>
+              </a:rPr>
+              <a:t>CHECK</a:t>
+            </a:r>
+            <a:endParaRPr lang="en-US" sz="1200" dirty="0"/>
+          </a:p>
+        </p:txBody>
+      </p:sp>
+      <p:sp>
+        <p:nvSpPr>
+          <p:cNvPr id="6" name="Text 4"/>
+          <p:cNvSpPr txBox="1"/>
+          <p:nvPr/>
+        </p:nvSpPr>
+        <p:spPr>
+          <a:xfrm>
+            <a:off x="896112" y="2194560"/>
+            <a:ext cx="10399471" cy="841248"/>
+          </a:xfrm>
+          <a:prstGeom prst="rect">
+            <a:avLst/>
+          </a:prstGeom>
+          <a:noFill/>
+          <a:ln/>
+        </p:spPr>
+        <p:txBody>
+          <a:bodyPr wrap="square" lIns="0" tIns="0" rIns="0" bIns="0" rtlCol="0" anchor="t"/>
+          <a:lstStyle/>
+          <a:p>
+            <a:pPr indent="0" marL="0">
+              <a:lnSpc>
+                <a:spcPct val="115000"/>
+              </a:lnSpc>
+              <a:buNone/>
+            </a:pPr>
+            <a:r>
+              <a:rPr lang="en-US" sz="1800" dirty="0">
+                <a:solidFill>
+                  <a:srgbClr val="1F2429"/>
+                </a:solidFill>
+                <a:latin typeface="Calibri" pitchFamily="34" charset="0"/>
+                <a:ea typeface="Calibri" pitchFamily="34" charset="-122"/>
+                <a:cs typeface="Calibri" pitchFamily="34" charset="-120"/>
+              </a:rPr>
+              <a:t>“A Staff member has a staffNo, a name, a position, and a salary, and works at exactly one branch.” Every attribute belongs to that one thing, so the sentence test passes.</a:t>
+            </a:r>
+            <a:endParaRPr lang="en-US" sz="1800" dirty="0"/>
+          </a:p>
+        </p:txBody>
+      </p:sp>
+      <p:sp>
+        <p:nvSpPr>
+          <p:cNvPr id="7" name="Text 5"/>
+          <p:cNvSpPr txBox="1"/>
+          <p:nvPr/>
+        </p:nvSpPr>
+        <p:spPr>
+          <a:xfrm>
+            <a:off x="640080" y="3429000"/>
+            <a:ext cx="10911535" cy="1097280"/>
+          </a:xfrm>
+          <a:prstGeom prst="rect">
+            <a:avLst/>
+          </a:prstGeom>
+          <a:noFill/>
+          <a:ln/>
+        </p:spPr>
+        <p:txBody>
+          <a:bodyPr wrap="square" lIns="0" tIns="0" rIns="0" bIns="0" rtlCol="0" anchor="t"/>
+          <a:lstStyle/>
+          <a:p>
+            <a:pPr indent="0" marL="0">
+              <a:lnSpc>
+                <a:spcPct val="130000"/>
+              </a:lnSpc>
+              <a:buNone/>
+            </a:pPr>
+            <a:r>
+              <a:rPr lang="en-US" sz="1800" dirty="0">
+                <a:solidFill>
+                  <a:srgbClr val="1F2429"/>
+                </a:solidFill>
+                <a:latin typeface="Calibri" pitchFamily="34" charset="0"/>
+                <a:ea typeface="Calibri" pitchFamily="34" charset="-122"/>
+                <a:cs typeface="Calibri" pitchFamily="34" charset="-120"/>
+              </a:rPr>
+              <a:t>Redundancy check: Staff does not repeat branch name or address. Those live only in Branch, so a branch move changes one row, not every staff row.</a:t>
+            </a:r>
+            <a:endParaRPr lang="en-US" sz="1800" dirty="0"/>
+          </a:p>
+        </p:txBody>
+      </p:sp>
+      <p:sp>
+        <p:nvSpPr>
+          <p:cNvPr id="8" name="Text 6"/>
+          <p:cNvSpPr/>
+          <p:nvPr/>
+        </p:nvSpPr>
+        <p:spPr>
+          <a:xfrm>
+            <a:off x="9951415" y="6455664"/>
+            <a:ext cx="2011680" cy="292608"/>
+          </a:xfrm>
+          <a:prstGeom prst="rect">
+            <a:avLst/>
+          </a:prstGeom>
+          <a:noFill/>
+          <a:ln/>
+        </p:spPr>
+        <p:txBody>
+          <a:bodyPr wrap="square" rtlCol="0" anchor="ctr"/>
+          <a:lstStyle/>
+          <a:p>
+            <a:pPr algn="r" indent="0" marL="0">
+              <a:buNone/>
+            </a:pPr>
+            <a:r>
+              <a:rPr lang="en-US" sz="1200" u="sng" dirty="0">
+                <a:solidFill>
+                  <a:srgbClr val="8A939B"/>
+                </a:solidFill>
+                <a:latin typeface="Calibri" pitchFamily="34" charset="0"/>
+                <a:ea typeface="Calibri" pitchFamily="34" charset="-122"/>
+                <a:cs typeface="Calibri" pitchFamily="34" charset="-120"/>
+                <a:hlinkClick r:id="rId1" invalidUrl="" action="" tgtFrame="" tooltip="" history="1" highlightClick="0" endSnd="0">
+                  <a:extLst>
+                    <a:ext uri="{A12FA001-AC4F-418D-AE19-62706E023703}">
+                      <ahyp:hlinkClr xmlns:ahyp="http://schemas.microsoft.com/office/drawing/2018/hyperlinkcolor" val="tx"/>
+                    </a:ext>
+                  </a:extLst>
+                </a:hlinkClick>
+              </a:rPr>
+              <a:t>cuinotes.com</a:t>
+            </a:r>
+            <a:pPr algn="r" indent="0" marL="0">
+              <a:buNone/>
+            </a:pPr>
+            <a:r>
+              <a:rPr lang="en-US" sz="1200" dirty="0">
+                <a:solidFill>
+                  <a:srgbClr val="8A939B"/>
+                </a:solidFill>
+                <a:latin typeface="Calibri" pitchFamily="34" charset="0"/>
+                <a:ea typeface="Calibri" pitchFamily="34" charset="-122"/>
+                <a:cs typeface="Calibri" pitchFamily="34" charset="-120"/>
+              </a:rPr>
+              <a:t>  ·  16</a:t>
+            </a:r>
+            <a:endParaRPr lang="en-US" sz="1200" dirty="0"/>
+          </a:p>
+        </p:txBody>
+      </p:sp>
+    </p:spTree>
+  </p:cSld>
+  <p:clrMapOvr>
+    <a:masterClrMapping/>
+  </p:clrMapOvr>
+</p:sld>
+</file>
+
+<file path=ppt/slides/slide19.xml><?xml version="1.0" encoding="utf-8"?>
+<p:sld xmlns:a="http://schemas.openxmlformats.org/drawingml/2006/main" xmlns:r="http://schemas.openxmlformats.org/officeDocument/2006/relationships" xmlns:p="http://schemas.openxmlformats.org/presentationml/2006/main">
+  <p:cSld name="Slide 11">
+    <p:bg>
+      <p:bgPr>
+        <a:solidFill>
+          <a:srgbClr val="F7F8F9"/>
+        </a:solidFill>
+      </p:bgPr>
+    </p:bg>
+    <p:spTree>
+      <p:nvGrpSpPr>
+        <p:cNvPr id="1" name=""/>
+        <p:cNvGrpSpPr/>
+        <p:nvPr/>
+      </p:nvGrpSpPr>
+      <p:grpSpPr>
+        <a:xfrm>
+          <a:off x="0" y="0"/>
+          <a:ext cx="0" cy="0"/>
+          <a:chOff x="0" y="0"/>
+          <a:chExt cx="0" cy="0"/>
+        </a:xfrm>
+      </p:grpSpPr>
+      <p:sp>
+        <p:nvSpPr>
+          <p:cNvPr id="2" name="Text 0"/>
+          <p:cNvSpPr txBox="1"/>
+          <p:nvPr/>
+        </p:nvSpPr>
+        <p:spPr>
+          <a:xfrm>
+            <a:off x="640080" y="384048"/>
+            <a:ext cx="10911535" cy="320040"/>
+          </a:xfrm>
+          <a:prstGeom prst="rect">
+            <a:avLst/>
+          </a:prstGeom>
+          <a:noFill/>
+          <a:ln/>
+        </p:spPr>
+        <p:txBody>
+          <a:bodyPr wrap="square" lIns="0" tIns="0" rIns="0" bIns="0" rtlCol="0" anchor="ctr"/>
+          <a:lstStyle/>
+          <a:p>
+            <a:pPr indent="0" marL="0">
+              <a:buNone/>
+            </a:pPr>
+            <a:r>
+              <a:rPr lang="en-US" sz="1250" b="1" spc="250" kern="0" dirty="0">
+                <a:solidFill>
+                  <a:srgbClr val="8B7FD9"/>
+                </a:solidFill>
+                <a:latin typeface="Calibri" pitchFamily="34" charset="0"/>
+                <a:ea typeface="Calibri" pitchFamily="34" charset="-122"/>
+                <a:cs typeface="Calibri" pitchFamily="34" charset="-120"/>
+              </a:rPr>
+              <a:t>PRACTICE</a:t>
+            </a:r>
+            <a:endParaRPr lang="en-US" sz="1250" dirty="0"/>
+          </a:p>
+        </p:txBody>
+      </p:sp>
+      <p:sp>
+        <p:nvSpPr>
+          <p:cNvPr id="3" name="Text 1"/>
+          <p:cNvSpPr txBox="1"/>
+          <p:nvPr/>
+        </p:nvSpPr>
+        <p:spPr>
+          <a:xfrm>
+            <a:off x="640080" y="713232"/>
+            <a:ext cx="10911535" cy="777240"/>
+          </a:xfrm>
+          <a:prstGeom prst="rect">
+            <a:avLst/>
+          </a:prstGeom>
+          <a:noFill/>
+          <a:ln/>
+        </p:spPr>
+        <p:txBody>
+          <a:bodyPr wrap="square" lIns="0" tIns="0" rIns="0" bIns="0" rtlCol="0" anchor="ctr"/>
+          <a:lstStyle/>
+          <a:p>
+            <a:pPr indent="0" marL="0">
+              <a:buNone/>
+            </a:pPr>
+            <a:r>
+              <a:rPr lang="en-US" sz="2600" b="1" dirty="0">
+                <a:solidFill>
+                  <a:srgbClr val="1F2429"/>
+                </a:solidFill>
+                <a:latin typeface="Calibri" pitchFamily="34" charset="0"/>
+                <a:ea typeface="Calibri" pitchFamily="34" charset="-122"/>
+                <a:cs typeface="Calibri" pitchFamily="34" charset="-120"/>
+              </a:rPr>
+              <a:t>Your Turn: Does This Relation Pass?</a:t>
+            </a:r>
+            <a:endParaRPr lang="en-US" sz="2600" dirty="0"/>
+          </a:p>
+        </p:txBody>
+      </p:sp>
+      <p:sp>
+        <p:nvSpPr>
+          <p:cNvPr id="4" name="Shape 2"/>
+          <p:cNvSpPr/>
+          <p:nvPr/>
+        </p:nvSpPr>
+        <p:spPr>
+          <a:xfrm>
+            <a:off x="640080" y="1737360"/>
+            <a:ext cx="10911535" cy="1463040"/>
+          </a:xfrm>
+          <a:prstGeom prst="roundRect">
+            <a:avLst>
+              <a:gd name="adj" fmla="val 4375"/>
+            </a:avLst>
+          </a:prstGeom>
+          <a:solidFill>
+            <a:srgbClr val="E9F9F3"/>
+          </a:solidFill>
+          <a:ln w="12700">
+            <a:solidFill>
+              <a:srgbClr val="1FAE8C"/>
+            </a:solidFill>
+            <a:prstDash val="solid"/>
+          </a:ln>
+        </p:spPr>
+      </p:sp>
+      <p:sp>
+        <p:nvSpPr>
+          <p:cNvPr id="5" name="Text 3"/>
+          <p:cNvSpPr txBox="1"/>
+          <p:nvPr/>
+        </p:nvSpPr>
+        <p:spPr>
+          <a:xfrm>
+            <a:off x="896112" y="1883664"/>
+            <a:ext cx="10399471" cy="274320"/>
+          </a:xfrm>
+          <a:prstGeom prst="rect">
+            <a:avLst/>
+          </a:prstGeom>
+          <a:noFill/>
+          <a:ln/>
+        </p:spPr>
+        <p:txBody>
+          <a:bodyPr wrap="square" lIns="0" tIns="0" rIns="0" bIns="0" rtlCol="0" anchor="ctr"/>
+          <a:lstStyle/>
+          <a:p>
+            <a:pPr indent="0" marL="0">
+              <a:buNone/>
+            </a:pPr>
+            <a:r>
+              <a:rPr lang="en-US" sz="1200" b="1" spc="200" kern="0" dirty="0">
+                <a:solidFill>
+                  <a:srgbClr val="0E7A61"/>
+                </a:solidFill>
+                <a:latin typeface="Calibri" pitchFamily="34" charset="0"/>
+                <a:ea typeface="Calibri" pitchFamily="34" charset="-122"/>
+                <a:cs typeface="Calibri" pitchFamily="34" charset="-120"/>
+              </a:rPr>
+              <a:t>TRY IT</a:t>
+            </a:r>
+            <a:endParaRPr lang="en-US" sz="1200" dirty="0"/>
+          </a:p>
+        </p:txBody>
+      </p:sp>
+      <p:sp>
+        <p:nvSpPr>
+          <p:cNvPr id="6" name="Text 4"/>
+          <p:cNvSpPr txBox="1"/>
+          <p:nvPr/>
+        </p:nvSpPr>
+        <p:spPr>
+          <a:xfrm>
+            <a:off x="896112" y="2194560"/>
+            <a:ext cx="10399471" cy="841248"/>
+          </a:xfrm>
+          <a:prstGeom prst="rect">
+            <a:avLst/>
+          </a:prstGeom>
+          <a:noFill/>
+          <a:ln/>
+        </p:spPr>
+        <p:txBody>
+          <a:bodyPr wrap="square" lIns="0" tIns="0" rIns="0" bIns="0" rtlCol="0" anchor="t"/>
+          <a:lstStyle/>
+          <a:p>
+            <a:pPr indent="0" marL="0">
+              <a:lnSpc>
+                <a:spcPct val="115000"/>
+              </a:lnSpc>
+              <a:buNone/>
+            </a:pPr>
+            <a:r>
+              <a:rPr lang="en-US" sz="1800" dirty="0">
+                <a:solidFill>
+                  <a:srgbClr val="1F2429"/>
+                </a:solidFill>
+                <a:latin typeface="Calibri" pitchFamily="34" charset="0"/>
+                <a:ea typeface="Calibri" pitchFamily="34" charset="-122"/>
+                <a:cs typeface="Calibri" pitchFamily="34" charset="-120"/>
+              </a:rPr>
+              <a:t>Relation: Viewing (clientNo, propertyNo, viewDate, comment). Read it as a sentence and decide whether each attribute belongs to the viewing event. Pause before the next slide.</a:t>
+            </a:r>
+            <a:endParaRPr lang="en-US" sz="1800" dirty="0"/>
+          </a:p>
+        </p:txBody>
+      </p:sp>
+      <p:sp>
+        <p:nvSpPr>
+          <p:cNvPr id="7" name="Text 5"/>
+          <p:cNvSpPr txBox="1"/>
+          <p:nvPr/>
+        </p:nvSpPr>
+        <p:spPr>
+          <a:xfrm>
+            <a:off x="640080" y="3429000"/>
+            <a:ext cx="10911535" cy="1097280"/>
+          </a:xfrm>
+          <a:prstGeom prst="rect">
+            <a:avLst/>
+          </a:prstGeom>
+          <a:noFill/>
+          <a:ln/>
+        </p:spPr>
+        <p:txBody>
+          <a:bodyPr wrap="square" lIns="0" tIns="0" rIns="0" bIns="0" rtlCol="0" anchor="t"/>
+          <a:lstStyle/>
+          <a:p>
+            <a:pPr indent="0" marL="0">
+              <a:lnSpc>
+                <a:spcPct val="130000"/>
+              </a:lnSpc>
+              <a:buNone/>
+            </a:pPr>
+            <a:r>
+              <a:rPr lang="en-US" sz="1800" dirty="0">
+                <a:solidFill>
+                  <a:srgbClr val="1F2429"/>
+                </a:solidFill>
+                <a:latin typeface="Calibri" pitchFamily="34" charset="0"/>
+                <a:ea typeface="Calibri" pitchFamily="34" charset="-122"/>
+                <a:cs typeface="Calibri" pitchFamily="34" charset="-120"/>
+              </a:rPr>
+              <a:t>Hint: a viewing is an event between one client and one property, so viewDate and comment describe the pairing. That is why they belong in Viewing, not in Client.</a:t>
+            </a:r>
+            <a:endParaRPr lang="en-US" sz="1800" dirty="0"/>
+          </a:p>
+        </p:txBody>
+      </p:sp>
+      <p:sp>
+        <p:nvSpPr>
+          <p:cNvPr id="8" name="Text 6"/>
+          <p:cNvSpPr/>
+          <p:nvPr/>
+        </p:nvSpPr>
+        <p:spPr>
+          <a:xfrm>
+            <a:off x="9951415" y="6455664"/>
+            <a:ext cx="2011680" cy="292608"/>
+          </a:xfrm>
+          <a:prstGeom prst="rect">
+            <a:avLst/>
+          </a:prstGeom>
+          <a:noFill/>
+          <a:ln/>
+        </p:spPr>
+        <p:txBody>
+          <a:bodyPr wrap="square" rtlCol="0" anchor="ctr"/>
+          <a:lstStyle/>
+          <a:p>
+            <a:pPr algn="r" indent="0" marL="0">
+              <a:buNone/>
+            </a:pPr>
+            <a:r>
+              <a:rPr lang="en-US" sz="1200" u="sng" dirty="0">
+                <a:solidFill>
+                  <a:srgbClr val="8A939B"/>
+                </a:solidFill>
+                <a:latin typeface="Calibri" pitchFamily="34" charset="0"/>
+                <a:ea typeface="Calibri" pitchFamily="34" charset="-122"/>
+                <a:cs typeface="Calibri" pitchFamily="34" charset="-120"/>
+                <a:hlinkClick r:id="rId1" invalidUrl="" action="" tgtFrame="" tooltip="" history="1" highlightClick="0" endSnd="0">
+                  <a:extLst>
+                    <a:ext uri="{A12FA001-AC4F-418D-AE19-62706E023703}">
+                      <ahyp:hlinkClr xmlns:ahyp="http://schemas.microsoft.com/office/drawing/2018/hyperlinkcolor" val="tx"/>
+                    </a:ext>
+                  </a:extLst>
+                </a:hlinkClick>
+              </a:rPr>
+              <a:t>cuinotes.com</a:t>
+            </a:r>
+            <a:pPr algn="r" indent="0" marL="0">
+              <a:buNone/>
+            </a:pPr>
+            <a:r>
+              <a:rPr lang="en-US" sz="1200" dirty="0">
+                <a:solidFill>
+                  <a:srgbClr val="8A939B"/>
+                </a:solidFill>
+                <a:latin typeface="Calibri" pitchFamily="34" charset="0"/>
+                <a:ea typeface="Calibri" pitchFamily="34" charset="-122"/>
+                <a:cs typeface="Calibri" pitchFamily="34" charset="-120"/>
+              </a:rPr>
+              <a:t>  ·  18</a:t>
+            </a:r>
+            <a:endParaRPr lang="en-US" sz="1200" dirty="0"/>
           </a:p>
         </p:txBody>
       </p:sp>
@@ -4605,7 +8827,7 @@
               <a:buNone/>
             </a:pPr>
             <a:r>
-              <a:rPr lang="en-US" sz="1500" dirty="0">
+              <a:rPr lang="en-US" sz="1800" dirty="0">
                 <a:solidFill>
                   <a:srgbClr val="1F2429"/>
                 </a:solidFill>
@@ -4615,7 +8837,7 @@
               </a:rPr>
               <a:t>Why data modeling comes before building anything, not after</a:t>
             </a:r>
-            <a:endParaRPr lang="en-US" sz="1500" dirty="0"/>
+            <a:endParaRPr lang="en-US" sz="1800" dirty="0"/>
           </a:p>
         </p:txBody>
       </p:sp>
@@ -4703,7 +8925,7 @@
               <a:buNone/>
             </a:pPr>
             <a:r>
-              <a:rPr lang="en-US" sz="1500" dirty="0">
+              <a:rPr lang="en-US" sz="1800" dirty="0">
                 <a:solidFill>
                   <a:srgbClr val="1F2429"/>
                 </a:solidFill>
@@ -4713,7 +8935,7 @@
               </a:rPr>
               <a:t>Conceptual data models — capturing meaning, independent of technology</a:t>
             </a:r>
-            <a:endParaRPr lang="en-US" sz="1500" dirty="0"/>
+            <a:endParaRPr lang="en-US" sz="1800" dirty="0"/>
           </a:p>
         </p:txBody>
       </p:sp>
@@ -4801,7 +9023,7 @@
               <a:buNone/>
             </a:pPr>
             <a:r>
-              <a:rPr lang="en-US" sz="1500" dirty="0">
+              <a:rPr lang="en-US" sz="1800" dirty="0">
                 <a:solidFill>
                   <a:srgbClr val="1F2429"/>
                 </a:solidFill>
@@ -4811,7 +9033,7 @@
               </a:rPr>
               <a:t>Logical data models — adding relational structure, still DBMS-independent</a:t>
             </a:r>
-            <a:endParaRPr lang="en-US" sz="1500" dirty="0"/>
+            <a:endParaRPr lang="en-US" sz="1800" dirty="0"/>
           </a:p>
         </p:txBody>
       </p:sp>
@@ -4899,7 +9121,7 @@
               <a:buNone/>
             </a:pPr>
             <a:r>
-              <a:rPr lang="en-US" sz="1500" dirty="0">
+              <a:rPr lang="en-US" sz="1800" dirty="0">
                 <a:solidFill>
                   <a:srgbClr val="1F2429"/>
                 </a:solidFill>
@@ -4909,7 +9131,7 @@
               </a:rPr>
               <a:t>Relational database design as this course's specific focus</a:t>
             </a:r>
-            <a:endParaRPr lang="en-US" sz="1500" dirty="0"/>
+            <a:endParaRPr lang="en-US" sz="1800" dirty="0"/>
           </a:p>
         </p:txBody>
       </p:sp>
@@ -4997,7 +9219,7 @@
               <a:buNone/>
             </a:pPr>
             <a:r>
-              <a:rPr lang="en-US" sz="1500" dirty="0">
+              <a:rPr lang="en-US" sz="1800" dirty="0">
                 <a:solidFill>
                   <a:srgbClr val="1F2429"/>
                 </a:solidFill>
@@ -5007,7 +9229,7 @@
               </a:rPr>
               <a:t>Mapping conceptual → logical → relational schema</a:t>
             </a:r>
-            <a:endParaRPr lang="en-US" sz="1500" dirty="0"/>
+            <a:endParaRPr lang="en-US" sz="1800" dirty="0"/>
           </a:p>
         </p:txBody>
       </p:sp>
@@ -5095,7 +9317,7 @@
               <a:buNone/>
             </a:pPr>
             <a:r>
-              <a:rPr lang="en-US" sz="1500" dirty="0">
+              <a:rPr lang="en-US" sz="1800" dirty="0">
                 <a:solidFill>
                   <a:srgbClr val="1F2429"/>
                 </a:solidFill>
@@ -5105,7 +9327,7 @@
               </a:rPr>
               <a:t>Practical considerations that separate a good design from a merely working one</a:t>
             </a:r>
-            <a:endParaRPr lang="en-US" sz="1500" dirty="0"/>
+            <a:endParaRPr lang="en-US" sz="1800" dirty="0"/>
           </a:p>
         </p:txBody>
       </p:sp>
@@ -5134,7 +9356,7 @@
               <a:buNone/>
             </a:pPr>
             <a:r>
-              <a:rPr lang="en-US" sz="1000" u="sng" dirty="0">
+              <a:rPr lang="en-US" sz="1200" u="sng" dirty="0">
                 <a:solidFill>
                   <a:srgbClr val="8A939B"/>
                 </a:solidFill>
@@ -5155,7 +9377,7 @@
               <a:buNone/>
             </a:pPr>
             <a:r>
-              <a:rPr lang="en-US" sz="1000" dirty="0">
+              <a:rPr lang="en-US" sz="1200" dirty="0">
                 <a:solidFill>
                   <a:srgbClr val="8A939B"/>
                 </a:solidFill>
@@ -5165,7 +9387,525 @@
               </a:rPr>
               <a:t>  ·  2</a:t>
             </a:r>
-            <a:endParaRPr lang="en-US" sz="1000" dirty="0"/>
+            <a:endParaRPr lang="en-US" sz="1200" dirty="0"/>
+          </a:p>
+        </p:txBody>
+      </p:sp>
+    </p:spTree>
+  </p:cSld>
+  <p:clrMapOvr>
+    <a:masterClrMapping/>
+  </p:clrMapOvr>
+</p:sld>
+</file>
+
+<file path=ppt/slides/slide20.xml><?xml version="1.0" encoding="utf-8"?>
+<p:sld xmlns:a="http://schemas.openxmlformats.org/drawingml/2006/main" xmlns:r="http://schemas.openxmlformats.org/officeDocument/2006/relationships" xmlns:p="http://schemas.openxmlformats.org/presentationml/2006/main">
+  <p:cSld name="Slide 4">
+    <p:bg>
+      <p:bgPr>
+        <a:solidFill>
+          <a:srgbClr val="F7F8F9"/>
+        </a:solidFill>
+      </p:bgPr>
+    </p:bg>
+    <p:spTree>
+      <p:nvGrpSpPr>
+        <p:cNvPr id="1" name=""/>
+        <p:cNvGrpSpPr/>
+        <p:nvPr/>
+      </p:nvGrpSpPr>
+      <p:grpSpPr>
+        <a:xfrm>
+          <a:off x="0" y="0"/>
+          <a:ext cx="0" cy="0"/>
+          <a:chOff x="0" y="0"/>
+          <a:chExt cx="0" cy="0"/>
+        </a:xfrm>
+      </p:grpSpPr>
+      <p:sp>
+        <p:nvSpPr>
+          <p:cNvPr id="2" name="Text 0"/>
+          <p:cNvSpPr txBox="1"/>
+          <p:nvPr/>
+        </p:nvSpPr>
+        <p:spPr>
+          <a:xfrm>
+            <a:off x="640080" y="384048"/>
+            <a:ext cx="10911535" cy="320040"/>
+          </a:xfrm>
+          <a:prstGeom prst="rect">
+            <a:avLst/>
+          </a:prstGeom>
+          <a:noFill/>
+          <a:ln/>
+        </p:spPr>
+        <p:txBody>
+          <a:bodyPr wrap="square" lIns="0" tIns="0" rIns="0" bIns="0" rtlCol="0" anchor="ctr"/>
+          <a:lstStyle/>
+          <a:p>
+            <a:pPr indent="0" marL="0">
+              <a:buNone/>
+            </a:pPr>
+            <a:r>
+              <a:rPr lang="en-US" sz="1250" b="1" spc="250" kern="0" dirty="0">
+                <a:solidFill>
+                  <a:srgbClr val="8B7FD9"/>
+                </a:solidFill>
+                <a:latin typeface="Calibri" pitchFamily="34" charset="0"/>
+                <a:ea typeface="Calibri" pitchFamily="34" charset="-122"/>
+                <a:cs typeface="Calibri" pitchFamily="34" charset="-120"/>
+              </a:rPr>
+              <a:t>RECAP</a:t>
+            </a:r>
+            <a:endParaRPr lang="en-US" sz="1250" dirty="0"/>
+          </a:p>
+        </p:txBody>
+      </p:sp>
+      <p:sp>
+        <p:nvSpPr>
+          <p:cNvPr id="3" name="Text 1"/>
+          <p:cNvSpPr txBox="1"/>
+          <p:nvPr/>
+        </p:nvSpPr>
+        <p:spPr>
+          <a:xfrm>
+            <a:off x="640080" y="713232"/>
+            <a:ext cx="10911535" cy="777240"/>
+          </a:xfrm>
+          <a:prstGeom prst="rect">
+            <a:avLst/>
+          </a:prstGeom>
+          <a:noFill/>
+          <a:ln/>
+        </p:spPr>
+        <p:txBody>
+          <a:bodyPr wrap="square" lIns="0" tIns="0" rIns="0" bIns="0" rtlCol="0" anchor="ctr"/>
+          <a:lstStyle/>
+          <a:p>
+            <a:pPr indent="0" marL="0">
+              <a:buNone/>
+            </a:pPr>
+            <a:r>
+              <a:rPr lang="en-US" sz="2600" b="1" dirty="0">
+                <a:solidFill>
+                  <a:srgbClr val="1F2429"/>
+                </a:solidFill>
+                <a:latin typeface="Calibri" pitchFamily="34" charset="0"/>
+                <a:ea typeface="Calibri" pitchFamily="34" charset="-122"/>
+                <a:cs typeface="Calibri" pitchFamily="34" charset="-120"/>
+              </a:rPr>
+              <a:t>The Pipeline, Step by Step</a:t>
+            </a:r>
+            <a:endParaRPr lang="en-US" sz="2600" dirty="0"/>
+          </a:p>
+        </p:txBody>
+      </p:sp>
+      <p:sp>
+        <p:nvSpPr>
+          <p:cNvPr id="4" name="Shape 2"/>
+          <p:cNvSpPr/>
+          <p:nvPr/>
+        </p:nvSpPr>
+        <p:spPr>
+          <a:xfrm>
+            <a:off x="2651760" y="1691640"/>
+            <a:ext cx="6888175" cy="1249680"/>
+          </a:xfrm>
+          <a:prstGeom prst="roundRect">
+            <a:avLst>
+              <a:gd name="adj" fmla="val 5854"/>
+            </a:avLst>
+          </a:prstGeom>
+          <a:solidFill>
+            <a:srgbClr val="2FE6C4"/>
+          </a:solidFill>
+          <a:ln/>
+        </p:spPr>
+      </p:sp>
+      <p:sp>
+        <p:nvSpPr>
+          <p:cNvPr id="5" name="Text 3"/>
+          <p:cNvSpPr txBox="1"/>
+          <p:nvPr/>
+        </p:nvSpPr>
+        <p:spPr>
+          <a:xfrm>
+            <a:off x="2880360" y="1764792"/>
+            <a:ext cx="6430975" cy="524866"/>
+          </a:xfrm>
+          <a:prstGeom prst="rect">
+            <a:avLst/>
+          </a:prstGeom>
+          <a:noFill/>
+          <a:ln/>
+        </p:spPr>
+        <p:txBody>
+          <a:bodyPr wrap="square" lIns="0" tIns="0" rIns="0" bIns="0" rtlCol="0" anchor="ctr"/>
+          <a:lstStyle/>
+          <a:p>
+            <a:pPr algn="l" indent="0" marL="0">
+              <a:buNone/>
+            </a:pPr>
+            <a:r>
+              <a:rPr lang="en-US" sz="1800" b="1" dirty="0">
+                <a:solidFill>
+                  <a:srgbClr val="14181C"/>
+                </a:solidFill>
+                <a:latin typeface="Calibri" pitchFamily="34" charset="0"/>
+                <a:ea typeface="Calibri" pitchFamily="34" charset="-122"/>
+                <a:cs typeface="Calibri" pitchFamily="34" charset="-120"/>
+              </a:rPr>
+              <a:t>Conceptual model</a:t>
+            </a:r>
+            <a:endParaRPr lang="en-US" sz="1800" dirty="0"/>
+          </a:p>
+        </p:txBody>
+      </p:sp>
+      <p:sp>
+        <p:nvSpPr>
+          <p:cNvPr id="6" name="Text 4"/>
+          <p:cNvSpPr txBox="1"/>
+          <p:nvPr/>
+        </p:nvSpPr>
+        <p:spPr>
+          <a:xfrm>
+            <a:off x="2880360" y="2266493"/>
+            <a:ext cx="6430975" cy="599846"/>
+          </a:xfrm>
+          <a:prstGeom prst="rect">
+            <a:avLst/>
+          </a:prstGeom>
+          <a:noFill/>
+          <a:ln/>
+        </p:spPr>
+        <p:txBody>
+          <a:bodyPr wrap="square" lIns="0" tIns="0" rIns="0" bIns="0" rtlCol="0" anchor="t"/>
+          <a:lstStyle/>
+          <a:p>
+            <a:pPr algn="l" indent="0" marL="0">
+              <a:buNone/>
+            </a:pPr>
+            <a:r>
+              <a:rPr lang="en-US" sz="1800" dirty="0">
+                <a:solidFill>
+                  <a:srgbClr val="20242A"/>
+                </a:solidFill>
+                <a:latin typeface="Calibri" pitchFamily="34" charset="0"/>
+                <a:ea typeface="Calibri" pitchFamily="34" charset="-122"/>
+                <a:cs typeface="Calibri" pitchFamily="34" charset="-120"/>
+              </a:rPr>
+              <a:t>Staff say “a branch employs several staff”: entities and relationships, no tables yet.</a:t>
+            </a:r>
+            <a:endParaRPr lang="en-US" sz="1800" dirty="0"/>
+          </a:p>
+        </p:txBody>
+      </p:sp>
+      <p:sp>
+        <p:nvSpPr>
+          <p:cNvPr id="7" name="Shape 5"/>
+          <p:cNvSpPr/>
+          <p:nvPr/>
+        </p:nvSpPr>
+        <p:spPr>
+          <a:xfrm>
+            <a:off x="6095848" y="2941320"/>
+            <a:ext cx="0" cy="320040"/>
+          </a:xfrm>
+          <a:prstGeom prst="line">
+            <a:avLst/>
+          </a:prstGeom>
+          <a:noFill/>
+          <a:ln w="25400">
+            <a:solidFill>
+              <a:srgbClr val="6B7280"/>
+            </a:solidFill>
+            <a:prstDash val="solid"/>
+            <a:tailEnd type="triangle"/>
+          </a:ln>
+        </p:spPr>
+      </p:sp>
+      <p:sp>
+        <p:nvSpPr>
+          <p:cNvPr id="8" name="Shape 6"/>
+          <p:cNvSpPr/>
+          <p:nvPr/>
+        </p:nvSpPr>
+        <p:spPr>
+          <a:xfrm>
+            <a:off x="2651760" y="3261360"/>
+            <a:ext cx="6888175" cy="1249680"/>
+          </a:xfrm>
+          <a:prstGeom prst="roundRect">
+            <a:avLst>
+              <a:gd name="adj" fmla="val 5854"/>
+            </a:avLst>
+          </a:prstGeom>
+          <a:solidFill>
+            <a:srgbClr val="8B7FD9"/>
+          </a:solidFill>
+          <a:ln/>
+        </p:spPr>
+      </p:sp>
+      <p:sp>
+        <p:nvSpPr>
+          <p:cNvPr id="9" name="Text 7"/>
+          <p:cNvSpPr txBox="1"/>
+          <p:nvPr/>
+        </p:nvSpPr>
+        <p:spPr>
+          <a:xfrm>
+            <a:off x="2880360" y="3334512"/>
+            <a:ext cx="6430975" cy="524866"/>
+          </a:xfrm>
+          <a:prstGeom prst="rect">
+            <a:avLst/>
+          </a:prstGeom>
+          <a:noFill/>
+          <a:ln/>
+        </p:spPr>
+        <p:txBody>
+          <a:bodyPr wrap="square" lIns="0" tIns="0" rIns="0" bIns="0" rtlCol="0" anchor="ctr"/>
+          <a:lstStyle/>
+          <a:p>
+            <a:pPr algn="l" indent="0" marL="0">
+              <a:buNone/>
+            </a:pPr>
+            <a:r>
+              <a:rPr lang="en-US" sz="1800" b="1" dirty="0">
+                <a:solidFill>
+                  <a:srgbClr val="14181C"/>
+                </a:solidFill>
+                <a:latin typeface="Calibri" pitchFamily="34" charset="0"/>
+                <a:ea typeface="Calibri" pitchFamily="34" charset="-122"/>
+                <a:cs typeface="Calibri" pitchFamily="34" charset="-120"/>
+              </a:rPr>
+              <a:t>Logical model</a:t>
+            </a:r>
+            <a:endParaRPr lang="en-US" sz="1800" dirty="0"/>
+          </a:p>
+        </p:txBody>
+      </p:sp>
+      <p:sp>
+        <p:nvSpPr>
+          <p:cNvPr id="10" name="Text 8"/>
+          <p:cNvSpPr txBox="1"/>
+          <p:nvPr/>
+        </p:nvSpPr>
+        <p:spPr>
+          <a:xfrm>
+            <a:off x="2880360" y="3836213"/>
+            <a:ext cx="6430975" cy="599846"/>
+          </a:xfrm>
+          <a:prstGeom prst="rect">
+            <a:avLst/>
+          </a:prstGeom>
+          <a:noFill/>
+          <a:ln/>
+        </p:spPr>
+        <p:txBody>
+          <a:bodyPr wrap="square" lIns="0" tIns="0" rIns="0" bIns="0" rtlCol="0" anchor="t"/>
+          <a:lstStyle/>
+          <a:p>
+            <a:pPr algn="l" indent="0" marL="0">
+              <a:buNone/>
+            </a:pPr>
+            <a:r>
+              <a:rPr lang="en-US" sz="1800" dirty="0">
+                <a:solidFill>
+                  <a:srgbClr val="20242A"/>
+                </a:solidFill>
+                <a:latin typeface="Calibri" pitchFamily="34" charset="0"/>
+                <a:ea typeface="Calibri" pitchFamily="34" charset="-122"/>
+                <a:cs typeface="Calibri" pitchFamily="34" charset="-120"/>
+              </a:rPr>
+              <a:t>Each entity becomes a relation with a primary key; each 1:N becomes a foreign key.</a:t>
+            </a:r>
+            <a:endParaRPr lang="en-US" sz="1800" dirty="0"/>
+          </a:p>
+        </p:txBody>
+      </p:sp>
+      <p:sp>
+        <p:nvSpPr>
+          <p:cNvPr id="11" name="Shape 9"/>
+          <p:cNvSpPr/>
+          <p:nvPr/>
+        </p:nvSpPr>
+        <p:spPr>
+          <a:xfrm>
+            <a:off x="6095848" y="4511040"/>
+            <a:ext cx="0" cy="320040"/>
+          </a:xfrm>
+          <a:prstGeom prst="line">
+            <a:avLst/>
+          </a:prstGeom>
+          <a:noFill/>
+          <a:ln w="25400">
+            <a:solidFill>
+              <a:srgbClr val="6B7280"/>
+            </a:solidFill>
+            <a:prstDash val="solid"/>
+            <a:tailEnd type="triangle"/>
+          </a:ln>
+        </p:spPr>
+      </p:sp>
+      <p:sp>
+        <p:nvSpPr>
+          <p:cNvPr id="12" name="Shape 10"/>
+          <p:cNvSpPr/>
+          <p:nvPr/>
+        </p:nvSpPr>
+        <p:spPr>
+          <a:xfrm>
+            <a:off x="2651760" y="4831080"/>
+            <a:ext cx="6888175" cy="1249680"/>
+          </a:xfrm>
+          <a:prstGeom prst="roundRect">
+            <a:avLst>
+              <a:gd name="adj" fmla="val 5854"/>
+            </a:avLst>
+          </a:prstGeom>
+          <a:solidFill>
+            <a:srgbClr val="E8A33D"/>
+          </a:solidFill>
+          <a:ln/>
+        </p:spPr>
+      </p:sp>
+      <p:sp>
+        <p:nvSpPr>
+          <p:cNvPr id="13" name="Text 11"/>
+          <p:cNvSpPr txBox="1"/>
+          <p:nvPr/>
+        </p:nvSpPr>
+        <p:spPr>
+          <a:xfrm>
+            <a:off x="2880360" y="4904232"/>
+            <a:ext cx="6430975" cy="524866"/>
+          </a:xfrm>
+          <a:prstGeom prst="rect">
+            <a:avLst/>
+          </a:prstGeom>
+          <a:noFill/>
+          <a:ln/>
+        </p:spPr>
+        <p:txBody>
+          <a:bodyPr wrap="square" lIns="0" tIns="0" rIns="0" bIns="0" rtlCol="0" anchor="ctr"/>
+          <a:lstStyle/>
+          <a:p>
+            <a:pPr algn="l" indent="0" marL="0">
+              <a:buNone/>
+            </a:pPr>
+            <a:r>
+              <a:rPr lang="en-US" sz="1800" b="1" dirty="0">
+                <a:solidFill>
+                  <a:srgbClr val="14181C"/>
+                </a:solidFill>
+                <a:latin typeface="Calibri" pitchFamily="34" charset="0"/>
+                <a:ea typeface="Calibri" pitchFamily="34" charset="-122"/>
+                <a:cs typeface="Calibri" pitchFamily="34" charset="-120"/>
+              </a:rPr>
+              <a:t>Relational schema</a:t>
+            </a:r>
+            <a:endParaRPr lang="en-US" sz="1800" dirty="0"/>
+          </a:p>
+        </p:txBody>
+      </p:sp>
+      <p:sp>
+        <p:nvSpPr>
+          <p:cNvPr id="14" name="Text 12"/>
+          <p:cNvSpPr txBox="1"/>
+          <p:nvPr/>
+        </p:nvSpPr>
+        <p:spPr>
+          <a:xfrm>
+            <a:off x="2880360" y="5405933"/>
+            <a:ext cx="6430975" cy="599846"/>
+          </a:xfrm>
+          <a:prstGeom prst="rect">
+            <a:avLst/>
+          </a:prstGeom>
+          <a:noFill/>
+          <a:ln/>
+        </p:spPr>
+        <p:txBody>
+          <a:bodyPr wrap="square" lIns="0" tIns="0" rIns="0" bIns="0" rtlCol="0" anchor="t"/>
+          <a:lstStyle/>
+          <a:p>
+            <a:pPr algn="l" indent="0" marL="0">
+              <a:buNone/>
+            </a:pPr>
+            <a:r>
+              <a:rPr lang="en-US" sz="1800" dirty="0">
+                <a:solidFill>
+                  <a:srgbClr val="20242A"/>
+                </a:solidFill>
+                <a:latin typeface="Calibri" pitchFamily="34" charset="0"/>
+                <a:ea typeface="Calibri" pitchFamily="34" charset="-122"/>
+                <a:cs typeface="Calibri" pitchFamily="34" charset="-120"/>
+              </a:rPr>
+              <a:t>Concrete types, NOT NULL, CHECK and FOREIGN KEY, written in DBMS syntax.</a:t>
+            </a:r>
+            <a:endParaRPr lang="en-US" sz="1800" dirty="0"/>
+          </a:p>
+        </p:txBody>
+      </p:sp>
+      <p:sp>
+        <p:nvSpPr>
+          <p:cNvPr id="15" name="Text 13"/>
+          <p:cNvSpPr/>
+          <p:nvPr/>
+        </p:nvSpPr>
+        <p:spPr>
+          <a:xfrm>
+            <a:off x="9951415" y="6455664"/>
+            <a:ext cx="2011680" cy="292608"/>
+          </a:xfrm>
+          <a:prstGeom prst="rect">
+            <a:avLst/>
+          </a:prstGeom>
+          <a:noFill/>
+          <a:ln/>
+        </p:spPr>
+        <p:txBody>
+          <a:bodyPr wrap="square" rtlCol="0" anchor="ctr"/>
+          <a:lstStyle/>
+          <a:p>
+            <a:pPr algn="r" indent="0" marL="0">
+              <a:buNone/>
+            </a:pPr>
+            <a:r>
+              <a:rPr lang="en-US" sz="1200" u="sng" dirty="0">
+                <a:solidFill>
+                  <a:srgbClr val="8A939B"/>
+                </a:solidFill>
+                <a:latin typeface="Calibri" pitchFamily="34" charset="0"/>
+                <a:ea typeface="Calibri" pitchFamily="34" charset="-122"/>
+                <a:cs typeface="Calibri" pitchFamily="34" charset="-120"/>
+                <a:hlinkClick r:id="rId1" invalidUrl="" action="" tgtFrame="" tooltip="" history="1" highlightClick="0" endSnd="0">
+                  <a:extLst>
+                    <a:ext uri="{A12FA001-AC4F-418D-AE19-62706E023703}">
+                      <ahyp:hlinkClr xmlns:ahyp="http://schemas.microsoft.com/office/drawing/2018/hyperlinkcolor" val="tx"/>
+                    </a:ext>
+                  </a:extLst>
+                </a:hlinkClick>
+              </a:rPr>
+              <a:t>cuinotes.com</a:t>
+            </a:r>
+            <a:pPr algn="r" indent="0" marL="0">
+              <a:buNone/>
+            </a:pPr>
+            <a:r>
+              <a:rPr lang="en-US" sz="1200" dirty="0">
+                <a:solidFill>
+                  <a:srgbClr val="8A939B"/>
+                </a:solidFill>
+                <a:latin typeface="Calibri" pitchFamily="34" charset="0"/>
+                <a:ea typeface="Calibri" pitchFamily="34" charset="-122"/>
+                <a:cs typeface="Calibri" pitchFamily="34" charset="-120"/>
+              </a:rPr>
+              <a:t>  ·  19</a:t>
+            </a:r>
+            <a:endParaRPr lang="en-US" sz="1200" dirty="0"/>
           </a:p>
         </p:txBody>
       </p:sp>
@@ -5311,7 +10051,7 @@
               <a:buChar char="•"/>
             </a:pPr>
             <a:r>
-              <a:rPr lang="en-US" sz="1500" dirty="0">
+              <a:rPr lang="en-US" sz="1800" dirty="0">
                 <a:solidFill>
                   <a:srgbClr val="1F2429"/>
                 </a:solidFill>
@@ -5321,7 +10061,7 @@
               </a:rPr>
               <a:t>A data model is a shared vocabulary for data, its relationships, and its constraints — letting a designer, a client, and a DBMS agree on what “a branch” or “a viewing” means before any SQL is written.</a:t>
             </a:r>
-            <a:endParaRPr lang="en-US" sz="1500" dirty="0"/>
+            <a:endParaRPr lang="en-US" sz="1800" dirty="0"/>
           </a:p>
           <a:p>
             <a:pPr marL="228600" indent="-228600">
@@ -5335,7 +10075,7 @@
               <a:buChar char="•"/>
             </a:pPr>
             <a:r>
-              <a:rPr lang="en-US" sz="1500" dirty="0">
+              <a:rPr lang="en-US" sz="1800" dirty="0">
                 <a:solidFill>
                   <a:srgbClr val="1F2429"/>
                 </a:solidFill>
@@ -5345,7 +10085,7 @@
               </a:rPr>
               <a:t>Tables are a technology-specific answer to a business question — separating “what does the business need?” from “how do we implement it?” lets you get the meaning right first, cheaply.</a:t>
             </a:r>
-            <a:endParaRPr lang="en-US" sz="1500" dirty="0"/>
+            <a:endParaRPr lang="en-US" sz="1800" dirty="0"/>
           </a:p>
         </p:txBody>
       </p:sp>
@@ -5358,7 +10098,7 @@
         <p:spPr>
           <a:xfrm>
             <a:off x="640080" y="4114800"/>
-            <a:ext cx="10911535" cy="1463040"/>
+            <a:ext cx="10911535" cy="1645920"/>
           </a:xfrm>
           <a:prstGeom prst="roundRect">
             <a:avLst>
@@ -5401,7 +10141,7 @@
               <a:buNone/>
             </a:pPr>
             <a:r>
-              <a:rPr lang="en-US" sz="1100" b="1" spc="200" kern="0" dirty="0">
+              <a:rPr lang="en-US" sz="1200" b="1" spc="200" kern="0" dirty="0">
                 <a:solidFill>
                   <a:srgbClr val="8A5A12"/>
                 </a:solidFill>
@@ -5411,7 +10151,7 @@
               </a:rPr>
               <a:t>WARNING</a:t>
             </a:r>
-            <a:endParaRPr lang="en-US" sz="1100" dirty="0"/>
+            <a:endParaRPr lang="en-US" sz="1200" dirty="0"/>
           </a:p>
         </p:txBody>
       </p:sp>
@@ -5424,7 +10164,7 @@
         <p:spPr>
           <a:xfrm>
             <a:off x="896112" y="4572000"/>
-            <a:ext cx="10399471" cy="841248"/>
+            <a:ext cx="10399471" cy="1000000"/>
           </a:xfrm>
           <a:prstGeom prst="rect">
             <a:avLst/>
@@ -5443,7 +10183,7 @@
               <a:buNone/>
             </a:pPr>
             <a:r>
-              <a:rPr lang="en-US" sz="1300" dirty="0">
+              <a:rPr lang="en-US" sz="1800" dirty="0">
                 <a:solidFill>
                   <a:srgbClr val="1F2429"/>
                 </a:solidFill>
@@ -5453,7 +10193,7 @@
               </a:rPr>
               <a:t>The cost of getting this wrong compounds: a missing requirement caught during modeling costs a conversation and a redrawn diagram. The same requirement, caught after production data depends on the shape, can cost a multi-week migration.</a:t>
             </a:r>
-            <a:endParaRPr lang="en-US" sz="1300" dirty="0"/>
+            <a:endParaRPr lang="en-US" sz="1800" dirty="0"/>
           </a:p>
         </p:txBody>
       </p:sp>
@@ -5482,7 +10222,7 @@
               <a:buNone/>
             </a:pPr>
             <a:r>
-              <a:rPr lang="en-US" sz="1000" u="sng" dirty="0">
+              <a:rPr lang="en-US" sz="1200" u="sng" dirty="0">
                 <a:solidFill>
                   <a:srgbClr val="8A939B"/>
                 </a:solidFill>
@@ -5503,7 +10243,7 @@
               <a:buNone/>
             </a:pPr>
             <a:r>
-              <a:rPr lang="en-US" sz="1000" dirty="0">
+              <a:rPr lang="en-US" sz="1200" dirty="0">
                 <a:solidFill>
                   <a:srgbClr val="8A939B"/>
                 </a:solidFill>
@@ -5513,7 +10253,7 @@
               </a:rPr>
               <a:t>  ·  3</a:t>
             </a:r>
-            <a:endParaRPr lang="en-US" sz="1000" dirty="0"/>
+            <a:endParaRPr lang="en-US" sz="1200" dirty="0"/>
           </a:p>
         </p:txBody>
       </p:sp>
@@ -5674,7 +10414,7 @@
               <a:buNone/>
             </a:pPr>
             <a:r>
-              <a:rPr lang="en-US" sz="1400" b="1" dirty="0">
+              <a:rPr lang="en-US" sz="1800" b="1" dirty="0">
                 <a:solidFill>
                   <a:srgbClr val="14181C"/>
                 </a:solidFill>
@@ -5684,7 +10424,7 @@
               </a:rPr>
               <a:t>Conceptual model</a:t>
             </a:r>
-            <a:endParaRPr lang="en-US" sz="1400" dirty="0"/>
+            <a:endParaRPr lang="en-US" sz="1800" dirty="0"/>
           </a:p>
         </p:txBody>
       </p:sp>
@@ -5713,7 +10453,7 @@
               <a:buNone/>
             </a:pPr>
             <a:r>
-              <a:rPr lang="en-US" sz="1150" dirty="0">
+              <a:rPr lang="en-US" sz="1800" dirty="0">
                 <a:solidFill>
                   <a:srgbClr val="20242A"/>
                 </a:solidFill>
@@ -5723,7 +10463,7 @@
               </a:rPr>
               <a:t>“What are the things, and how do they relate?” — technology-independent, for business stakeholders</a:t>
             </a:r>
-            <a:endParaRPr lang="en-US" sz="1150" dirty="0"/>
+            <a:endParaRPr lang="en-US" sz="1800" dirty="0"/>
           </a:p>
         </p:txBody>
       </p:sp>
@@ -5798,7 +10538,7 @@
               <a:buNone/>
             </a:pPr>
             <a:r>
-              <a:rPr lang="en-US" sz="1400" b="1" dirty="0">
+              <a:rPr lang="en-US" sz="1800" b="1" dirty="0">
                 <a:solidFill>
                   <a:srgbClr val="14181C"/>
                 </a:solidFill>
@@ -5808,7 +10548,7 @@
               </a:rPr>
               <a:t>Logical model</a:t>
             </a:r>
-            <a:endParaRPr lang="en-US" sz="1400" dirty="0"/>
+            <a:endParaRPr lang="en-US" sz="1800" dirty="0"/>
           </a:p>
         </p:txBody>
       </p:sp>
@@ -5837,7 +10577,7 @@
               <a:buNone/>
             </a:pPr>
             <a:r>
-              <a:rPr lang="en-US" sz="1150" dirty="0">
+              <a:rPr lang="en-US" sz="1800" dirty="0">
                 <a:solidFill>
                   <a:srgbClr val="20242A"/>
                 </a:solidFill>
@@ -5847,7 +10587,7 @@
               </a:rPr>
               <a:t>“What tables, columns, and keys does this need?” — DBMS-product-independent, for designers</a:t>
             </a:r>
-            <a:endParaRPr lang="en-US" sz="1150" dirty="0"/>
+            <a:endParaRPr lang="en-US" sz="1800" dirty="0"/>
           </a:p>
         </p:txBody>
       </p:sp>
@@ -5922,7 +10662,7 @@
               <a:buNone/>
             </a:pPr>
             <a:r>
-              <a:rPr lang="en-US" sz="1400" b="1" dirty="0">
+              <a:rPr lang="en-US" sz="1800" b="1" dirty="0">
                 <a:solidFill>
                   <a:srgbClr val="14181C"/>
                 </a:solidFill>
@@ -5932,7 +10672,7 @@
               </a:rPr>
               <a:t>Relational schema</a:t>
             </a:r>
-            <a:endParaRPr lang="en-US" sz="1400" dirty="0"/>
+            <a:endParaRPr lang="en-US" sz="1800" dirty="0"/>
           </a:p>
         </p:txBody>
       </p:sp>
@@ -5961,7 +10701,7 @@
               <a:buNone/>
             </a:pPr>
             <a:r>
-              <a:rPr lang="en-US" sz="1150" dirty="0">
+              <a:rPr lang="en-US" sz="1800" dirty="0">
                 <a:solidFill>
                   <a:srgbClr val="20242A"/>
                 </a:solidFill>
@@ -5971,7 +10711,7 @@
               </a:rPr>
               <a:t>“What does CREATE TABLE actually say?” — concrete data types and DBMS-specific detail</a:t>
             </a:r>
-            <a:endParaRPr lang="en-US" sz="1150" dirty="0"/>
+            <a:endParaRPr lang="en-US" sz="1800" dirty="0"/>
           </a:p>
         </p:txBody>
       </p:sp>
@@ -6000,7 +10740,7 @@
               <a:buNone/>
             </a:pPr>
             <a:r>
-              <a:rPr lang="en-US" sz="1000" u="sng" dirty="0">
+              <a:rPr lang="en-US" sz="1200" u="sng" dirty="0">
                 <a:solidFill>
                   <a:srgbClr val="8A939B"/>
                 </a:solidFill>
@@ -6021,7 +10761,7 @@
               <a:buNone/>
             </a:pPr>
             <a:r>
-              <a:rPr lang="en-US" sz="1000" dirty="0">
+              <a:rPr lang="en-US" sz="1200" dirty="0">
                 <a:solidFill>
                   <a:srgbClr val="8A939B"/>
                 </a:solidFill>
@@ -6031,7 +10771,7 @@
               </a:rPr>
               <a:t>  ·  4</a:t>
             </a:r>
-            <a:endParaRPr lang="en-US" sz="1000" dirty="0"/>
+            <a:endParaRPr lang="en-US" sz="1200" dirty="0"/>
           </a:p>
         </p:txBody>
       </p:sp>
@@ -6177,7 +10917,7 @@
               <a:buChar char="•"/>
             </a:pPr>
             <a:r>
-              <a:rPr lang="en-US" sz="1500" dirty="0">
+              <a:rPr lang="en-US" sz="1800" dirty="0">
                 <a:solidFill>
                   <a:srgbClr val="1F2429"/>
                 </a:solidFill>
@@ -6187,7 +10927,7 @@
               </a:rPr>
               <a:t>A technology-independent description of an organization's data: the entities (things to track), relationships (connections), and attributes (properties).</a:t>
             </a:r>
-            <a:endParaRPr lang="en-US" sz="1500" dirty="0"/>
+            <a:endParaRPr lang="en-US" sz="1800" dirty="0"/>
           </a:p>
           <a:p>
             <a:pPr marL="228600" indent="-228600">
@@ -6201,7 +10941,7 @@
               <a:buChar char="•"/>
             </a:pPr>
             <a:r>
-              <a:rPr lang="en-US" sz="1500" dirty="0">
+              <a:rPr lang="en-US" sz="1800" dirty="0">
                 <a:solidFill>
                   <a:srgbClr val="1F2429"/>
                 </a:solidFill>
@@ -6211,7 +10951,7 @@
               </a:rPr>
               <a:t>No mention of tables, columns, data types, or which DBMS will run it.</a:t>
             </a:r>
-            <a:endParaRPr lang="en-US" sz="1500" dirty="0"/>
+            <a:endParaRPr lang="en-US" sz="1800" dirty="0"/>
           </a:p>
           <a:p>
             <a:pPr marL="228600" indent="-228600">
@@ -6225,7 +10965,7 @@
               <a:buChar char="•"/>
             </a:pPr>
             <a:r>
-              <a:rPr lang="en-US" sz="1500" dirty="0">
+              <a:rPr lang="en-US" sz="1800" dirty="0">
                 <a:solidFill>
                   <a:srgbClr val="1F2429"/>
                 </a:solidFill>
@@ -6235,7 +10975,7 @@
               </a:rPr>
               <a:t>The Entity-Relationship (ER) model, next lecture's subject, is the standard notation for building conceptual models.</a:t>
             </a:r>
-            <a:endParaRPr lang="en-US" sz="1500" dirty="0"/>
+            <a:endParaRPr lang="en-US" sz="1800" dirty="0"/>
           </a:p>
         </p:txBody>
       </p:sp>
@@ -6267,7 +11007,7 @@
               <a:buNone/>
             </a:pPr>
             <a:r>
-              <a:rPr lang="en-US" sz="1400" i="1" dirty="0">
+              <a:rPr lang="en-US" sz="1800" i="1" dirty="0">
                 <a:solidFill>
                   <a:srgbClr val="8B7FD9"/>
                 </a:solidFill>
@@ -6277,7 +11017,7 @@
               </a:rPr>
               <a:t>“A branch employs several staff.” “A client may view several properties, and a property may be viewed by several clients.” “Each property is owned by exactly one private owner.”</a:t>
             </a:r>
-            <a:endParaRPr lang="en-US" sz="1400" dirty="0"/>
+            <a:endParaRPr lang="en-US" sz="1800" dirty="0"/>
           </a:p>
         </p:txBody>
       </p:sp>
@@ -6333,7 +11073,7 @@
               <a:buNone/>
             </a:pPr>
             <a:r>
-              <a:rPr lang="en-US" sz="1100" b="1" spc="200" kern="0" dirty="0">
+              <a:rPr lang="en-US" sz="1200" b="1" spc="200" kern="0" dirty="0">
                 <a:solidFill>
                   <a:srgbClr val="0E7A61"/>
                 </a:solidFill>
@@ -6343,7 +11083,7 @@
               </a:rPr>
               <a:t>TIP</a:t>
             </a:r>
-            <a:endParaRPr lang="en-US" sz="1100" dirty="0"/>
+            <a:endParaRPr lang="en-US" sz="1200" dirty="0"/>
           </a:p>
         </p:txBody>
       </p:sp>
@@ -6375,7 +11115,7 @@
               <a:buNone/>
             </a:pPr>
             <a:r>
-              <a:rPr lang="en-US" sz="1300" dirty="0">
+              <a:rPr lang="en-US" sz="1800" dirty="0">
                 <a:solidFill>
                   <a:srgbClr val="1F2429"/>
                 </a:solidFill>
@@ -6385,7 +11125,7 @@
               </a:rPr>
               <a:t>A conceptual model should survive a change of DBMS unchanged. If moving from PostgreSQL to Oracle forces you to redraw it, the model was capturing implementation detail, not business meaning.</a:t>
             </a:r>
-            <a:endParaRPr lang="en-US" sz="1300" dirty="0"/>
+            <a:endParaRPr lang="en-US" sz="1800" dirty="0"/>
           </a:p>
         </p:txBody>
       </p:sp>
@@ -6414,7 +11154,7 @@
               <a:buNone/>
             </a:pPr>
             <a:r>
-              <a:rPr lang="en-US" sz="1000" u="sng" dirty="0">
+              <a:rPr lang="en-US" sz="1200" u="sng" dirty="0">
                 <a:solidFill>
                   <a:srgbClr val="8A939B"/>
                 </a:solidFill>
@@ -6435,7 +11175,7 @@
               <a:buNone/>
             </a:pPr>
             <a:r>
-              <a:rPr lang="en-US" sz="1000" dirty="0">
+              <a:rPr lang="en-US" sz="1200" dirty="0">
                 <a:solidFill>
                   <a:srgbClr val="8A939B"/>
                 </a:solidFill>
@@ -6445,7 +11185,7 @@
               </a:rPr>
               <a:t>  ·  5</a:t>
             </a:r>
-            <a:endParaRPr lang="en-US" sz="1000" dirty="0"/>
+            <a:endParaRPr lang="en-US" sz="1200" dirty="0"/>
           </a:p>
         </p:txBody>
       </p:sp>
@@ -6591,7 +11331,7 @@
               <a:buChar char="•"/>
             </a:pPr>
             <a:r>
-              <a:rPr lang="en-US" sz="1550" dirty="0">
+              <a:rPr lang="en-US" sz="1800" dirty="0">
                 <a:solidFill>
                   <a:srgbClr val="1F2429"/>
                 </a:solidFill>
@@ -6601,7 +11341,7 @@
               </a:rPr>
               <a:t>Takes the entities, relationships, and attributes from the conceptual model and organizes them according to the rules of a particular family of data model — relational, hierarchical, network, or object-oriented.</a:t>
             </a:r>
-            <a:endParaRPr lang="en-US" sz="1550" dirty="0"/>
+            <a:endParaRPr lang="en-US" sz="1800" dirty="0"/>
           </a:p>
           <a:p>
             <a:pPr marL="228600" indent="-228600">
@@ -6615,7 +11355,7 @@
               <a:buChar char="•"/>
             </a:pPr>
             <a:r>
-              <a:rPr lang="en-US" sz="1550" dirty="0">
+              <a:rPr lang="en-US" sz="1800" dirty="0">
                 <a:solidFill>
                   <a:srgbClr val="1F2429"/>
                 </a:solidFill>
@@ -6625,7 +11365,7 @@
               </a:rPr>
               <a:t>This course works entirely within the relational family: a logical model means a complete set of relation schemas — names, attributes, primary keys, foreign keys — with no data types or storage details yet.</a:t>
             </a:r>
-            <a:endParaRPr lang="en-US" sz="1550" dirty="0"/>
+            <a:endParaRPr lang="en-US" sz="1800" dirty="0"/>
           </a:p>
           <a:p>
             <a:pPr marL="228600" indent="-228600">
@@ -6639,7 +11379,7 @@
               <a:buChar char="•"/>
             </a:pPr>
             <a:r>
-              <a:rPr lang="en-US" sz="1550" dirty="0">
+              <a:rPr lang="en-US" sz="1800" dirty="0">
                 <a:solidFill>
                   <a:srgbClr val="1F2429"/>
                 </a:solidFill>
@@ -6649,7 +11389,7 @@
               </a:rPr>
               <a:t>Answers “what relations do we need, and how do they reference each other?” — not “is salary a DECIMAL(8,2) or an INT?”</a:t>
             </a:r>
-            <a:endParaRPr lang="en-US" sz="1550" dirty="0"/>
+            <a:endParaRPr lang="en-US" sz="1800" dirty="0"/>
           </a:p>
         </p:txBody>
       </p:sp>
@@ -6678,7 +11418,7 @@
               <a:buNone/>
             </a:pPr>
             <a:r>
-              <a:rPr lang="en-US" sz="1000" u="sng" dirty="0">
+              <a:rPr lang="en-US" sz="1200" u="sng" dirty="0">
                 <a:solidFill>
                   <a:srgbClr val="8A939B"/>
                 </a:solidFill>
@@ -6699,7 +11439,7 @@
               <a:buNone/>
             </a:pPr>
             <a:r>
-              <a:rPr lang="en-US" sz="1000" dirty="0">
+              <a:rPr lang="en-US" sz="1200" dirty="0">
                 <a:solidFill>
                   <a:srgbClr val="8A939B"/>
                 </a:solidFill>
@@ -6707,9 +11447,9 @@
                 <a:ea typeface="Calibri" pitchFamily="34" charset="-122"/>
                 <a:cs typeface="Calibri" pitchFamily="34" charset="-120"/>
               </a:rPr>
-              <a:t>  ·  6</a:t>
-            </a:r>
-            <a:endParaRPr lang="en-US" sz="1000" dirty="0"/>
+              <a:t>  ·  7</a:t>
+            </a:r>
+            <a:endParaRPr lang="en-US" sz="1200" dirty="0"/>
           </a:p>
         </p:txBody>
       </p:sp>
@@ -6832,7 +11572,7 @@
         <p:spPr>
           <a:xfrm>
             <a:off x="640080" y="1783080"/>
-            <a:ext cx="3423818" cy="2834640"/>
+            <a:ext cx="3423818" cy="3200400"/>
           </a:xfrm>
           <a:prstGeom prst="roundRect">
             <a:avLst>
@@ -6941,7 +11681,7 @@
               <a:buNone/>
             </a:pPr>
             <a:r>
-              <a:rPr lang="en-US" sz="1500" b="1" dirty="0">
+              <a:rPr lang="en-US" sz="1800" b="1" dirty="0">
                 <a:solidFill>
                   <a:srgbClr val="1F2429"/>
                 </a:solidFill>
@@ -6951,7 +11691,7 @@
               </a:rPr>
               <a:t>Correctness</a:t>
             </a:r>
-            <a:endParaRPr lang="en-US" sz="1500" dirty="0"/>
+            <a:endParaRPr lang="en-US" sz="1800" dirty="0"/>
           </a:p>
         </p:txBody>
       </p:sp>
@@ -6964,7 +11704,7 @@
         <p:spPr>
           <a:xfrm>
             <a:off x="914400" y="3200400"/>
-            <a:ext cx="2875178" cy="1280160"/>
+            <a:ext cx="2875178" cy="1645920"/>
           </a:xfrm>
           <a:prstGeom prst="rect">
             <a:avLst/>
@@ -6983,7 +11723,7 @@
               <a:buNone/>
             </a:pPr>
             <a:r>
-              <a:rPr lang="en-US" sz="1250" dirty="0">
+              <a:rPr lang="en-US" sz="1800" dirty="0">
                 <a:solidFill>
                   <a:srgbClr val="6B7280"/>
                 </a:solidFill>
@@ -6993,7 +11733,7 @@
               </a:rPr>
               <a:t>The design faithfully represents every entity, relationship, and business rule the organization actually has — no more, no less.</a:t>
             </a:r>
-            <a:endParaRPr lang="en-US" sz="1250" dirty="0"/>
+            <a:endParaRPr lang="en-US" sz="1800" dirty="0"/>
           </a:p>
         </p:txBody>
       </p:sp>
@@ -7006,7 +11746,7 @@
         <p:spPr>
           <a:xfrm>
             <a:off x="4383938" y="1783080"/>
-            <a:ext cx="3423818" cy="2834640"/>
+            <a:ext cx="3423818" cy="3200400"/>
           </a:xfrm>
           <a:prstGeom prst="roundRect">
             <a:avLst>
@@ -7115,7 +11855,7 @@
               <a:buNone/>
             </a:pPr>
             <a:r>
-              <a:rPr lang="en-US" sz="1500" b="1" dirty="0">
+              <a:rPr lang="en-US" sz="1800" b="1" dirty="0">
                 <a:solidFill>
                   <a:srgbClr val="1F2429"/>
                 </a:solidFill>
@@ -7125,7 +11865,7 @@
               </a:rPr>
               <a:t>Non-redundancy</a:t>
             </a:r>
-            <a:endParaRPr lang="en-US" sz="1500" dirty="0"/>
+            <a:endParaRPr lang="en-US" sz="1800" dirty="0"/>
           </a:p>
         </p:txBody>
       </p:sp>
@@ -7138,7 +11878,7 @@
         <p:spPr>
           <a:xfrm>
             <a:off x="4658258" y="3200400"/>
-            <a:ext cx="2875178" cy="1280160"/>
+            <a:ext cx="2875178" cy="1645920"/>
           </a:xfrm>
           <a:prstGeom prst="rect">
             <a:avLst/>
@@ -7157,7 +11897,7 @@
               <a:buNone/>
             </a:pPr>
             <a:r>
-              <a:rPr lang="en-US" sz="1250" dirty="0">
+              <a:rPr lang="en-US" sz="1800" dirty="0">
                 <a:solidFill>
                   <a:srgbClr val="6B7280"/>
                 </a:solidFill>
@@ -7167,7 +11907,7 @@
               </a:rPr>
               <a:t>The same fact is not stored in more than one place, so it can never drift out of sync (the motivation for normalization, Unit 5).</a:t>
             </a:r>
-            <a:endParaRPr lang="en-US" sz="1250" dirty="0"/>
+            <a:endParaRPr lang="en-US" sz="1800" dirty="0"/>
           </a:p>
         </p:txBody>
       </p:sp>
@@ -7180,7 +11920,7 @@
         <p:spPr>
           <a:xfrm>
             <a:off x="8127797" y="1783080"/>
-            <a:ext cx="3423818" cy="2834640"/>
+            <a:ext cx="3423818" cy="3200400"/>
           </a:xfrm>
           <a:prstGeom prst="roundRect">
             <a:avLst>
@@ -7289,7 +12029,7 @@
               <a:buNone/>
             </a:pPr>
             <a:r>
-              <a:rPr lang="en-US" sz="1500" b="1" dirty="0">
+              <a:rPr lang="en-US" sz="1800" b="1" dirty="0">
                 <a:solidFill>
                   <a:srgbClr val="1F2429"/>
                 </a:solidFill>
@@ -7299,7 +12039,7 @@
               </a:rPr>
               <a:t>Robustness under real use</a:t>
             </a:r>
-            <a:endParaRPr lang="en-US" sz="1500" dirty="0"/>
+            <a:endParaRPr lang="en-US" sz="1800" dirty="0"/>
           </a:p>
         </p:txBody>
       </p:sp>
@@ -7312,7 +12052,7 @@
         <p:spPr>
           <a:xfrm>
             <a:off x="8402117" y="3200400"/>
-            <a:ext cx="2875178" cy="1280160"/>
+            <a:ext cx="2875178" cy="1645920"/>
           </a:xfrm>
           <a:prstGeom prst="rect">
             <a:avLst/>
@@ -7331,7 +12071,7 @@
               <a:buNone/>
             </a:pPr>
             <a:r>
-              <a:rPr lang="en-US" sz="1250" dirty="0">
+              <a:rPr lang="en-US" sz="1800" dirty="0">
                 <a:solidFill>
                   <a:srgbClr val="6B7280"/>
                 </a:solidFill>
@@ -7341,7 +12081,7 @@
               </a:rPr>
               <a:t>The design supports the queries, transactions, and volume of data the organization will actually throw at it.</a:t>
             </a:r>
-            <a:endParaRPr lang="en-US" sz="1250" dirty="0"/>
+            <a:endParaRPr lang="en-US" sz="1800" dirty="0"/>
           </a:p>
         </p:txBody>
       </p:sp>
@@ -7353,8 +12093,8 @@
         </p:nvSpPr>
         <p:spPr>
           <a:xfrm>
-            <a:off x="640080" y="4892040"/>
-            <a:ext cx="10911535" cy="1143000"/>
+            <a:off x="640080" y="5074920"/>
+            <a:ext cx="10911535" cy="1371600"/>
           </a:xfrm>
           <a:prstGeom prst="roundRect">
             <a:avLst>
@@ -7380,7 +12120,7 @@
         </p:nvSpPr>
         <p:spPr>
           <a:xfrm>
-            <a:off x="896112" y="5038344"/>
+            <a:off x="896112" y="5221224"/>
             <a:ext cx="10399471" cy="274320"/>
           </a:xfrm>
           <a:prstGeom prst="rect">
@@ -7397,7 +12137,7 @@
               <a:buNone/>
             </a:pPr>
             <a:r>
-              <a:rPr lang="en-US" sz="1100" b="1" spc="200" kern="0" dirty="0">
+              <a:rPr lang="en-US" sz="1200" b="1" spc="200" kern="0" dirty="0">
                 <a:solidFill>
                   <a:srgbClr val="8A5A12"/>
                 </a:solidFill>
@@ -7407,7 +12147,7 @@
               </a:rPr>
               <a:t>WARNING</a:t>
             </a:r>
-            <a:endParaRPr lang="en-US" sz="1100" dirty="0"/>
+            <a:endParaRPr lang="en-US" sz="1200" dirty="0"/>
           </a:p>
         </p:txBody>
       </p:sp>
@@ -7419,8 +12159,8 @@
         </p:nvSpPr>
         <p:spPr>
           <a:xfrm>
-            <a:off x="896112" y="5349240"/>
-            <a:ext cx="10399471" cy="521208"/>
+            <a:off x="896112" y="5532120"/>
+            <a:ext cx="10399471" cy="800000"/>
           </a:xfrm>
           <a:prstGeom prst="rect">
             <a:avLst/>
@@ -7439,7 +12179,7 @@
               <a:buNone/>
             </a:pPr>
             <a:r>
-              <a:rPr lang="en-US" sz="1300" dirty="0">
+              <a:rPr lang="en-US" sz="1800" dirty="0">
                 <a:solidFill>
                   <a:srgbClr val="1F2429"/>
                 </a:solidFill>
@@ -7449,7 +12189,7 @@
               </a:rPr>
               <a:t>Relational database design is not the same as “writing SQL.” Syntactically perfect CREATE TABLE statements can still represent the business incorrectly — SQL syntax accepts it without complaint; design discipline catches it anyway.</a:t>
             </a:r>
-            <a:endParaRPr lang="en-US" sz="1300" dirty="0"/>
+            <a:endParaRPr lang="en-US" sz="1800" dirty="0"/>
           </a:p>
         </p:txBody>
       </p:sp>
@@ -7478,7 +12218,7 @@
               <a:buNone/>
             </a:pPr>
             <a:r>
-              <a:rPr lang="en-US" sz="1000" u="sng" dirty="0">
+              <a:rPr lang="en-US" sz="1200" u="sng" dirty="0">
                 <a:solidFill>
                   <a:srgbClr val="8A939B"/>
                 </a:solidFill>
@@ -7499,7 +12239,7 @@
               <a:buNone/>
             </a:pPr>
             <a:r>
-              <a:rPr lang="en-US" sz="1000" dirty="0">
+              <a:rPr lang="en-US" sz="1200" dirty="0">
                 <a:solidFill>
                   <a:srgbClr val="8A939B"/>
                 </a:solidFill>
@@ -7507,9 +12247,9 @@
                 <a:ea typeface="Calibri" pitchFamily="34" charset="-122"/>
                 <a:cs typeface="Calibri" pitchFamily="34" charset="-120"/>
               </a:rPr>
-              <a:t>  ·  7</a:t>
-            </a:r>
-            <a:endParaRPr lang="en-US" sz="1000" dirty="0"/>
+              <a:t>  ·  8</a:t>
+            </a:r>
+            <a:endParaRPr lang="en-US" sz="1200" dirty="0"/>
           </a:p>
         </p:txBody>
       </p:sp>
@@ -7655,7 +12395,7 @@
               <a:buChar char="•"/>
             </a:pPr>
             <a:r>
-              <a:rPr lang="en-US" sz="1350" dirty="0">
+              <a:rPr lang="en-US" sz="1800" dirty="0">
                 <a:solidFill>
                   <a:srgbClr val="1F2429"/>
                 </a:solidFill>
@@ -7665,7 +12405,7 @@
               </a:rPr>
               <a:t>Every strong entity type becomes a relation; the entity's identifying attribute becomes the primary key.</a:t>
             </a:r>
-            <a:endParaRPr lang="en-US" sz="1350" dirty="0"/>
+            <a:endParaRPr lang="en-US" sz="1800" dirty="0"/>
           </a:p>
           <a:p>
             <a:pPr marL="228600" indent="-228600">
@@ -7679,7 +12419,7 @@
               <a:buChar char="•"/>
             </a:pPr>
             <a:r>
-              <a:rPr lang="en-US" sz="1350" dirty="0">
+              <a:rPr lang="en-US" sz="1800" dirty="0">
                 <a:solidFill>
                   <a:srgbClr val="1F2429"/>
                 </a:solidFill>
@@ -7689,7 +12429,7 @@
               </a:rPr>
               <a:t>Every simple attribute becomes a column of that relation.</a:t>
             </a:r>
-            <a:endParaRPr lang="en-US" sz="1350" dirty="0"/>
+            <a:endParaRPr lang="en-US" sz="1800" dirty="0"/>
           </a:p>
           <a:p>
             <a:pPr marL="228600" indent="-228600">
@@ -7703,7 +12443,7 @@
               <a:buChar char="•"/>
             </a:pPr>
             <a:r>
-              <a:rPr lang="en-US" sz="1350" dirty="0">
+              <a:rPr lang="en-US" sz="1800" dirty="0">
                 <a:solidFill>
                   <a:srgbClr val="1F2429"/>
                 </a:solidFill>
@@ -7713,7 +12453,7 @@
               </a:rPr>
               <a:t>Every relationship type becomes a foreign key (1:1, 1:N) or an entirely new relation (M:N) — the precise rule depends on cardinality, covered fully in Lecture 12.</a:t>
             </a:r>
-            <a:endParaRPr lang="en-US" sz="1350" dirty="0"/>
+            <a:endParaRPr lang="en-US" sz="1800" dirty="0"/>
           </a:p>
         </p:txBody>
       </p:sp>
@@ -7726,7 +12466,7 @@
         <p:spPr>
           <a:xfrm>
             <a:off x="6309360" y="1691640"/>
-            <a:ext cx="2011680" cy="1609344"/>
+            <a:ext cx="2011680" cy="2286000"/>
           </a:xfrm>
           <a:prstGeom prst="roundRect">
             <a:avLst>
@@ -7811,7 +12551,7 @@
               <a:buNone/>
             </a:pPr>
             <a:r>
-              <a:rPr lang="en-US" sz="1300" b="1" dirty="0">
+              <a:rPr lang="en-US" sz="1800" b="1" dirty="0">
                 <a:solidFill>
                   <a:srgbClr val="14181C"/>
                 </a:solidFill>
@@ -7821,7 +12561,7 @@
               </a:rPr>
               <a:t>Branch</a:t>
             </a:r>
-            <a:endParaRPr lang="en-US" sz="1300" dirty="0"/>
+            <a:endParaRPr lang="en-US" sz="1800" dirty="0"/>
           </a:p>
         </p:txBody>
       </p:sp>
@@ -7834,7 +12574,7 @@
         <p:spPr>
           <a:xfrm>
             <a:off x="6455664" y="2130552"/>
-            <a:ext cx="1737360" cy="1097280"/>
+            <a:ext cx="1737360" cy="1600200"/>
           </a:xfrm>
           <a:prstGeom prst="rect">
             <a:avLst/>
@@ -7856,7 +12596,7 @@
               <a:buNone/>
             </a:pPr>
             <a:r>
-              <a:rPr lang="en-US" sz="1150" b="1" u="sng" dirty="0">
+              <a:rPr lang="en-US" sz="1800" b="1" u="sng" dirty="0">
                 <a:solidFill>
                   <a:srgbClr val="1F2429"/>
                 </a:solidFill>
@@ -7866,7 +12606,7 @@
               </a:rPr>
               <a:t>branchNo</a:t>
             </a:r>
-            <a:endParaRPr lang="en-US" sz="1150" dirty="0"/>
+            <a:endParaRPr lang="en-US" sz="1800" dirty="0"/>
           </a:p>
           <a:p>
             <a:pPr indent="0" marL="0">
@@ -7879,7 +12619,7 @@
               <a:buNone/>
             </a:pPr>
             <a:r>
-              <a:rPr lang="en-US" sz="1150" dirty="0">
+              <a:rPr lang="en-US" sz="1800" dirty="0">
                 <a:solidFill>
                   <a:srgbClr val="1F2429"/>
                 </a:solidFill>
@@ -7889,7 +12629,7 @@
               </a:rPr>
               <a:t>street</a:t>
             </a:r>
-            <a:endParaRPr lang="en-US" sz="1150" dirty="0"/>
+            <a:endParaRPr lang="en-US" sz="1800" dirty="0"/>
           </a:p>
           <a:p>
             <a:pPr indent="0" marL="0">
@@ -7902,7 +12642,7 @@
               <a:buNone/>
             </a:pPr>
             <a:r>
-              <a:rPr lang="en-US" sz="1150" dirty="0">
+              <a:rPr lang="en-US" sz="1800" dirty="0">
                 <a:solidFill>
                   <a:srgbClr val="1F2429"/>
                 </a:solidFill>
@@ -7912,7 +12652,7 @@
               </a:rPr>
               <a:t>city</a:t>
             </a:r>
-            <a:endParaRPr lang="en-US" sz="1150" dirty="0"/>
+            <a:endParaRPr lang="en-US" sz="1800" dirty="0"/>
           </a:p>
           <a:p>
             <a:pPr indent="0" marL="0">
@@ -7925,7 +12665,7 @@
               <a:buNone/>
             </a:pPr>
             <a:r>
-              <a:rPr lang="en-US" sz="1150" dirty="0">
+              <a:rPr lang="en-US" sz="1800" dirty="0">
                 <a:solidFill>
                   <a:srgbClr val="1F2429"/>
                 </a:solidFill>
@@ -7935,7 +12675,7 @@
               </a:rPr>
               <a:t>postcode</a:t>
             </a:r>
-            <a:endParaRPr lang="en-US" sz="1150" dirty="0"/>
+            <a:endParaRPr lang="en-US" sz="1800" dirty="0"/>
           </a:p>
         </p:txBody>
       </p:sp>
@@ -7947,7 +12687,7 @@
         </p:nvSpPr>
         <p:spPr>
           <a:xfrm>
-            <a:off x="6309360" y="3063240"/>
+            <a:off x="6309360" y="4069080"/>
             <a:ext cx="2011680" cy="274320"/>
           </a:xfrm>
           <a:prstGeom prst="rect">
@@ -7964,7 +12704,7 @@
               <a:buNone/>
             </a:pPr>
             <a:r>
-              <a:rPr lang="en-US" sz="1000" i="1" dirty="0">
+              <a:rPr lang="en-US" sz="1800" i="1" dirty="0">
                 <a:solidFill>
                   <a:srgbClr val="6B7280"/>
                 </a:solidFill>
@@ -7974,7 +12714,7 @@
               </a:rPr>
               <a:t>Conceptual — an ER entity type</a:t>
             </a:r>
-            <a:endParaRPr lang="en-US" sz="1000" dirty="0"/>
+            <a:endParaRPr lang="en-US" sz="1800" dirty="0"/>
           </a:p>
         </p:txBody>
       </p:sp>
@@ -7986,8 +12726,8 @@
         </p:nvSpPr>
         <p:spPr>
           <a:xfrm>
-            <a:off x="8595360" y="1691640"/>
-            <a:ext cx="2953512" cy="292608"/>
+            <a:off x="8380000" y="1691640"/>
+            <a:ext cx="3450000" cy="640080"/>
           </a:xfrm>
           <a:prstGeom prst="rect">
             <a:avLst/>
@@ -8003,7 +12743,7 @@
               <a:buNone/>
             </a:pPr>
             <a:r>
-              <a:rPr lang="en-US" sz="1250" b="1" dirty="0">
+              <a:rPr lang="en-US" sz="1800" b="1" dirty="0">
                 <a:solidFill>
                   <a:srgbClr val="8B7FD9"/>
                 </a:solidFill>
@@ -8013,7 +12753,7 @@
               </a:rPr>
               <a:t>Logical — the mapped relation</a:t>
             </a:r>
-            <a:endParaRPr lang="en-US" sz="1250" dirty="0"/>
+            <a:endParaRPr lang="en-US" sz="1800" dirty="0"/>
           </a:p>
         </p:txBody>
       </p:sp>
@@ -8032,18 +12772,18 @@
           </p:nvPr>
         </p:nvGraphicFramePr>
         <p:xfrm>
-          <a:off x="8595360" y="2039112"/>
-          <a:ext cx="2953512" cy="914400"/>
+          <a:off x="8380000" y="2423160"/>
+          <a:ext cx="3450000" cy="914400"/>
         </p:xfrm>
         <a:graphic>
           <a:graphicData uri="http://schemas.openxmlformats.org/drawingml/2006/table">
             <a:tbl>
               <a:tblPr/>
               <a:tblGrid>
-                <a:gridCol w="738378"/>
-                <a:gridCol w="738378"/>
-                <a:gridCol w="738378"/>
-                <a:gridCol w="738378"/>
+                <a:gridCol w="1000000"/>
+                <a:gridCol w="760000"/>
+                <a:gridCol w="810000"/>
+                <a:gridCol w="880000"/>
               </a:tblGrid>
               <a:tr h="365760">
                 <a:tc>
@@ -8055,7 +12795,7 @@
                         <a:buNone/>
                       </a:pPr>
                       <a:r>
-                        <a:rPr lang="en-US" sz="900" b="1" dirty="0">
+                        <a:rPr lang="en-US" sz="1400" b="1" dirty="0">
                           <a:solidFill>
                             <a:srgbClr val="FFFFFF"/>
                           </a:solidFill>
@@ -8065,7 +12805,7 @@
                         </a:rPr>
                         <a:t>branchNo</a:t>
                       </a:r>
-                      <a:endParaRPr lang="en-US" sz="900" dirty="0">
+                      <a:endParaRPr lang="en-US" sz="1400" dirty="0">
                         <a:latin typeface="Calibri" charset="0"/>
                         <a:ea typeface="Calibri" charset="0"/>
                         <a:cs typeface="Calibri" charset="0"/>
@@ -8123,7 +12863,7 @@
                         <a:buNone/>
                       </a:pPr>
                       <a:r>
-                        <a:rPr lang="en-US" sz="900" b="1" dirty="0">
+                        <a:rPr lang="en-US" sz="1400" b="1" dirty="0">
                           <a:solidFill>
                             <a:srgbClr val="FFFFFF"/>
                           </a:solidFill>
@@ -8133,7 +12873,7 @@
                         </a:rPr>
                         <a:t>street</a:t>
                       </a:r>
-                      <a:endParaRPr lang="en-US" sz="900" dirty="0">
+                      <a:endParaRPr lang="en-US" sz="1400" dirty="0">
                         <a:latin typeface="Calibri" charset="0"/>
                         <a:ea typeface="Calibri" charset="0"/>
                         <a:cs typeface="Calibri" charset="0"/>
@@ -8191,7 +12931,7 @@
                         <a:buNone/>
                       </a:pPr>
                       <a:r>
-                        <a:rPr lang="en-US" sz="900" b="1" dirty="0">
+                        <a:rPr lang="en-US" sz="1400" b="1" dirty="0">
                           <a:solidFill>
                             <a:srgbClr val="FFFFFF"/>
                           </a:solidFill>
@@ -8201,7 +12941,7 @@
                         </a:rPr>
                         <a:t>city</a:t>
                       </a:r>
-                      <a:endParaRPr lang="en-US" sz="900" dirty="0">
+                      <a:endParaRPr lang="en-US" sz="1400" dirty="0">
                         <a:latin typeface="Calibri" charset="0"/>
                         <a:ea typeface="Calibri" charset="0"/>
                         <a:cs typeface="Calibri" charset="0"/>
@@ -8259,7 +12999,7 @@
                         <a:buNone/>
                       </a:pPr>
                       <a:r>
-                        <a:rPr lang="en-US" sz="900" b="1" dirty="0">
+                        <a:rPr lang="en-US" sz="1400" b="1" dirty="0">
                           <a:solidFill>
                             <a:srgbClr val="FFFFFF"/>
                           </a:solidFill>
@@ -8269,7 +13009,7 @@
                         </a:rPr>
                         <a:t>postcode</a:t>
                       </a:r>
-                      <a:endParaRPr lang="en-US" sz="900" dirty="0">
+                      <a:endParaRPr lang="en-US" sz="1400" dirty="0">
                         <a:latin typeface="Calibri" charset="0"/>
                         <a:ea typeface="Calibri" charset="0"/>
                         <a:cs typeface="Calibri" charset="0"/>
@@ -8329,7 +13069,7 @@
                         <a:buNone/>
                       </a:pPr>
                       <a:r>
-                        <a:rPr lang="en-US" sz="900" dirty="0">
+                        <a:rPr lang="en-US" sz="1400" dirty="0">
                           <a:solidFill>
                             <a:srgbClr val="1F2429"/>
                           </a:solidFill>
@@ -8339,7 +13079,7 @@
                         </a:rPr>
                         <a:t>B003</a:t>
                       </a:r>
-                      <a:endParaRPr lang="en-US" sz="900" dirty="0">
+                      <a:endParaRPr lang="en-US" sz="1400" dirty="0">
                         <a:latin typeface="Calibri" charset="0"/>
                         <a:ea typeface="Calibri" charset="0"/>
                         <a:cs typeface="Calibri" charset="0"/>
@@ -8397,7 +13137,7 @@
                         <a:buNone/>
                       </a:pPr>
                       <a:r>
-                        <a:rPr lang="en-US" sz="900" dirty="0">
+                        <a:rPr lang="en-US" sz="1400" dirty="0">
                           <a:solidFill>
                             <a:srgbClr val="1F2429"/>
                           </a:solidFill>
@@ -8407,7 +13147,7 @@
                         </a:rPr>
                         <a:t>163 Main St</a:t>
                       </a:r>
-                      <a:endParaRPr lang="en-US" sz="900" dirty="0">
+                      <a:endParaRPr lang="en-US" sz="1400" dirty="0">
                         <a:latin typeface="Calibri" charset="0"/>
                         <a:ea typeface="Calibri" charset="0"/>
                         <a:cs typeface="Calibri" charset="0"/>
@@ -8465,7 +13205,7 @@
                         <a:buNone/>
                       </a:pPr>
                       <a:r>
-                        <a:rPr lang="en-US" sz="900" dirty="0">
+                        <a:rPr lang="en-US" sz="1400" dirty="0">
                           <a:solidFill>
                             <a:srgbClr val="1F2429"/>
                           </a:solidFill>
@@ -8475,7 +13215,7 @@
                         </a:rPr>
                         <a:t>Lahore</a:t>
                       </a:r>
-                      <a:endParaRPr lang="en-US" sz="900" dirty="0">
+                      <a:endParaRPr lang="en-US" sz="1400" dirty="0">
                         <a:latin typeface="Calibri" charset="0"/>
                         <a:ea typeface="Calibri" charset="0"/>
                         <a:cs typeface="Calibri" charset="0"/>
@@ -8533,7 +13273,7 @@
                         <a:buNone/>
                       </a:pPr>
                       <a:r>
-                        <a:rPr lang="en-US" sz="900" dirty="0">
+                        <a:rPr lang="en-US" sz="1400" dirty="0">
                           <a:solidFill>
                             <a:srgbClr val="1F2429"/>
                           </a:solidFill>
@@ -8543,7 +13283,7 @@
                         </a:rPr>
                         <a:t>54000</a:t>
                       </a:r>
-                      <a:endParaRPr lang="en-US" sz="900" dirty="0">
+                      <a:endParaRPr lang="en-US" sz="1400" dirty="0">
                         <a:latin typeface="Calibri" charset="0"/>
                         <a:ea typeface="Calibri" charset="0"/>
                         <a:cs typeface="Calibri" charset="0"/>
@@ -8603,7 +13343,7 @@
                         <a:buNone/>
                       </a:pPr>
                       <a:r>
-                        <a:rPr lang="en-US" sz="900" dirty="0">
+                        <a:rPr lang="en-US" sz="1400" dirty="0">
                           <a:solidFill>
                             <a:srgbClr val="1F2429"/>
                           </a:solidFill>
@@ -8613,7 +13353,7 @@
                         </a:rPr>
                         <a:t>B005</a:t>
                       </a:r>
-                      <a:endParaRPr lang="en-US" sz="900" dirty="0">
+                      <a:endParaRPr lang="en-US" sz="1400" dirty="0">
                         <a:latin typeface="Calibri" charset="0"/>
                         <a:ea typeface="Calibri" charset="0"/>
                         <a:cs typeface="Calibri" charset="0"/>
@@ -8671,7 +13411,7 @@
                         <a:buNone/>
                       </a:pPr>
                       <a:r>
-                        <a:rPr lang="en-US" sz="900" dirty="0">
+                        <a:rPr lang="en-US" sz="1400" dirty="0">
                           <a:solidFill>
                             <a:srgbClr val="1F2429"/>
                           </a:solidFill>
@@ -8681,7 +13421,7 @@
                         </a:rPr>
                         <a:t>22 Deer Rd</a:t>
                       </a:r>
-                      <a:endParaRPr lang="en-US" sz="900" dirty="0">
+                      <a:endParaRPr lang="en-US" sz="1400" dirty="0">
                         <a:latin typeface="Calibri" charset="0"/>
                         <a:ea typeface="Calibri" charset="0"/>
                         <a:cs typeface="Calibri" charset="0"/>
@@ -8739,7 +13479,7 @@
                         <a:buNone/>
                       </a:pPr>
                       <a:r>
-                        <a:rPr lang="en-US" sz="900" dirty="0">
+                        <a:rPr lang="en-US" sz="1400" dirty="0">
                           <a:solidFill>
                             <a:srgbClr val="1F2429"/>
                           </a:solidFill>
@@ -8749,7 +13489,7 @@
                         </a:rPr>
                         <a:t>Karachi</a:t>
                       </a:r>
-                      <a:endParaRPr lang="en-US" sz="900" dirty="0">
+                      <a:endParaRPr lang="en-US" sz="1400" dirty="0">
                         <a:latin typeface="Calibri" charset="0"/>
                         <a:ea typeface="Calibri" charset="0"/>
                         <a:cs typeface="Calibri" charset="0"/>
@@ -8807,7 +13547,7 @@
                         <a:buNone/>
                       </a:pPr>
                       <a:r>
-                        <a:rPr lang="en-US" sz="900" dirty="0">
+                        <a:rPr lang="en-US" sz="1400" dirty="0">
                           <a:solidFill>
                             <a:srgbClr val="1F2429"/>
                           </a:solidFill>
@@ -8817,7 +13557,7 @@
                         </a:rPr>
                         <a:t>74200</a:t>
                       </a:r>
-                      <a:endParaRPr lang="en-US" sz="900" dirty="0">
+                      <a:endParaRPr lang="en-US" sz="1400" dirty="0">
                         <a:latin typeface="Calibri" charset="0"/>
                         <a:ea typeface="Calibri" charset="0"/>
                         <a:cs typeface="Calibri" charset="0"/>
@@ -8879,7 +13619,7 @@
         </p:nvSpPr>
         <p:spPr>
           <a:xfrm>
-            <a:off x="640080" y="4297680"/>
+            <a:off x="640080" y="4754880"/>
             <a:ext cx="10911535" cy="914400"/>
           </a:xfrm>
           <a:prstGeom prst="rect">
@@ -8899,7 +13639,7 @@
               <a:buNone/>
             </a:pPr>
             <a:r>
-              <a:rPr lang="en-US" sz="1350" i="1" dirty="0">
+              <a:rPr lang="en-US" sz="1800" i="1" dirty="0">
                 <a:solidFill>
                   <a:srgbClr val="6B7280"/>
                 </a:solidFill>
@@ -8909,7 +13649,7 @@
               </a:rPr>
               <a:t>Nothing was lost — every attribute became a column and the identifying attribute became the primary key — but nothing was added either: no data type, no index, no storage engine.</a:t>
             </a:r>
-            <a:endParaRPr lang="en-US" sz="1350" dirty="0"/>
+            <a:endParaRPr lang="en-US" sz="1800" dirty="0"/>
           </a:p>
         </p:txBody>
       </p:sp>
@@ -8938,7 +13678,7 @@
               <a:buNone/>
             </a:pPr>
             <a:r>
-              <a:rPr lang="en-US" sz="1000" u="sng" dirty="0">
+              <a:rPr lang="en-US" sz="1200" u="sng" dirty="0">
                 <a:solidFill>
                   <a:srgbClr val="8A939B"/>
                 </a:solidFill>
@@ -8959,7 +13699,7 @@
               <a:buNone/>
             </a:pPr>
             <a:r>
-              <a:rPr lang="en-US" sz="1000" dirty="0">
+              <a:rPr lang="en-US" sz="1200" dirty="0">
                 <a:solidFill>
                   <a:srgbClr val="8A939B"/>
                 </a:solidFill>
@@ -8967,9 +13707,9 @@
                 <a:ea typeface="Calibri" pitchFamily="34" charset="-122"/>
                 <a:cs typeface="Calibri" pitchFamily="34" charset="-120"/>
               </a:rPr>
-              <a:t>  ·  8</a:t>
-            </a:r>
-            <a:endParaRPr lang="en-US" sz="1000" dirty="0"/>
+              <a:t>  ·  11</a:t>
+            </a:r>
+            <a:endParaRPr lang="en-US" sz="1200" dirty="0"/>
           </a:p>
         </p:txBody>
       </p:sp>
@@ -9115,7 +13855,7 @@
               <a:buChar char="•"/>
             </a:pPr>
             <a:r>
-              <a:rPr lang="en-US" sz="1400" dirty="0">
+              <a:rPr lang="en-US" sz="1800" dirty="0">
                 <a:solidFill>
                   <a:srgbClr val="1F2429"/>
                 </a:solidFill>
@@ -9125,7 +13865,7 @@
               </a:rPr>
               <a:t>Concrete data types for every attribute — DECIMAL(8,2), INTEGER, or NUMERIC?</a:t>
             </a:r>
-            <a:endParaRPr lang="en-US" sz="1400" dirty="0"/>
+            <a:endParaRPr lang="en-US" sz="1800" dirty="0"/>
           </a:p>
           <a:p>
             <a:pPr marL="228600" indent="-228600">
@@ -9139,7 +13879,7 @@
               <a:buChar char="•"/>
             </a:pPr>
             <a:r>
-              <a:rPr lang="en-US" sz="1400" dirty="0">
+              <a:rPr lang="en-US" sz="1800" dirty="0">
                 <a:solidFill>
                   <a:srgbClr val="1F2429"/>
                 </a:solidFill>
@@ -9149,7 +13889,7 @@
               </a:rPr>
               <a:t>Column-level constraints — NOT NULL, CHECK constraints enforcing domain rules.</a:t>
             </a:r>
-            <a:endParaRPr lang="en-US" sz="1400" dirty="0"/>
+            <a:endParaRPr lang="en-US" sz="1800" dirty="0"/>
           </a:p>
           <a:p>
             <a:pPr marL="228600" indent="-228600">
@@ -9163,7 +13903,7 @@
               <a:buChar char="•"/>
             </a:pPr>
             <a:r>
-              <a:rPr lang="en-US" sz="1400" dirty="0">
+              <a:rPr lang="en-US" sz="1800" dirty="0">
                 <a:solidFill>
                   <a:srgbClr val="1F2429"/>
                 </a:solidFill>
@@ -9173,7 +13913,7 @@
               </a:rPr>
               <a:t>Indexing strategy — primary keys and foreign keys, at minimum.</a:t>
             </a:r>
-            <a:endParaRPr lang="en-US" sz="1400" dirty="0"/>
+            <a:endParaRPr lang="en-US" sz="1800" dirty="0"/>
           </a:p>
           <a:p>
             <a:pPr marL="228600" indent="-228600">
@@ -9187,7 +13927,7 @@
               <a:buChar char="•"/>
             </a:pPr>
             <a:r>
-              <a:rPr lang="en-US" sz="1400" dirty="0">
+              <a:rPr lang="en-US" sz="1800" dirty="0">
                 <a:solidFill>
                   <a:srgbClr val="1F2429"/>
                 </a:solidFill>
@@ -9197,7 +13937,7 @@
               </a:rPr>
               <a:t>Naming conventions and DBMS-specific CREATE TABLE syntax.</a:t>
             </a:r>
-            <a:endParaRPr lang="en-US" sz="1400" dirty="0"/>
+            <a:endParaRPr lang="en-US" sz="1800" dirty="0"/>
           </a:p>
         </p:txBody>
       </p:sp>
@@ -9210,7 +13950,7 @@
         <p:spPr>
           <a:xfrm>
             <a:off x="6492240" y="1737360"/>
-            <a:ext cx="4846320" cy="2651760"/>
+            <a:ext cx="4846320" cy="2971800"/>
           </a:xfrm>
           <a:prstGeom prst="roundRect">
             <a:avLst>
@@ -9232,7 +13972,7 @@
         <p:spPr>
           <a:xfrm>
             <a:off x="6766560" y="1920240"/>
-            <a:ext cx="4297680" cy="2286000"/>
+            <a:ext cx="4297680" cy="2700000"/>
           </a:xfrm>
           <a:prstGeom prst="rect">
             <a:avLst/>
@@ -9251,7 +13991,7 @@
               <a:buNone/>
             </a:pPr>
             <a:r>
-              <a:rPr lang="en-US" sz="1250" dirty="0">
+              <a:rPr lang="en-US" sz="1400" dirty="0">
                 <a:solidFill>
                   <a:srgbClr val="2FE6C4"/>
                 </a:solidFill>
@@ -9261,7 +14001,7 @@
               </a:rPr>
               <a:t>CREATE TABLE Branch (</a:t>
             </a:r>
-            <a:endParaRPr lang="en-US" sz="1250" dirty="0"/>
+            <a:endParaRPr lang="en-US" sz="1400" dirty="0"/>
           </a:p>
           <a:p>
             <a:pPr algn="l" indent="0" marL="0">
@@ -9271,7 +14011,7 @@
               <a:buNone/>
             </a:pPr>
             <a:r>
-              <a:rPr lang="en-US" sz="1250" dirty="0">
+              <a:rPr lang="en-US" sz="1400" dirty="0">
                 <a:solidFill>
                   <a:srgbClr val="2FE6C4"/>
                 </a:solidFill>
@@ -9281,7 +14021,7 @@
               </a:rPr>
               <a:t>    branchNo  CHAR(4)      NOT NULL,</a:t>
             </a:r>
-            <a:endParaRPr lang="en-US" sz="1250" dirty="0"/>
+            <a:endParaRPr lang="en-US" sz="1400" dirty="0"/>
           </a:p>
           <a:p>
             <a:pPr algn="l" indent="0" marL="0">
@@ -9291,7 +14031,7 @@
               <a:buNone/>
             </a:pPr>
             <a:r>
-              <a:rPr lang="en-US" sz="1250" dirty="0">
+              <a:rPr lang="en-US" sz="1400" dirty="0">
                 <a:solidFill>
                   <a:srgbClr val="2FE6C4"/>
                 </a:solidFill>
@@ -9301,7 +14041,7 @@
               </a:rPr>
               <a:t>    street    VARCHAR(40)  NOT NULL,</a:t>
             </a:r>
-            <a:endParaRPr lang="en-US" sz="1250" dirty="0"/>
+            <a:endParaRPr lang="en-US" sz="1400" dirty="0"/>
           </a:p>
           <a:p>
             <a:pPr algn="l" indent="0" marL="0">
@@ -9311,7 +14051,7 @@
               <a:buNone/>
             </a:pPr>
             <a:r>
-              <a:rPr lang="en-US" sz="1250" dirty="0">
+              <a:rPr lang="en-US" sz="1400" dirty="0">
                 <a:solidFill>
                   <a:srgbClr val="2FE6C4"/>
                 </a:solidFill>
@@ -9321,7 +14061,7 @@
               </a:rPr>
               <a:t>    city      VARCHAR(30)  NOT NULL,</a:t>
             </a:r>
-            <a:endParaRPr lang="en-US" sz="1250" dirty="0"/>
+            <a:endParaRPr lang="en-US" sz="1400" dirty="0"/>
           </a:p>
           <a:p>
             <a:pPr algn="l" indent="0" marL="0">
@@ -9331,7 +14071,7 @@
               <a:buNone/>
             </a:pPr>
             <a:r>
-              <a:rPr lang="en-US" sz="1250" dirty="0">
+              <a:rPr lang="en-US" sz="1400" dirty="0">
                 <a:solidFill>
                   <a:srgbClr val="2FE6C4"/>
                 </a:solidFill>
@@ -9341,7 +14081,7 @@
               </a:rPr>
               <a:t>    postcode  CHAR(5)      NOT NULL,</a:t>
             </a:r>
-            <a:endParaRPr lang="en-US" sz="1250" dirty="0"/>
+            <a:endParaRPr lang="en-US" sz="1400" dirty="0"/>
           </a:p>
           <a:p>
             <a:pPr algn="l" indent="0" marL="0">
@@ -9351,7 +14091,7 @@
               <a:buNone/>
             </a:pPr>
             <a:r>
-              <a:rPr lang="en-US" sz="1250" dirty="0">
+              <a:rPr lang="en-US" sz="1400" dirty="0">
                 <a:solidFill>
                   <a:srgbClr val="2FE6C4"/>
                 </a:solidFill>
@@ -9361,7 +14101,7 @@
               </a:rPr>
               <a:t>    PRIMARY KEY (branchNo)</a:t>
             </a:r>
-            <a:endParaRPr lang="en-US" sz="1250" dirty="0"/>
+            <a:endParaRPr lang="en-US" sz="1400" dirty="0"/>
           </a:p>
           <a:p>
             <a:pPr algn="l" indent="0" marL="0">
@@ -9371,7 +14111,7 @@
               <a:buNone/>
             </a:pPr>
             <a:r>
-              <a:rPr lang="en-US" sz="1250" dirty="0">
+              <a:rPr lang="en-US" sz="1400" dirty="0">
                 <a:solidFill>
                   <a:srgbClr val="2FE6C4"/>
                 </a:solidFill>
@@ -9381,7 +14121,7 @@
               </a:rPr>
               <a:t>);</a:t>
             </a:r>
-            <a:endParaRPr lang="en-US" sz="1250" dirty="0"/>
+            <a:endParaRPr lang="en-US" sz="1400" dirty="0"/>
           </a:p>
         </p:txBody>
       </p:sp>
@@ -9393,7 +14133,7 @@
         </p:nvSpPr>
         <p:spPr>
           <a:xfrm>
-            <a:off x="640080" y="4663440"/>
+            <a:off x="640080" y="4846320"/>
             <a:ext cx="10911535" cy="1188720"/>
           </a:xfrm>
           <a:prstGeom prst="roundRect">
@@ -9420,7 +14160,7 @@
         </p:nvSpPr>
         <p:spPr>
           <a:xfrm>
-            <a:off x="896112" y="4809744"/>
+            <a:off x="896112" y="4992624"/>
             <a:ext cx="10399471" cy="274320"/>
           </a:xfrm>
           <a:prstGeom prst="rect">
@@ -9437,7 +14177,7 @@
               <a:buNone/>
             </a:pPr>
             <a:r>
-              <a:rPr lang="en-US" sz="1100" b="1" spc="200" kern="0" dirty="0">
+              <a:rPr lang="en-US" sz="1200" b="1" spc="200" kern="0" dirty="0">
                 <a:solidFill>
                   <a:srgbClr val="2C4A8C"/>
                 </a:solidFill>
@@ -9447,7 +14187,7 @@
               </a:rPr>
               <a:t>NOTE</a:t>
             </a:r>
-            <a:endParaRPr lang="en-US" sz="1100" dirty="0"/>
+            <a:endParaRPr lang="en-US" sz="1200" dirty="0"/>
           </a:p>
         </p:txBody>
       </p:sp>
@@ -9459,7 +14199,7 @@
         </p:nvSpPr>
         <p:spPr>
           <a:xfrm>
-            <a:off x="896112" y="5120640"/>
+            <a:off x="896112" y="5303520"/>
             <a:ext cx="10399471" cy="566928"/>
           </a:xfrm>
           <a:prstGeom prst="rect">
@@ -9479,7 +14219,7 @@
               <a:buNone/>
             </a:pPr>
             <a:r>
-              <a:rPr lang="en-US" sz="1300" dirty="0">
+              <a:rPr lang="en-US" sz="1800" dirty="0">
                 <a:solidFill>
                   <a:srgbClr val="1F2429"/>
                 </a:solidFill>
@@ -9489,7 +14229,7 @@
               </a:rPr>
               <a:t>Connolly's textbook calls this final translation step physical database design — unlike the logical model, it is allowed, even expected, to differ between DBMS products and trade conceptual purity for performance.</a:t>
             </a:r>
-            <a:endParaRPr lang="en-US" sz="1300" dirty="0"/>
+            <a:endParaRPr lang="en-US" sz="1800" dirty="0"/>
           </a:p>
         </p:txBody>
       </p:sp>
@@ -9518,7 +14258,7 @@
               <a:buNone/>
             </a:pPr>
             <a:r>
-              <a:rPr lang="en-US" sz="1000" u="sng" dirty="0">
+              <a:rPr lang="en-US" sz="1200" u="sng" dirty="0">
                 <a:solidFill>
                   <a:srgbClr val="8A939B"/>
                 </a:solidFill>
@@ -9539,7 +14279,7 @@
               <a:buNone/>
             </a:pPr>
             <a:r>
-              <a:rPr lang="en-US" sz="1000" dirty="0">
+              <a:rPr lang="en-US" sz="1200" dirty="0">
                 <a:solidFill>
                   <a:srgbClr val="8A939B"/>
                 </a:solidFill>
@@ -9547,9 +14287,9 @@
                 <a:ea typeface="Calibri" pitchFamily="34" charset="-122"/>
                 <a:cs typeface="Calibri" pitchFamily="34" charset="-120"/>
               </a:rPr>
-              <a:t>  ·  9</a:t>
-            </a:r>
-            <a:endParaRPr lang="en-US" sz="1000" dirty="0"/>
+              <a:t>  ·  13</a:t>
+            </a:r>
+            <a:endParaRPr lang="en-US" sz="1200" dirty="0"/>
           </a:p>
         </p:txBody>
       </p:sp>
